--- a/deck/Transit_Guard_Pitch.pptx
+++ b/deck/Transit_Guard_Pitch.pptx
@@ -16,9 +16,10 @@
     <p:sldId id="264" r:id="rId10"/>
     <p:sldId id="265" r:id="rId11"/>
     <p:sldId id="266" r:id="rId12"/>
+    <p:sldId id="267" r:id="rId13"/>
   </p:sldIdLst>
   <p:notesMasterIdLst>
-    <p:notesMasterId r:id="rId13"/>
+    <p:notesMasterId r:id="rId14"/>
   </p:notesMasterIdLst>
   <p:sldSz cx="12192000" cy="6858000"/>
   <p:notesSz cx="6858000" cy="12192000"/>
@@ -947,7 +948,7 @@
           <a:p>
             <a:r>
               <a:rPr lang="en-US" dirty="0"/>
-              <a:t>Close on the tagline, then switch straight to the live demo.</a:t>
+              <a:t>Track 2 is the primary entry: the product monetizes on both sides of the marketplace and clears the $10 ARR/user bar by orders of magnitude. Track 1 cross-credit comes from the suite economics — the 85% AI-consumption reduction is a real, demoable percentage. Sponsor tools are positioned as wiring, not shipped integrations — be precise about that on stage.</a:t>
             </a:r>
             <a:endParaRPr lang="en-US" dirty="0"/>
           </a:p>
@@ -971,6 +972,94 @@
             <a:fld id="{F7021451-1387-4CA6-816F-3879F97B5CBC}" type="slidenum">
               <a:rPr lang="en-US"/>
               <a:t>11</a:t>
+            </a:fld>
+            <a:endParaRPr lang="en-US"/>
+          </a:p>
+        </p:txBody>
+      </p:sp>
+    </p:spTree>
+    <p:extLst>
+      <p:ext uri="{BB962C8B-B14F-4D97-AF65-F5344CB8AC3E}">
+        <p14:creationId xmlns:p14="http://schemas.microsoft.com/office/powerpoint/2010/main" val="1024086991"/>
+      </p:ext>
+    </p:extLst>
+  </p:cSld>
+  <p:clrMapOvr>
+    <a:masterClrMapping/>
+  </p:clrMapOvr>
+</p:notes>
+</file>
+
+<file path=ppt/notesSlides/notesSlide12.xml><?xml version="1.0" encoding="utf-8"?>
+<p:notes xmlns:a="http://schemas.openxmlformats.org/drawingml/2006/main" xmlns:r="http://schemas.openxmlformats.org/officeDocument/2006/relationships" xmlns:p="http://schemas.openxmlformats.org/presentationml/2006/main">
+  <p:cSld>
+    <p:spTree>
+      <p:nvGrpSpPr>
+        <p:cNvPr id="1" name=""/>
+        <p:cNvGrpSpPr/>
+        <p:nvPr/>
+      </p:nvGrpSpPr>
+      <p:grpSpPr>
+        <a:xfrm>
+          <a:off x="0" y="0"/>
+          <a:ext cx="0" cy="0"/>
+          <a:chOff x="0" y="0"/>
+          <a:chExt cx="0" cy="0"/>
+        </a:xfrm>
+      </p:grpSpPr>
+      <p:sp>
+        <p:nvSpPr>
+          <p:cNvPr id="2" name="Slide Image Placeholder 1"/>
+          <p:cNvSpPr>
+            <a:spLocks noGrp="1" noRot="1" noChangeAspect="1"/>
+          </p:cNvSpPr>
+          <p:nvPr>
+            <p:ph type="sldImg"/>
+          </p:nvPr>
+        </p:nvSpPr>
+        <p:spPr/>
+      </p:sp>
+      <p:sp>
+        <p:nvSpPr>
+          <p:cNvPr id="3" name="Notes Placeholder 2"/>
+          <p:cNvSpPr>
+            <a:spLocks noGrp="1"/>
+          </p:cNvSpPr>
+          <p:nvPr>
+            <p:ph type="body" idx="1"/>
+          </p:nvPr>
+        </p:nvSpPr>
+        <p:spPr/>
+        <p:txBody>
+          <a:bodyPr/>
+          <a:lstStyle/>
+          <a:p>
+            <a:r>
+              <a:rPr lang="en-US" dirty="0"/>
+              <a:t>Close on the tagline, then switch straight to the live demo.</a:t>
+            </a:r>
+            <a:endParaRPr lang="en-US" dirty="0"/>
+          </a:p>
+        </p:txBody>
+      </p:sp>
+      <p:sp>
+        <p:nvSpPr>
+          <p:cNvPr id="4" name="Slide Number Placeholder 3"/>
+          <p:cNvSpPr>
+            <a:spLocks noGrp="1"/>
+          </p:cNvSpPr>
+          <p:nvPr>
+            <p:ph type="sldNum" sz="quarter" idx="10"/>
+          </p:nvPr>
+        </p:nvSpPr>
+        <p:spPr/>
+        <p:txBody>
+          <a:bodyPr/>
+          <a:lstStyle/>
+          <a:p>
+            <a:fld id="{F7021451-1387-4CA6-816F-3879F97B5CBC}" type="slidenum">
+              <a:rPr lang="en-US"/>
+              <a:t>12</a:t>
             </a:fld>
             <a:endParaRPr lang="en-US"/>
           </a:p>
@@ -1299,7 +1388,7 @@
           <a:p>
             <a:r>
               <a:rPr lang="en-US" dirty="0"/>
-              <a:t>Everything on this slide exists and runs today. Two live wow-moments: the AI vendor search overriding a priority that would miss the need-by date, and the OCR reading a trilingual customs worksheet on-device and attaching it to TX-20481.</a:t>
+              <a:t>Everything on this slide exists and runs today. Live wow-moments: the AI route override, the carrier accepting a load and the leg appearing in the company chain, the docs-pack PDF, the label scan flipping docs to received — and the auto vendor substitution ("plan had Redline Haulage").</a:t>
             </a:r>
             <a:endParaRPr lang="en-US" dirty="0"/>
           </a:p>
@@ -3379,6 +3468,668 @@
     <p:bg>
       <p:bgPr>
         <a:solidFill>
+          <a:srgbClr val="FFFFFF"/>
+        </a:solidFill>
+      </p:bgPr>
+    </p:bg>
+    <p:spTree>
+      <p:nvGrpSpPr>
+        <p:cNvPr id="1" name=""/>
+        <p:cNvGrpSpPr/>
+        <p:nvPr/>
+      </p:nvGrpSpPr>
+      <p:grpSpPr>
+        <a:xfrm>
+          <a:off x="0" y="0"/>
+          <a:ext cx="0" cy="0"/>
+          <a:chOff x="0" y="0"/>
+          <a:chExt cx="0" cy="0"/>
+        </a:xfrm>
+      </p:grpSpPr>
+      <p:sp>
+        <p:nvSpPr>
+          <p:cNvPr id="2" name="Text 0"/>
+          <p:cNvSpPr/>
+          <p:nvPr/>
+        </p:nvSpPr>
+        <p:spPr>
+          <a:xfrm>
+            <a:off x="548640" y="411480"/>
+            <a:ext cx="11064240" cy="640080"/>
+          </a:xfrm>
+          <a:prstGeom prst="rect">
+            <a:avLst/>
+          </a:prstGeom>
+          <a:noFill/>
+          <a:ln/>
+        </p:spPr>
+        <p:txBody>
+          <a:bodyPr wrap="square" lIns="0" tIns="0" rIns="0" bIns="0" rtlCol="0" anchor="ctr"/>
+          <a:lstStyle/>
+          <a:p>
+            <a:pPr indent="0" marL="0">
+              <a:buNone/>
+            </a:pPr>
+            <a:r>
+              <a:rPr lang="en-US" sz="3400" b="1" dirty="0">
+                <a:solidFill>
+                  <a:srgbClr val="0F172A"/>
+                </a:solidFill>
+                <a:latin typeface="Calibri" pitchFamily="34" charset="0"/>
+                <a:ea typeface="Calibri" pitchFamily="34" charset="-122"/>
+                <a:cs typeface="Calibri" pitchFamily="34" charset="-120"/>
+              </a:rPr>
+              <a:t>Track 2 — Value of Intelligence.</a:t>
+            </a:r>
+            <a:endParaRPr lang="en-US" sz="3400" dirty="0"/>
+          </a:p>
+        </p:txBody>
+      </p:sp>
+      <p:sp>
+        <p:nvSpPr>
+          <p:cNvPr id="3" name="Text 1"/>
+          <p:cNvSpPr/>
+          <p:nvPr/>
+        </p:nvSpPr>
+        <p:spPr>
+          <a:xfrm>
+            <a:off x="548640" y="1078992"/>
+            <a:ext cx="10881360" cy="411480"/>
+          </a:xfrm>
+          <a:prstGeom prst="rect">
+            <a:avLst/>
+          </a:prstGeom>
+          <a:noFill/>
+          <a:ln/>
+        </p:spPr>
+        <p:txBody>
+          <a:bodyPr wrap="square" lIns="0" tIns="0" rIns="0" bIns="0" rtlCol="0" anchor="ctr"/>
+          <a:lstStyle/>
+          <a:p>
+            <a:pPr indent="0" marL="0">
+              <a:buNone/>
+            </a:pPr>
+            <a:r>
+              <a:rPr lang="en-US" sz="1400" dirty="0">
+                <a:solidFill>
+                  <a:srgbClr val="475569"/>
+                </a:solidFill>
+                <a:latin typeface="Calibri" pitchFamily="34" charset="0"/>
+                <a:ea typeface="Calibri" pitchFamily="34" charset="-122"/>
+                <a:cs typeface="Calibri" pitchFamily="34" charset="-120"/>
+              </a:rPr>
+              <a:t>Real willingness-to-pay, demonstrated in the demo — with Track 1 economics built into the suite’s DNA.</a:t>
+            </a:r>
+            <a:endParaRPr lang="en-US" sz="1400" dirty="0"/>
+          </a:p>
+        </p:txBody>
+      </p:sp>
+      <p:sp>
+        <p:nvSpPr>
+          <p:cNvPr id="4" name="Shape 2"/>
+          <p:cNvSpPr/>
+          <p:nvPr/>
+        </p:nvSpPr>
+        <p:spPr>
+          <a:xfrm>
+            <a:off x="548640" y="1691640"/>
+            <a:ext cx="5577840" cy="2743200"/>
+          </a:xfrm>
+          <a:prstGeom prst="roundRect">
+            <a:avLst>
+              <a:gd name="adj" fmla="val 3333"/>
+            </a:avLst>
+          </a:prstGeom>
+          <a:solidFill>
+            <a:srgbClr val="059669"/>
+          </a:solidFill>
+          <a:ln w="12700">
+            <a:solidFill>
+              <a:srgbClr val="E2E8F0"/>
+            </a:solidFill>
+            <a:prstDash val="solid"/>
+          </a:ln>
+          <a:effectLst>
+            <a:outerShdw sx="100000" sy="100000" kx="0" ky="0" algn="bl" rotWithShape="0" blurRad="88900" dist="25400" dir="5400000">
+              <a:srgbClr val="CBD5E1">
+                <a:alpha val="40000"/>
+              </a:srgbClr>
+            </a:outerShdw>
+          </a:effectLst>
+        </p:spPr>
+      </p:sp>
+      <p:sp>
+        <p:nvSpPr>
+          <p:cNvPr id="5" name="Text 3"/>
+          <p:cNvSpPr/>
+          <p:nvPr/>
+        </p:nvSpPr>
+        <p:spPr>
+          <a:xfrm>
+            <a:off x="868680" y="1920240"/>
+            <a:ext cx="5029200" cy="320040"/>
+          </a:xfrm>
+          <a:prstGeom prst="rect">
+            <a:avLst/>
+          </a:prstGeom>
+          <a:noFill/>
+          <a:ln/>
+        </p:spPr>
+        <p:txBody>
+          <a:bodyPr wrap="square" lIns="0" tIns="0" rIns="0" bIns="0" rtlCol="0" anchor="ctr"/>
+          <a:lstStyle/>
+          <a:p>
+            <a:pPr indent="0" marL="0">
+              <a:buNone/>
+            </a:pPr>
+            <a:r>
+              <a:rPr lang="en-US" sz="1200" b="1" spc="100" kern="0" dirty="0">
+                <a:solidFill>
+                  <a:srgbClr val="FFFFFF"/>
+                </a:solidFill>
+                <a:latin typeface="Calibri" pitchFamily="34" charset="0"/>
+                <a:ea typeface="Calibri" pitchFamily="34" charset="-122"/>
+                <a:cs typeface="Calibri" pitchFamily="34" charset="-120"/>
+              </a:rPr>
+              <a:t>PRIMARY · TRACK 2 — VALUE OF INTELLIGENCE</a:t>
+            </a:r>
+            <a:endParaRPr lang="en-US" sz="1200" dirty="0"/>
+          </a:p>
+        </p:txBody>
+      </p:sp>
+      <p:sp>
+        <p:nvSpPr>
+          <p:cNvPr id="6" name="Text 4"/>
+          <p:cNvSpPr/>
+          <p:nvPr/>
+        </p:nvSpPr>
+        <p:spPr>
+          <a:xfrm>
+            <a:off x="868680" y="2331720"/>
+            <a:ext cx="4983480" cy="1965960"/>
+          </a:xfrm>
+          <a:prstGeom prst="rect">
+            <a:avLst/>
+          </a:prstGeom>
+          <a:noFill/>
+          <a:ln/>
+        </p:spPr>
+        <p:txBody>
+          <a:bodyPr wrap="square" lIns="0" tIns="0" rIns="0" bIns="0" rtlCol="0" anchor="ctr"/>
+          <a:lstStyle/>
+          <a:p>
+            <a:pPr marL="342900" indent="-342900">
+              <a:spcAft>
+                <a:spcPts val="600"/>
+              </a:spcAft>
+              <a:buSzPct val="100000"/>
+              <a:buChar char="•"/>
+            </a:pPr>
+            <a:r>
+              <a:rPr lang="en-US" sz="1150" dirty="0">
+                <a:solidFill>
+                  <a:srgbClr val="FFFFFF"/>
+                </a:solidFill>
+                <a:latin typeface="Calibri" pitchFamily="34" charset="0"/>
+                <a:ea typeface="Calibri" pitchFamily="34" charset="-122"/>
+                <a:cs typeface="Calibri" pitchFamily="34" charset="-120"/>
+              </a:rPr>
+              <a:t>Company side: $12K/yr ACV — the controller buys audit-ready revenue recognition (SOM model: 4,000 exporters × $12K).</a:t>
+            </a:r>
+            <a:endParaRPr lang="en-US" sz="1150" dirty="0"/>
+          </a:p>
+          <a:p>
+            <a:pPr marL="342900" indent="-342900">
+              <a:spcAft>
+                <a:spcPts val="600"/>
+              </a:spcAft>
+              <a:buSzPct val="100000"/>
+              <a:buChar char="•"/>
+            </a:pPr>
+            <a:r>
+              <a:rPr lang="en-US" sz="1150" dirty="0">
+                <a:solidFill>
+                  <a:srgbClr val="FFFFFF"/>
+                </a:solidFill>
+                <a:latin typeface="Calibri" pitchFamily="34" charset="0"/>
+                <a:ea typeface="Calibri" pitchFamily="34" charset="-122"/>
+                <a:cs typeface="Calibri" pitchFamily="34" charset="-120"/>
+              </a:rPr>
+              <a:t>Carrier side: free add-in + ~2% take rate per accepted load — $29 on the $1,450 demo load, marketplace economics.</a:t>
+            </a:r>
+            <a:endParaRPr lang="en-US" sz="1150" dirty="0"/>
+          </a:p>
+          <a:p>
+            <a:pPr marL="342900" indent="-342900">
+              <a:buSzPct val="100000"/>
+              <a:buChar char="•"/>
+            </a:pPr>
+            <a:r>
+              <a:rPr lang="en-US" sz="1150" dirty="0">
+                <a:solidFill>
+                  <a:srgbClr val="FFFFFF"/>
+                </a:solidFill>
+                <a:latin typeface="Calibri" pitchFamily="34" charset="0"/>
+                <a:ea typeface="Calibri" pitchFamily="34" charset="-122"/>
+                <a:cs typeface="Calibri" pitchFamily="34" charset="-120"/>
+              </a:rPr>
+              <a:t>The $10 ARR-per-user bar is cleared ~1,000× per seat. Willingness-to-pay is the demo itself: the $1M flag no CFO wants to miss.</a:t>
+            </a:r>
+            <a:endParaRPr lang="en-US" sz="1150" dirty="0"/>
+          </a:p>
+        </p:txBody>
+      </p:sp>
+      <p:sp>
+        <p:nvSpPr>
+          <p:cNvPr id="7" name="Shape 5"/>
+          <p:cNvSpPr/>
+          <p:nvPr/>
+        </p:nvSpPr>
+        <p:spPr>
+          <a:xfrm>
+            <a:off x="6400800" y="1691640"/>
+            <a:ext cx="5212080" cy="2743200"/>
+          </a:xfrm>
+          <a:prstGeom prst="roundRect">
+            <a:avLst>
+              <a:gd name="adj" fmla="val 3333"/>
+            </a:avLst>
+          </a:prstGeom>
+          <a:solidFill>
+            <a:srgbClr val="F8FAFC"/>
+          </a:solidFill>
+          <a:ln w="12700">
+            <a:solidFill>
+              <a:srgbClr val="E2E8F0"/>
+            </a:solidFill>
+            <a:prstDash val="solid"/>
+          </a:ln>
+          <a:effectLst>
+            <a:outerShdw sx="100000" sy="100000" kx="0" ky="0" algn="bl" rotWithShape="0" blurRad="88900" dist="25400" dir="5400000">
+              <a:srgbClr val="CBD5E1">
+                <a:alpha val="40000"/>
+              </a:srgbClr>
+            </a:outerShdw>
+          </a:effectLst>
+        </p:spPr>
+      </p:sp>
+      <p:sp>
+        <p:nvSpPr>
+          <p:cNvPr id="8" name="Text 6"/>
+          <p:cNvSpPr/>
+          <p:nvPr/>
+        </p:nvSpPr>
+        <p:spPr>
+          <a:xfrm>
+            <a:off x="6720840" y="1920240"/>
+            <a:ext cx="4663440" cy="320040"/>
+          </a:xfrm>
+          <a:prstGeom prst="rect">
+            <a:avLst/>
+          </a:prstGeom>
+          <a:noFill/>
+          <a:ln/>
+        </p:spPr>
+        <p:txBody>
+          <a:bodyPr wrap="square" lIns="0" tIns="0" rIns="0" bIns="0" rtlCol="0" anchor="ctr"/>
+          <a:lstStyle/>
+          <a:p>
+            <a:pPr indent="0" marL="0">
+              <a:buNone/>
+            </a:pPr>
+            <a:r>
+              <a:rPr lang="en-US" sz="1200" b="1" spc="100" kern="0" dirty="0">
+                <a:solidFill>
+                  <a:srgbClr val="0F766E"/>
+                </a:solidFill>
+                <a:latin typeface="Calibri" pitchFamily="34" charset="0"/>
+                <a:ea typeface="Calibri" pitchFamily="34" charset="-122"/>
+                <a:cs typeface="Calibri" pitchFamily="34" charset="-120"/>
+              </a:rPr>
+              <a:t>CROSS-CREDIT · TRACK 1 — COST OF INTELLIGENCE</a:t>
+            </a:r>
+            <a:endParaRPr lang="en-US" sz="1200" dirty="0"/>
+          </a:p>
+        </p:txBody>
+      </p:sp>
+      <p:sp>
+        <p:nvSpPr>
+          <p:cNvPr id="9" name="Text 7"/>
+          <p:cNvSpPr/>
+          <p:nvPr/>
+        </p:nvSpPr>
+        <p:spPr>
+          <a:xfrm>
+            <a:off x="6720840" y="2286000"/>
+            <a:ext cx="4663440" cy="365760"/>
+          </a:xfrm>
+          <a:prstGeom prst="rect">
+            <a:avLst/>
+          </a:prstGeom>
+          <a:noFill/>
+          <a:ln/>
+        </p:spPr>
+        <p:txBody>
+          <a:bodyPr wrap="square" lIns="0" tIns="0" rIns="0" bIns="0" rtlCol="0" anchor="ctr"/>
+          <a:lstStyle/>
+          <a:p>
+            <a:pPr indent="0" marL="0">
+              <a:buNone/>
+            </a:pPr>
+            <a:r>
+              <a:rPr lang="en-US" sz="1300" b="1" i="1" dirty="0">
+                <a:solidFill>
+                  <a:srgbClr val="0F172A"/>
+                </a:solidFill>
+                <a:latin typeface="Calibri" pitchFamily="34" charset="0"/>
+                <a:ea typeface="Calibri" pitchFamily="34" charset="-122"/>
+                <a:cs typeface="Calibri" pitchFamily="34" charset="-120"/>
+              </a:rPr>
+              <a:t>“Materiality determines AI spend.”</a:t>
+            </a:r>
+            <a:endParaRPr lang="en-US" sz="1300" dirty="0"/>
+          </a:p>
+        </p:txBody>
+      </p:sp>
+      <p:sp>
+        <p:nvSpPr>
+          <p:cNvPr id="10" name="Text 8"/>
+          <p:cNvSpPr/>
+          <p:nvPr/>
+        </p:nvSpPr>
+        <p:spPr>
+          <a:xfrm>
+            <a:off x="6720840" y="2697480"/>
+            <a:ext cx="4709160" cy="1645920"/>
+          </a:xfrm>
+          <a:prstGeom prst="rect">
+            <a:avLst/>
+          </a:prstGeom>
+          <a:noFill/>
+          <a:ln/>
+        </p:spPr>
+        <p:txBody>
+          <a:bodyPr wrap="square" lIns="0" tIns="0" rIns="0" bIns="0" rtlCol="0" anchor="ctr"/>
+          <a:lstStyle/>
+          <a:p>
+            <a:pPr marL="342900" indent="-342900">
+              <a:spcAft>
+                <a:spcPts val="600"/>
+              </a:spcAft>
+              <a:buSzPct val="100000"/>
+              <a:buChar char="•"/>
+            </a:pPr>
+            <a:r>
+              <a:rPr lang="en-US" sz="1150" dirty="0">
+                <a:solidFill>
+                  <a:srgbClr val="475569"/>
+                </a:solidFill>
+                <a:latin typeface="Calibri" pitchFamily="34" charset="0"/>
+                <a:ea typeface="Calibri" pitchFamily="34" charset="-122"/>
+                <a:cs typeface="Calibri" pitchFamily="34" charset="-120"/>
+              </a:rPr>
+              <a:t>The Guard suite routes AI attention by materiality: rules clear the bulk, economy AI screens the middle, premium AI investigates only material exceptions like the $1M lane.</a:t>
+            </a:r>
+            <a:endParaRPr lang="en-US" sz="1150" dirty="0"/>
+          </a:p>
+          <a:p>
+            <a:pPr marL="342900" indent="-342900">
+              <a:buSzPct val="100000"/>
+              <a:buChar char="•"/>
+            </a:pPr>
+            <a:r>
+              <a:rPr lang="en-US" sz="1150" dirty="0">
+                <a:solidFill>
+                  <a:srgbClr val="475569"/>
+                </a:solidFill>
+                <a:latin typeface="Calibri" pitchFamily="34" charset="0"/>
+                <a:ea typeface="Calibri" pitchFamily="34" charset="-122"/>
+                <a:cs typeface="Calibri" pitchFamily="34" charset="-120"/>
+              </a:rPr>
+              <a:t>Suite result shown live: 85% less AI consumption — 410K → 63K tokens, $1.84 → $0.28 per close. A real percentage cost reduction, in the demo.</a:t>
+            </a:r>
+            <a:endParaRPr lang="en-US" sz="1150" dirty="0"/>
+          </a:p>
+        </p:txBody>
+      </p:sp>
+      <p:sp>
+        <p:nvSpPr>
+          <p:cNvPr id="11" name="Shape 9"/>
+          <p:cNvSpPr/>
+          <p:nvPr/>
+        </p:nvSpPr>
+        <p:spPr>
+          <a:xfrm>
+            <a:off x="548640" y="4709160"/>
+            <a:ext cx="5577840" cy="1463040"/>
+          </a:xfrm>
+          <a:prstGeom prst="roundRect">
+            <a:avLst>
+              <a:gd name="adj" fmla="val 6250"/>
+            </a:avLst>
+          </a:prstGeom>
+          <a:solidFill>
+            <a:srgbClr val="F8FAFC"/>
+          </a:solidFill>
+          <a:ln w="12700">
+            <a:solidFill>
+              <a:srgbClr val="E2E8F0"/>
+            </a:solidFill>
+            <a:prstDash val="solid"/>
+          </a:ln>
+          <a:effectLst>
+            <a:outerShdw sx="100000" sy="100000" kx="0" ky="0" algn="bl" rotWithShape="0" blurRad="88900" dist="25400" dir="5400000">
+              <a:srgbClr val="CBD5E1">
+                <a:alpha val="40000"/>
+              </a:srgbClr>
+            </a:outerShdw>
+          </a:effectLst>
+        </p:spPr>
+      </p:sp>
+      <p:sp>
+        <p:nvSpPr>
+          <p:cNvPr id="12" name="Text 10"/>
+          <p:cNvSpPr/>
+          <p:nvPr/>
+        </p:nvSpPr>
+        <p:spPr>
+          <a:xfrm>
+            <a:off x="868680" y="4919472"/>
+            <a:ext cx="5029200" cy="320040"/>
+          </a:xfrm>
+          <a:prstGeom prst="rect">
+            <a:avLst/>
+          </a:prstGeom>
+          <a:noFill/>
+          <a:ln/>
+        </p:spPr>
+        <p:txBody>
+          <a:bodyPr wrap="square" lIns="0" tIns="0" rIns="0" bIns="0" rtlCol="0" anchor="ctr"/>
+          <a:lstStyle/>
+          <a:p>
+            <a:pPr indent="0" marL="0">
+              <a:buNone/>
+            </a:pPr>
+            <a:r>
+              <a:rPr lang="en-US" sz="1300" b="1" dirty="0">
+                <a:solidFill>
+                  <a:srgbClr val="059669"/>
+                </a:solidFill>
+                <a:latin typeface="Calibri" pitchFamily="34" charset="0"/>
+                <a:ea typeface="Calibri" pitchFamily="34" charset="-122"/>
+                <a:cs typeface="Calibri" pitchFamily="34" charset="-120"/>
+              </a:rPr>
+              <a:t>Optional sponsor tools — wiring plan (demo setup)</a:t>
+            </a:r>
+            <a:endParaRPr lang="en-US" sz="1300" dirty="0"/>
+          </a:p>
+        </p:txBody>
+      </p:sp>
+      <p:sp>
+        <p:nvSpPr>
+          <p:cNvPr id="13" name="Text 11"/>
+          <p:cNvSpPr/>
+          <p:nvPr/>
+        </p:nvSpPr>
+        <p:spPr>
+          <a:xfrm>
+            <a:off x="868680" y="5257800"/>
+            <a:ext cx="5029200" cy="868680"/>
+          </a:xfrm>
+          <a:prstGeom prst="rect">
+            <a:avLst/>
+          </a:prstGeom>
+          <a:noFill/>
+          <a:ln/>
+        </p:spPr>
+        <p:txBody>
+          <a:bodyPr wrap="square" lIns="0" tIns="0" rIns="0" bIns="0" rtlCol="0" anchor="ctr"/>
+          <a:lstStyle/>
+          <a:p>
+            <a:pPr indent="0" marL="0">
+              <a:buNone/>
+            </a:pPr>
+            <a:r>
+              <a:rPr lang="en-US" sz="1050" dirty="0">
+                <a:solidFill>
+                  <a:srgbClr val="475569"/>
+                </a:solidFill>
+                <a:latin typeface="Calibri" pitchFamily="34" charset="0"/>
+                <a:ea typeface="Calibri" pitchFamily="34" charset="-122"/>
+                <a:cs typeface="Calibri" pitchFamily="34" charset="-120"/>
+              </a:rPr>
+              <a:t>Evermind → persistent agent memory of vendor performance, feeding route rankings and on-time scores. Voice Cursor → hands-free custody logging at the dock (“hand-off to Cascade — signed”). Both drop into hooks that already exist: the route ranker and the scan intake.</a:t>
+            </a:r>
+            <a:endParaRPr lang="en-US" sz="1050" dirty="0"/>
+          </a:p>
+        </p:txBody>
+      </p:sp>
+      <p:sp>
+        <p:nvSpPr>
+          <p:cNvPr id="14" name="Shape 12"/>
+          <p:cNvSpPr/>
+          <p:nvPr/>
+        </p:nvSpPr>
+        <p:spPr>
+          <a:xfrm>
+            <a:off x="6400800" y="4709160"/>
+            <a:ext cx="5212080" cy="1463040"/>
+          </a:xfrm>
+          <a:prstGeom prst="roundRect">
+            <a:avLst>
+              <a:gd name="adj" fmla="val 6250"/>
+            </a:avLst>
+          </a:prstGeom>
+          <a:solidFill>
+            <a:srgbClr val="0F172A"/>
+          </a:solidFill>
+          <a:ln w="12700">
+            <a:solidFill>
+              <a:srgbClr val="E2E8F0"/>
+            </a:solidFill>
+            <a:prstDash val="solid"/>
+          </a:ln>
+          <a:effectLst>
+            <a:outerShdw sx="100000" sy="100000" kx="0" ky="0" algn="bl" rotWithShape="0" blurRad="88900" dist="25400" dir="5400000">
+              <a:srgbClr val="CBD5E1">
+                <a:alpha val="40000"/>
+              </a:srgbClr>
+            </a:outerShdw>
+          </a:effectLst>
+        </p:spPr>
+      </p:sp>
+      <p:sp>
+        <p:nvSpPr>
+          <p:cNvPr id="15" name="Text 13"/>
+          <p:cNvSpPr/>
+          <p:nvPr/>
+        </p:nvSpPr>
+        <p:spPr>
+          <a:xfrm>
+            <a:off x="6720840" y="4919472"/>
+            <a:ext cx="4663440" cy="320040"/>
+          </a:xfrm>
+          <a:prstGeom prst="rect">
+            <a:avLst/>
+          </a:prstGeom>
+          <a:noFill/>
+          <a:ln/>
+        </p:spPr>
+        <p:txBody>
+          <a:bodyPr wrap="square" lIns="0" tIns="0" rIns="0" bIns="0" rtlCol="0" anchor="ctr"/>
+          <a:lstStyle/>
+          <a:p>
+            <a:pPr indent="0" marL="0">
+              <a:buNone/>
+            </a:pPr>
+            <a:r>
+              <a:rPr lang="en-US" sz="1300" b="1" dirty="0">
+                <a:solidFill>
+                  <a:srgbClr val="34D399"/>
+                </a:solidFill>
+                <a:latin typeface="Calibri" pitchFamily="34" charset="0"/>
+                <a:ea typeface="Calibri" pitchFamily="34" charset="-122"/>
+                <a:cs typeface="Calibri" pitchFamily="34" charset="-120"/>
+              </a:rPr>
+              <a:t>The 3-minute demo</a:t>
+            </a:r>
+            <a:endParaRPr lang="en-US" sz="1300" dirty="0"/>
+          </a:p>
+        </p:txBody>
+      </p:sp>
+      <p:sp>
+        <p:nvSpPr>
+          <p:cNvPr id="16" name="Text 14"/>
+          <p:cNvSpPr/>
+          <p:nvPr/>
+        </p:nvSpPr>
+        <p:spPr>
+          <a:xfrm>
+            <a:off x="6720840" y="5257800"/>
+            <a:ext cx="4709160" cy="868680"/>
+          </a:xfrm>
+          <a:prstGeom prst="rect">
+            <a:avLst/>
+          </a:prstGeom>
+          <a:noFill/>
+          <a:ln/>
+        </p:spPr>
+        <p:txBody>
+          <a:bodyPr wrap="square" lIns="0" tIns="0" rIns="0" bIns="0" rtlCol="0" anchor="ctr"/>
+          <a:lstStyle/>
+          <a:p>
+            <a:pPr indent="0" marL="0">
+              <a:buNone/>
+            </a:pPr>
+            <a:r>
+              <a:rPr lang="en-US" sz="1050" dirty="0">
+                <a:solidFill>
+                  <a:srgbClr val="CBD5E1"/>
+                </a:solidFill>
+                <a:latin typeface="Calibri" pitchFamily="34" charset="0"/>
+                <a:ea typeface="Calibri" pitchFamily="34" charset="-122"/>
+                <a:cs typeface="Calibri" pitchFamily="34" charset="-120"/>
+              </a:rPr>
+              <a:t>Label scan → AI route + need-by override → carrier accepts Uber-style → docs-pack PDF → label scan flips it to received → the $1M FOB-destination flag. Submit by 3:55 — the deadline docks points.</a:t>
+            </a:r>
+            <a:endParaRPr lang="en-US" sz="1050" dirty="0"/>
+          </a:p>
+        </p:txBody>
+      </p:sp>
+    </p:spTree>
+  </p:cSld>
+  <p:clrMapOvr>
+    <a:masterClrMapping/>
+  </p:clrMapOvr>
+</p:sld>
+</file>
+
+<file path=ppt/slides/slide12.xml><?xml version="1.0" encoding="utf-8"?>
+<p:sld xmlns:a="http://schemas.openxmlformats.org/drawingml/2006/main" xmlns:r="http://schemas.openxmlformats.org/officeDocument/2006/relationships" xmlns:p="http://schemas.openxmlformats.org/presentationml/2006/main">
+  <p:cSld name="Slide 12">
+    <p:bg>
+      <p:bgPr>
+        <a:solidFill>
           <a:srgbClr val="0F172A"/>
         </a:solidFill>
       </p:bgPr>
@@ -3684,6 +4435,45 @@
         <p:spPr>
           <a:xfrm>
             <a:off x="822960" y="4709160"/>
+            <a:ext cx="10515600" cy="411480"/>
+          </a:xfrm>
+          <a:prstGeom prst="rect">
+            <a:avLst/>
+          </a:prstGeom>
+          <a:noFill/>
+          <a:ln/>
+        </p:spPr>
+        <p:txBody>
+          <a:bodyPr wrap="square" lIns="0" tIns="0" rIns="0" bIns="0" rtlCol="0" anchor="ctr"/>
+          <a:lstStyle/>
+          <a:p>
+            <a:pPr indent="0" marL="0">
+              <a:buNone/>
+            </a:pPr>
+            <a:r>
+              <a:rPr lang="en-US" sz="1350" dirty="0">
+                <a:solidFill>
+                  <a:srgbClr val="CBD5E1"/>
+                </a:solidFill>
+                <a:latin typeface="Calibri" pitchFamily="34" charset="0"/>
+                <a:ea typeface="Calibri" pitchFamily="34" charset="-122"/>
+                <a:cs typeface="Calibri" pitchFamily="34" charset="-120"/>
+              </a:rPr>
+              <a:t>Transparency for tax planning · delivery dates for revenue recognition · audit-ready documentation · stock planning · returns management.</a:t>
+            </a:r>
+            <a:endParaRPr lang="en-US" sz="1350" dirty="0"/>
+          </a:p>
+        </p:txBody>
+      </p:sp>
+      <p:sp>
+        <p:nvSpPr>
+          <p:cNvPr id="14" name="Text 12"/>
+          <p:cNvSpPr/>
+          <p:nvPr/>
+        </p:nvSpPr>
+        <p:spPr>
+          <a:xfrm>
+            <a:off x="822960" y="5212080"/>
             <a:ext cx="10515600" cy="365760"/>
           </a:xfrm>
           <a:prstGeom prst="rect">
@@ -3700,7 +4490,7 @@
               <a:buNone/>
             </a:pPr>
             <a:r>
-              <a:rPr lang="en-US" sz="1300" dirty="0">
+              <a:rPr lang="en-US" sz="1200" dirty="0">
                 <a:solidFill>
                   <a:srgbClr val="94A3B8"/>
                 </a:solidFill>
@@ -3710,7 +4500,7 @@
               </a:rPr>
               <a:t>Live demo: localhost:5174 · All data synthetic · Thank you</a:t>
             </a:r>
-            <a:endParaRPr lang="en-US" sz="1300" dirty="0"/>
+            <a:endParaRPr lang="en-US" sz="1200" dirty="0"/>
           </a:p>
         </p:txBody>
       </p:sp>
@@ -7962,7 +8752,7 @@
                 <a:ea typeface="Calibri" pitchFamily="34" charset="-122"/>
                 <a:cs typeface="Calibri" pitchFamily="34" charset="-120"/>
               </a:rPr>
-              <a:t>Simulated barcode scan + the “why is it leaving?” intake.</a:t>
+              <a:t>Shipping-label scan + order number + the “why is it leaving?” intake.</a:t>
             </a:r>
             <a:endParaRPr lang="en-US" sz="1050" dirty="0"/>
           </a:p>
@@ -8854,7 +9644,7 @@
                 <a:ea typeface="Calibri" pitchFamily="34" charset="-122"/>
                 <a:cs typeface="Calibri" pitchFamily="34" charset="-120"/>
               </a:rPr>
-              <a:t>Live at localhost:5174 — a phone-frame web app with presenter notes on screen. Multilingual UI (English · Spanish · French).  </a:t>
+              <a:t>Two profiles in one app: company ops and the carrier add-in. Carriers accept AI-proposed loads Uber-style; a shipping-label scan receives the docs pack — or auto-updates the vendor when a different carrier takes the load.  </a:t>
             </a:r>
             <a:endParaRPr lang="en-US" sz="1150" dirty="0"/>
           </a:p>
@@ -8871,7 +9661,7 @@
                 <a:ea typeface="Calibri" pitchFamily="34" charset="-122"/>
                 <a:cs typeface="Calibri" pitchFamily="34" charset="-120"/>
               </a:rPr>
-              <a:t>Partner carrier apps plug in via the Transit Guard API and scan EU hand-off QRs — the transaction ID never breaks between systems.  </a:t>
+              <a:t>Company-approved docs pack printed as PDF from the app: customs valuation worksheet · packing slip · bill of lading · destination customs checklist.  </a:t>
             </a:r>
             <a:endParaRPr lang="en-US" sz="1150" dirty="0"/>
           </a:p>
@@ -8888,7 +9678,7 @@
                 <a:ea typeface="Calibri" pitchFamily="34" charset="-122"/>
                 <a:cs typeface="Calibri" pitchFamily="34" charset="-120"/>
               </a:rPr>
-              <a:t>On-device multilingual OCR (Tesseract) reads a customs document and files it to the right transaction — no backend, no API keys, demo-safe offline.</a:t>
+              <a:t>Live at localhost:5174 — EN/ES/FR, on-device OCR, EU hand-off QR. No backend, no API keys, demo-safe offline.</a:t>
             </a:r>
             <a:endParaRPr lang="en-US" sz="1150" dirty="0"/>
           </a:p>

--- a/deck/Transit_Guard_Pitch.pptx
+++ b/deck/Transit_Guard_Pitch.pptx
@@ -1388,7 +1388,7 @@
           <a:p>
             <a:r>
               <a:rPr lang="en-US" dirty="0"/>
-              <a:t>Everything on this slide exists and runs today. Live wow-moments: the AI route override, the carrier accepting a load and the leg appearing in the company chain, the docs-pack PDF, the label scan flipping docs to received — and the auto vendor substitution ("plan had Redline Haulage").</a:t>
+              <a:t>Everything on this slide exists and runs today. Live wow-moments: the AI route override; the carrier DECLINING a load and the agent rerouting it to Redline in seconds (Uber-style availability matching); one-click per-stage documents; the label scan flipping docs to received; the auto vendor substitution. Toggle the 📱/🖥️ switch above the demo to show the same app as desktop web and mobile.</a:t>
             </a:r>
             <a:endParaRPr lang="en-US" dirty="0"/>
           </a:p>
@@ -9644,7 +9644,7 @@
                 <a:ea typeface="Calibri" pitchFamily="34" charset="-122"/>
                 <a:cs typeface="Calibri" pitchFamily="34" charset="-120"/>
               </a:rPr>
-              <a:t>Two profiles in one app: company ops and the carrier add-in. Carriers accept AI-proposed loads Uber-style; a shipping-label scan receives the docs pack — or auto-updates the vendor when a different carrier takes the load.  </a:t>
+              <a:t>Route and reroute like a rideshare: priorities (fastest · balanced · lowest cost) drive the agent — when a carrier declines, it re-matches the load and the chain still gets its leg. Two profiles: company ops + the carrier add-in, which sees only the shipping transaction.  </a:t>
             </a:r>
             <a:endParaRPr lang="en-US" sz="1150" dirty="0"/>
           </a:p>
@@ -9661,7 +9661,7 @@
                 <a:ea typeface="Calibri" pitchFamily="34" charset="-122"/>
                 <a:cs typeface="Calibri" pitchFamily="34" charset="-120"/>
               </a:rPr>
-              <a:t>Company-approved docs pack printed as PDF from the app: customs valuation worksheet · packing slip · bill of lading · destination customs checklist.  </a:t>
+              <a:t>Every routing stage is clickable — one tap on any stopping point prints its documents as PDF: shipping &amp; receiving docs, customs documents, bill of lading, valuation worksheet.  </a:t>
             </a:r>
             <a:endParaRPr lang="en-US" sz="1150" dirty="0"/>
           </a:p>
@@ -9678,7 +9678,7 @@
                 <a:ea typeface="Calibri" pitchFamily="34" charset="-122"/>
                 <a:cs typeface="Calibri" pitchFamily="34" charset="-120"/>
               </a:rPr>
-              <a:t>Live at localhost:5174 — EN/ES/FR, on-device OCR, EU hand-off QR. No backend, no API keys, demo-safe offline.</a:t>
+              <a:t>Responsive web app with a mobile view — vendors open any stage they need from a browser. EN/ES/FR, on-device OCR, EU hand-off QR. No backend, demo-safe offline.</a:t>
             </a:r>
             <a:endParaRPr lang="en-US" sz="1150" dirty="0"/>
           </a:p>

--- a/deck/Transit_Guard_Pitch.pptx
+++ b/deck/Transit_Guard_Pitch.pptx
@@ -17,9 +17,10 @@
     <p:sldId id="265" r:id="rId11"/>
     <p:sldId id="266" r:id="rId12"/>
     <p:sldId id="267" r:id="rId13"/>
+    <p:sldId id="268" r:id="rId14"/>
   </p:sldIdLst>
   <p:notesMasterIdLst>
-    <p:notesMasterId r:id="rId14"/>
+    <p:notesMasterId r:id="rId15"/>
   </p:notesMasterIdLst>
   <p:sldSz cx="12192000" cy="6858000"/>
   <p:notesSz cx="6858000" cy="12192000"/>
@@ -860,7 +861,7 @@
           <a:p>
             <a:r>
               <a:rPr lang="en-US" dirty="0"/>
-              <a:t>The pilot design is deliberately small: one shipment lane, one quarter, one deliverable the controller already wants — the cutoff evidence file at close.</a:t>
+              <a:t>Real-time transportation visibility platforms answer “where is my truck.” We answer “who has custody, since when, with what documents, and what does that mean for December revenue.” Different question, different buyer — the controller, not the logistics manager.</a:t>
             </a:r>
             <a:endParaRPr lang="en-US" dirty="0"/>
           </a:p>
@@ -948,7 +949,7 @@
           <a:p>
             <a:r>
               <a:rPr lang="en-US" dirty="0"/>
-              <a:t>Track 2 is the primary entry: the product monetizes on both sides of the marketplace and clears the $10 ARR/user bar by orders of magnitude. Track 1 cross-credit comes from the suite economics — the 85% AI-consumption reduction is a real, demoable percentage. Sponsor tools are positioned as wiring, not shipped integrations — be precise about that on stage.</a:t>
+              <a:t>The pilot design is deliberately small: one shipment lane, one quarter, one deliverable the controller already wants — the cutoff evidence file at close.</a:t>
             </a:r>
             <a:endParaRPr lang="en-US" dirty="0"/>
           </a:p>
@@ -1036,7 +1037,7 @@
           <a:p>
             <a:r>
               <a:rPr lang="en-US" dirty="0"/>
-              <a:t>Close on the tagline, then switch straight to the live demo.</a:t>
+              <a:t>Track 2 is the primary entry: the product monetizes on both sides of the marketplace and clears the $10 ARR/user bar by orders of magnitude. Track 1 cross-credit comes from the suite economics — the 85% AI-consumption reduction is a real, demoable percentage. Sponsor tools are positioned as wiring, not shipped integrations — be precise about that on stage.</a:t>
             </a:r>
             <a:endParaRPr lang="en-US" dirty="0"/>
           </a:p>
@@ -1060,6 +1061,94 @@
             <a:fld id="{F7021451-1387-4CA6-816F-3879F97B5CBC}" type="slidenum">
               <a:rPr lang="en-US"/>
               <a:t>12</a:t>
+            </a:fld>
+            <a:endParaRPr lang="en-US"/>
+          </a:p>
+        </p:txBody>
+      </p:sp>
+    </p:spTree>
+    <p:extLst>
+      <p:ext uri="{BB962C8B-B14F-4D97-AF65-F5344CB8AC3E}">
+        <p14:creationId xmlns:p14="http://schemas.microsoft.com/office/powerpoint/2010/main" val="1024086991"/>
+      </p:ext>
+    </p:extLst>
+  </p:cSld>
+  <p:clrMapOvr>
+    <a:masterClrMapping/>
+  </p:clrMapOvr>
+</p:notes>
+</file>
+
+<file path=ppt/notesSlides/notesSlide13.xml><?xml version="1.0" encoding="utf-8"?>
+<p:notes xmlns:a="http://schemas.openxmlformats.org/drawingml/2006/main" xmlns:r="http://schemas.openxmlformats.org/officeDocument/2006/relationships" xmlns:p="http://schemas.openxmlformats.org/presentationml/2006/main">
+  <p:cSld>
+    <p:spTree>
+      <p:nvGrpSpPr>
+        <p:cNvPr id="1" name=""/>
+        <p:cNvGrpSpPr/>
+        <p:nvPr/>
+      </p:nvGrpSpPr>
+      <p:grpSpPr>
+        <a:xfrm>
+          <a:off x="0" y="0"/>
+          <a:ext cx="0" cy="0"/>
+          <a:chOff x="0" y="0"/>
+          <a:chExt cx="0" cy="0"/>
+        </a:xfrm>
+      </p:grpSpPr>
+      <p:sp>
+        <p:nvSpPr>
+          <p:cNvPr id="2" name="Slide Image Placeholder 1"/>
+          <p:cNvSpPr>
+            <a:spLocks noGrp="1" noRot="1" noChangeAspect="1"/>
+          </p:cNvSpPr>
+          <p:nvPr>
+            <p:ph type="sldImg"/>
+          </p:nvPr>
+        </p:nvSpPr>
+        <p:spPr/>
+      </p:sp>
+      <p:sp>
+        <p:nvSpPr>
+          <p:cNvPr id="3" name="Notes Placeholder 2"/>
+          <p:cNvSpPr>
+            <a:spLocks noGrp="1"/>
+          </p:cNvSpPr>
+          <p:nvPr>
+            <p:ph type="body" idx="1"/>
+          </p:nvPr>
+        </p:nvSpPr>
+        <p:spPr/>
+        <p:txBody>
+          <a:bodyPr/>
+          <a:lstStyle/>
+          <a:p>
+            <a:r>
+              <a:rPr lang="en-US" dirty="0"/>
+              <a:t>Close on the tagline, then switch straight to the live demo.</a:t>
+            </a:r>
+            <a:endParaRPr lang="en-US" dirty="0"/>
+          </a:p>
+        </p:txBody>
+      </p:sp>
+      <p:sp>
+        <p:nvSpPr>
+          <p:cNvPr id="4" name="Slide Number Placeholder 3"/>
+          <p:cNvSpPr>
+            <a:spLocks noGrp="1"/>
+          </p:cNvSpPr>
+          <p:nvPr>
+            <p:ph type="sldNum" sz="quarter" idx="10"/>
+          </p:nvPr>
+        </p:nvSpPr>
+        <p:spPr/>
+        <p:txBody>
+          <a:bodyPr/>
+          <a:lstStyle/>
+          <a:p>
+            <a:fld id="{F7021451-1387-4CA6-816F-3879F97B5CBC}" type="slidenum">
+              <a:rPr lang="en-US"/>
+              <a:t>13</a:t>
             </a:fld>
             <a:endParaRPr lang="en-US"/>
           </a:p>
@@ -1564,7 +1653,7 @@
           <a:p>
             <a:r>
               <a:rPr lang="en-US" dirty="0"/>
-              <a:t>Positioning matters to judges who know the space: we are not competing with NetSuite, SAP, Oracle, or BlackLine. We are the capture layer between them — and the Guard suite gives us a built-in consumer of the evidence at close time.</a:t>
+              <a:t>This is the coordination contract judges should remember: agents do the matching and rerouting on availability plus weights &amp; measures; humans only see decisions that cross the tolerance gate (±10% / $200 / 2-day). The memory split is the Track 1 tie-in: constants are cached (cost per ton, owned lanes), only the date-window availability is queried per order — so agent decisions stay cheap. The same workflow is packaged as an EverOS prompt with seed memory files.</a:t>
             </a:r>
             <a:endParaRPr lang="en-US" dirty="0"/>
           </a:p>
@@ -1652,7 +1741,7 @@
           <a:p>
             <a:r>
               <a:rPr lang="en-US" dirty="0"/>
-              <a:t>TAM is total SCM software spend. SAM narrows to the goods-in-motion layer where we live: visibility plus inventory software. SOM is the concrete beachhead: US mid-market companies exporting serialized hardware — exactly the Fast Insights profile — at a $12K land price.</a:t>
+              <a:t>Positioning matters to judges who know the space: we are not competing with NetSuite, SAP, Oracle, or BlackLine. We are the capture layer between them — and the Guard suite gives us a built-in consumer of the evidence at close time.</a:t>
             </a:r>
             <a:endParaRPr lang="en-US" dirty="0"/>
           </a:p>
@@ -1740,7 +1829,7 @@
           <a:p>
             <a:r>
               <a:rPr lang="en-US" dirty="0"/>
-              <a:t>Real-time transportation visibility platforms answer “where is my truck.” We answer “who has custody, since when, with what documents, and what does that mean for December revenue.” Different question, different buyer — the controller, not the logistics manager.</a:t>
+              <a:t>TAM is total SCM software spend. SAM narrows to the goods-in-motion layer where we live: visibility plus inventory software. SOM is the concrete beachhead: US mid-market companies exporting serialized hardware — exactly the Fast Insights profile — at a $12K land price.</a:t>
             </a:r>
             <a:endParaRPr lang="en-US" dirty="0"/>
           </a:p>
@@ -2868,7 +2957,7 @@
                 <a:ea typeface="Calibri" pitchFamily="34" charset="-122"/>
                 <a:cs typeface="Calibri" pitchFamily="34" charset="-120"/>
               </a:rPr>
-              <a:t>From hackathon to pilot.</a:t>
+              <a:t>Visibility tools see trucks. We see accounting truth.</a:t>
             </a:r>
             <a:endParaRPr lang="en-US" sz="3400" dirty="0"/>
           </a:p>
@@ -2883,15 +2972,15 @@
         <p:spPr>
           <a:xfrm>
             <a:off x="548640" y="1417320"/>
-            <a:ext cx="3611880" cy="2743200"/>
+            <a:ext cx="3337560" cy="2148840"/>
           </a:xfrm>
           <a:prstGeom prst="roundRect">
             <a:avLst>
-              <a:gd name="adj" fmla="val 3333"/>
+              <a:gd name="adj" fmla="val 4255"/>
             </a:avLst>
           </a:prstGeom>
           <a:solidFill>
-            <a:srgbClr val="FFFFFF"/>
+            <a:srgbClr val="F8FAFC"/>
           </a:solidFill>
           <a:ln w="12700">
             <a:solidFill>
@@ -2910,74 +2999,30 @@
       </p:sp>
       <p:sp>
         <p:nvSpPr>
-          <p:cNvPr id="4" name="Shape 2"/>
-          <p:cNvSpPr/>
-          <p:nvPr/>
-        </p:nvSpPr>
-        <p:spPr>
-          <a:xfrm>
-            <a:off x="804672" y="1691640"/>
-            <a:ext cx="512064" cy="512064"/>
-          </a:xfrm>
-          <a:prstGeom prst="ellipse">
-            <a:avLst/>
-          </a:prstGeom>
-          <a:solidFill>
-            <a:srgbClr val="D1FAE5"/>
-          </a:solidFill>
-          <a:ln/>
-        </p:spPr>
-      </p:sp>
-      <p:pic>
-        <p:nvPicPr>
-          <p:cNvPr id="5" name="Image 0" descr="preencoded.png">    </p:cNvPr>
-          <p:cNvPicPr>
-            <a:picLocks noChangeAspect="1"/>
-          </p:cNvPicPr>
-          <p:nvPr/>
-        </p:nvPicPr>
-        <p:blipFill>
-          <a:blip r:embed="rId1"/>
-          <a:stretch>
-            <a:fillRect/>
-          </a:stretch>
-        </p:blipFill>
-        <p:spPr>
-          <a:xfrm>
-            <a:off x="937809" y="1824777"/>
-            <a:ext cx="245791" cy="245791"/>
-          </a:xfrm>
-          <a:prstGeom prst="rect">
-            <a:avLst/>
-          </a:prstGeom>
-        </p:spPr>
-      </p:pic>
-      <p:sp>
-        <p:nvSpPr>
-          <p:cNvPr id="6" name="Text 3"/>
-          <p:cNvSpPr/>
-          <p:nvPr/>
-        </p:nvSpPr>
-        <p:spPr>
-          <a:xfrm>
-            <a:off x="804672" y="2359152"/>
-            <a:ext cx="3108960" cy="365760"/>
-          </a:xfrm>
-          <a:prstGeom prst="rect">
-            <a:avLst/>
-          </a:prstGeom>
-          <a:noFill/>
-          <a:ln/>
-        </p:spPr>
-        <p:txBody>
-          <a:bodyPr wrap="square" lIns="0" tIns="0" rIns="0" bIns="0" rtlCol="0" anchor="ctr"/>
-          <a:lstStyle/>
-          <a:p>
-            <a:pPr indent="0" marL="0">
-              <a:buNone/>
-            </a:pPr>
-            <a:r>
-              <a:rPr lang="en-US" sz="1550" b="1" dirty="0">
+          <p:cNvPr id="4" name="Text 2"/>
+          <p:cNvSpPr/>
+          <p:nvPr/>
+        </p:nvSpPr>
+        <p:spPr>
+          <a:xfrm>
+            <a:off x="804672" y="1645920"/>
+            <a:ext cx="2834640" cy="548640"/>
+          </a:xfrm>
+          <a:prstGeom prst="rect">
+            <a:avLst/>
+          </a:prstGeom>
+          <a:noFill/>
+          <a:ln/>
+        </p:spPr>
+        <p:txBody>
+          <a:bodyPr wrap="square" lIns="0" tIns="0" rIns="0" bIns="0" rtlCol="0" anchor="ctr"/>
+          <a:lstStyle/>
+          <a:p>
+            <a:pPr indent="0" marL="0">
+              <a:buNone/>
+            </a:pPr>
+            <a:r>
+              <a:rPr lang="en-US" sz="1500" b="1" dirty="0">
                 <a:solidFill>
                   <a:srgbClr val="0F172A"/>
                 </a:solidFill>
@@ -2985,22 +3030,22 @@
                 <a:ea typeface="Calibri" pitchFamily="34" charset="-122"/>
                 <a:cs typeface="Calibri" pitchFamily="34" charset="-120"/>
               </a:rPr>
-              <a:t>Now — built this week</a:t>
-            </a:r>
-            <a:endParaRPr lang="en-US" sz="1550" dirty="0"/>
-          </a:p>
-        </p:txBody>
-      </p:sp>
-      <p:sp>
-        <p:nvSpPr>
-          <p:cNvPr id="7" name="Text 4"/>
-          <p:cNvSpPr/>
-          <p:nvPr/>
-        </p:nvSpPr>
-        <p:spPr>
-          <a:xfrm>
-            <a:off x="804672" y="2743200"/>
-            <a:ext cx="3127248" cy="1325880"/>
+              <a:t>project44 · FourKites</a:t>
+            </a:r>
+            <a:endParaRPr lang="en-US" sz="1500" dirty="0"/>
+          </a:p>
+        </p:txBody>
+      </p:sp>
+      <p:sp>
+        <p:nvSpPr>
+          <p:cNvPr id="5" name="Text 3"/>
+          <p:cNvSpPr/>
+          <p:nvPr/>
+        </p:nvSpPr>
+        <p:spPr>
+          <a:xfrm>
+            <a:off x="804672" y="2240280"/>
+            <a:ext cx="2834640" cy="1188720"/>
           </a:xfrm>
           <a:prstGeom prst="rect">
             <a:avLst/>
@@ -3024,7 +3069,7 @@
                 <a:ea typeface="Calibri" pitchFamily="34" charset="-122"/>
                 <a:cs typeface="Calibri" pitchFamily="34" charset="-120"/>
               </a:rPr>
-              <a:t>Working phone-frame demo: AI vendor search, scan intake, custody chains, EU hand-off QR, customs engine, AI flags, audit export, EN/ES/FR, on-device OCR.</a:t>
+              <a:t>Carrier telemetry: where the truck is — not who has custody, or what that means for revenue.</a:t>
             </a:r>
             <a:endParaRPr lang="en-US" sz="1150" dirty="0"/>
           </a:p>
@@ -3032,22 +3077,22 @@
       </p:sp>
       <p:sp>
         <p:nvSpPr>
-          <p:cNvPr id="8" name="Shape 5"/>
-          <p:cNvSpPr/>
-          <p:nvPr/>
-        </p:nvSpPr>
-        <p:spPr>
-          <a:xfrm>
-            <a:off x="4370832" y="1417320"/>
-            <a:ext cx="3611880" cy="2743200"/>
+          <p:cNvPr id="6" name="Shape 4"/>
+          <p:cNvSpPr/>
+          <p:nvPr/>
+        </p:nvSpPr>
+        <p:spPr>
+          <a:xfrm>
+            <a:off x="4069080" y="1417320"/>
+            <a:ext cx="3337560" cy="2148840"/>
           </a:xfrm>
           <a:prstGeom prst="roundRect">
             <a:avLst>
-              <a:gd name="adj" fmla="val 3333"/>
+              <a:gd name="adj" fmla="val 4255"/>
             </a:avLst>
           </a:prstGeom>
           <a:solidFill>
-            <a:srgbClr val="FFFFFF"/>
+            <a:srgbClr val="F8FAFC"/>
           </a:solidFill>
           <a:ln w="12700">
             <a:solidFill>
@@ -3066,74 +3111,30 @@
       </p:sp>
       <p:sp>
         <p:nvSpPr>
-          <p:cNvPr id="9" name="Shape 6"/>
-          <p:cNvSpPr/>
-          <p:nvPr/>
-        </p:nvSpPr>
-        <p:spPr>
-          <a:xfrm>
-            <a:off x="4626864" y="1691640"/>
-            <a:ext cx="512064" cy="512064"/>
-          </a:xfrm>
-          <a:prstGeom prst="ellipse">
-            <a:avLst/>
-          </a:prstGeom>
-          <a:solidFill>
-            <a:srgbClr val="D1FAE5"/>
-          </a:solidFill>
-          <a:ln/>
-        </p:spPr>
-      </p:sp>
-      <p:pic>
-        <p:nvPicPr>
-          <p:cNvPr id="10" name="Image 1" descr="preencoded.png">    </p:cNvPr>
-          <p:cNvPicPr>
-            <a:picLocks noChangeAspect="1"/>
-          </p:cNvPicPr>
-          <p:nvPr/>
-        </p:nvPicPr>
-        <p:blipFill>
-          <a:blip r:embed="rId2"/>
-          <a:stretch>
-            <a:fillRect/>
-          </a:stretch>
-        </p:blipFill>
-        <p:spPr>
-          <a:xfrm>
-            <a:off x="4760001" y="1824777"/>
-            <a:ext cx="245791" cy="245791"/>
-          </a:xfrm>
-          <a:prstGeom prst="rect">
-            <a:avLst/>
-          </a:prstGeom>
-        </p:spPr>
-      </p:pic>
-      <p:sp>
-        <p:nvSpPr>
-          <p:cNvPr id="11" name="Text 7"/>
-          <p:cNvSpPr/>
-          <p:nvPr/>
-        </p:nvSpPr>
-        <p:spPr>
-          <a:xfrm>
-            <a:off x="4626864" y="2359152"/>
-            <a:ext cx="3108960" cy="365760"/>
-          </a:xfrm>
-          <a:prstGeom prst="rect">
-            <a:avLst/>
-          </a:prstGeom>
-          <a:noFill/>
-          <a:ln/>
-        </p:spPr>
-        <p:txBody>
-          <a:bodyPr wrap="square" lIns="0" tIns="0" rIns="0" bIns="0" rtlCol="0" anchor="ctr"/>
-          <a:lstStyle/>
-          <a:p>
-            <a:pPr indent="0" marL="0">
-              <a:buNone/>
-            </a:pPr>
-            <a:r>
-              <a:rPr lang="en-US" sz="1550" b="1" dirty="0">
+          <p:cNvPr id="7" name="Text 5"/>
+          <p:cNvSpPr/>
+          <p:nvPr/>
+        </p:nvSpPr>
+        <p:spPr>
+          <a:xfrm>
+            <a:off x="4325112" y="1645920"/>
+            <a:ext cx="2834640" cy="548640"/>
+          </a:xfrm>
+          <a:prstGeom prst="rect">
+            <a:avLst/>
+          </a:prstGeom>
+          <a:noFill/>
+          <a:ln/>
+        </p:spPr>
+        <p:txBody>
+          <a:bodyPr wrap="square" lIns="0" tIns="0" rIns="0" bIns="0" rtlCol="0" anchor="ctr"/>
+          <a:lstStyle/>
+          <a:p>
+            <a:pPr indent="0" marL="0">
+              <a:buNone/>
+            </a:pPr>
+            <a:r>
+              <a:rPr lang="en-US" sz="1500" b="1" dirty="0">
                 <a:solidFill>
                   <a:srgbClr val="0F172A"/>
                 </a:solidFill>
@@ -3141,22 +3142,22 @@
                 <a:ea typeface="Calibri" pitchFamily="34" charset="-122"/>
                 <a:cs typeface="Calibri" pitchFamily="34" charset="-120"/>
               </a:rPr>
-              <a:t>Next two quarters</a:t>
-            </a:r>
-            <a:endParaRPr lang="en-US" sz="1550" dirty="0"/>
-          </a:p>
-        </p:txBody>
-      </p:sp>
-      <p:sp>
-        <p:nvSpPr>
-          <p:cNvPr id="12" name="Text 8"/>
-          <p:cNvSpPr/>
-          <p:nvPr/>
-        </p:nvSpPr>
-        <p:spPr>
-          <a:xfrm>
-            <a:off x="4626864" y="2743200"/>
-            <a:ext cx="3127248" cy="1325880"/>
+              <a:t>ERP inventory modules</a:t>
+            </a:r>
+            <a:endParaRPr lang="en-US" sz="1500" dirty="0"/>
+          </a:p>
+        </p:txBody>
+      </p:sp>
+      <p:sp>
+        <p:nvSpPr>
+          <p:cNvPr id="8" name="Text 6"/>
+          <p:cNvSpPr/>
+          <p:nvPr/>
+        </p:nvSpPr>
+        <p:spPr>
+          <a:xfrm>
+            <a:off x="4325112" y="2240280"/>
+            <a:ext cx="2834640" cy="1188720"/>
           </a:xfrm>
           <a:prstGeom prst="rect">
             <a:avLst/>
@@ -3180,7 +3181,7 @@
                 <a:ea typeface="Calibri" pitchFamily="34" charset="-122"/>
                 <a:cs typeface="Calibri" pitchFamily="34" charset="-120"/>
               </a:rPr>
-              <a:t>NetSuite SuiteApp connector first, then SAP/Oracle. Carrier partner API GA + EU QR hand-off standard. Auditor read-only portal. Camera scanning hardened for warehouse light.</a:t>
+              <a:t>Records after the fact. Blind between warehouse scans; nothing captures the hand-off itself.</a:t>
             </a:r>
             <a:endParaRPr lang="en-US" sz="1150" dirty="0"/>
           </a:p>
@@ -3188,22 +3189,22 @@
       </p:sp>
       <p:sp>
         <p:nvSpPr>
-          <p:cNvPr id="13" name="Shape 9"/>
-          <p:cNvSpPr/>
-          <p:nvPr/>
-        </p:nvSpPr>
-        <p:spPr>
-          <a:xfrm>
-            <a:off x="8193024" y="1417320"/>
-            <a:ext cx="3611880" cy="2743200"/>
+          <p:cNvPr id="9" name="Shape 7"/>
+          <p:cNvSpPr/>
+          <p:nvPr/>
+        </p:nvSpPr>
+        <p:spPr>
+          <a:xfrm>
+            <a:off x="548640" y="3749040"/>
+            <a:ext cx="3337560" cy="2148840"/>
           </a:xfrm>
           <a:prstGeom prst="roundRect">
             <a:avLst>
-              <a:gd name="adj" fmla="val 3333"/>
+              <a:gd name="adj" fmla="val 4255"/>
             </a:avLst>
           </a:prstGeom>
           <a:solidFill>
-            <a:srgbClr val="FFFFFF"/>
+            <a:srgbClr val="F8FAFC"/>
           </a:solidFill>
           <a:ln w="12700">
             <a:solidFill>
@@ -3222,74 +3223,30 @@
       </p:sp>
       <p:sp>
         <p:nvSpPr>
-          <p:cNvPr id="14" name="Shape 10"/>
-          <p:cNvSpPr/>
-          <p:nvPr/>
-        </p:nvSpPr>
-        <p:spPr>
-          <a:xfrm>
-            <a:off x="8449056" y="1691640"/>
-            <a:ext cx="512064" cy="512064"/>
-          </a:xfrm>
-          <a:prstGeom prst="ellipse">
-            <a:avLst/>
-          </a:prstGeom>
-          <a:solidFill>
-            <a:srgbClr val="CCFBF1"/>
-          </a:solidFill>
-          <a:ln/>
-        </p:spPr>
-      </p:sp>
-      <p:pic>
-        <p:nvPicPr>
-          <p:cNvPr id="15" name="Image 2" descr="preencoded.png">    </p:cNvPr>
-          <p:cNvPicPr>
-            <a:picLocks noChangeAspect="1"/>
-          </p:cNvPicPr>
-          <p:nvPr/>
-        </p:nvPicPr>
-        <p:blipFill>
-          <a:blip r:embed="rId3"/>
-          <a:stretch>
-            <a:fillRect/>
-          </a:stretch>
-        </p:blipFill>
-        <p:spPr>
-          <a:xfrm>
-            <a:off x="8582193" y="1824777"/>
-            <a:ext cx="245791" cy="245791"/>
-          </a:xfrm>
-          <a:prstGeom prst="rect">
-            <a:avLst/>
-          </a:prstGeom>
-        </p:spPr>
-      </p:pic>
-      <p:sp>
-        <p:nvSpPr>
-          <p:cNvPr id="16" name="Text 11"/>
-          <p:cNvSpPr/>
-          <p:nvPr/>
-        </p:nvSpPr>
-        <p:spPr>
-          <a:xfrm>
-            <a:off x="8449056" y="2359152"/>
-            <a:ext cx="3108960" cy="365760"/>
-          </a:xfrm>
-          <a:prstGeom prst="rect">
-            <a:avLst/>
-          </a:prstGeom>
-          <a:noFill/>
-          <a:ln/>
-        </p:spPr>
-        <p:txBody>
-          <a:bodyPr wrap="square" lIns="0" tIns="0" rIns="0" bIns="0" rtlCol="0" anchor="ctr"/>
-          <a:lstStyle/>
-          <a:p>
-            <a:pPr indent="0" marL="0">
-              <a:buNone/>
-            </a:pPr>
-            <a:r>
-              <a:rPr lang="en-US" sz="1550" b="1" dirty="0">
+          <p:cNvPr id="10" name="Text 8"/>
+          <p:cNvSpPr/>
+          <p:nvPr/>
+        </p:nvSpPr>
+        <p:spPr>
+          <a:xfrm>
+            <a:off x="804672" y="3977640"/>
+            <a:ext cx="2834640" cy="548640"/>
+          </a:xfrm>
+          <a:prstGeom prst="rect">
+            <a:avLst/>
+          </a:prstGeom>
+          <a:noFill/>
+          <a:ln/>
+        </p:spPr>
+        <p:txBody>
+          <a:bodyPr wrap="square" lIns="0" tIns="0" rIns="0" bIns="0" rtlCol="0" anchor="ctr"/>
+          <a:lstStyle/>
+          <a:p>
+            <a:pPr indent="0" marL="0">
+              <a:buNone/>
+            </a:pPr>
+            <a:r>
+              <a:rPr lang="en-US" sz="1500" b="1" dirty="0">
                 <a:solidFill>
                   <a:srgbClr val="0F172A"/>
                 </a:solidFill>
@@ -3297,22 +3254,22 @@
                 <a:ea typeface="Calibri" pitchFamily="34" charset="-122"/>
                 <a:cs typeface="Calibri" pitchFamily="34" charset="-120"/>
               </a:rPr>
-              <a:t>Later</a:t>
-            </a:r>
-            <a:endParaRPr lang="en-US" sz="1550" dirty="0"/>
-          </a:p>
-        </p:txBody>
-      </p:sp>
-      <p:sp>
-        <p:nvSpPr>
-          <p:cNvPr id="17" name="Text 12"/>
-          <p:cNvSpPr/>
-          <p:nvPr/>
-        </p:nvSpPr>
-        <p:spPr>
-          <a:xfrm>
-            <a:off x="8449056" y="2743200"/>
-            <a:ext cx="3127248" cy="1325880"/>
+              <a:t>BlackLine &amp; close tools</a:t>
+            </a:r>
+            <a:endParaRPr lang="en-US" sz="1500" dirty="0"/>
+          </a:p>
+        </p:txBody>
+      </p:sp>
+      <p:sp>
+        <p:nvSpPr>
+          <p:cNvPr id="11" name="Text 9"/>
+          <p:cNvSpPr/>
+          <p:nvPr/>
+        </p:nvSpPr>
+        <p:spPr>
+          <a:xfrm>
+            <a:off x="804672" y="4572000"/>
+            <a:ext cx="2834640" cy="1188720"/>
           </a:xfrm>
           <a:prstGeom prst="rect">
             <a:avLst/>
@@ -3336,7 +3293,7 @@
                 <a:ea typeface="Calibri" pitchFamily="34" charset="-122"/>
                 <a:cs typeface="Calibri" pitchFamily="34" charset="-120"/>
               </a:rPr>
-              <a:t>Duty and tax-timing optimizer (the Dec-vs-Jan purchase planner, productized). Multi-entity and multi-currency. SOC 2.</a:t>
+              <a:t>Automation begins once data exists. They inherit whatever the field failed to capture.</a:t>
             </a:r>
             <a:endParaRPr lang="en-US" sz="1150" dirty="0"/>
           </a:p>
@@ -3344,18 +3301,130 @@
       </p:sp>
       <p:sp>
         <p:nvSpPr>
-          <p:cNvPr id="18" name="Shape 13"/>
-          <p:cNvSpPr/>
-          <p:nvPr/>
-        </p:nvSpPr>
-        <p:spPr>
-          <a:xfrm>
-            <a:off x="548640" y="4526280"/>
-            <a:ext cx="11064240" cy="1600200"/>
+          <p:cNvPr id="12" name="Shape 10"/>
+          <p:cNvSpPr/>
+          <p:nvPr/>
+        </p:nvSpPr>
+        <p:spPr>
+          <a:xfrm>
+            <a:off x="4069080" y="3749040"/>
+            <a:ext cx="3337560" cy="2148840"/>
           </a:xfrm>
           <a:prstGeom prst="roundRect">
             <a:avLst>
-              <a:gd name="adj" fmla="val 5714"/>
+              <a:gd name="adj" fmla="val 4255"/>
+            </a:avLst>
+          </a:prstGeom>
+          <a:solidFill>
+            <a:srgbClr val="F8FAFC"/>
+          </a:solidFill>
+          <a:ln w="12700">
+            <a:solidFill>
+              <a:srgbClr val="E2E8F0"/>
+            </a:solidFill>
+            <a:prstDash val="solid"/>
+          </a:ln>
+          <a:effectLst>
+            <a:outerShdw sx="100000" sy="100000" kx="0" ky="0" algn="bl" rotWithShape="0" blurRad="88900" dist="25400" dir="5400000">
+              <a:srgbClr val="CBD5E1">
+                <a:alpha val="40000"/>
+              </a:srgbClr>
+            </a:outerShdw>
+          </a:effectLst>
+        </p:spPr>
+      </p:sp>
+      <p:sp>
+        <p:nvSpPr>
+          <p:cNvPr id="13" name="Text 11"/>
+          <p:cNvSpPr/>
+          <p:nvPr/>
+        </p:nvSpPr>
+        <p:spPr>
+          <a:xfrm>
+            <a:off x="4325112" y="3977640"/>
+            <a:ext cx="2834640" cy="548640"/>
+          </a:xfrm>
+          <a:prstGeom prst="rect">
+            <a:avLst/>
+          </a:prstGeom>
+          <a:noFill/>
+          <a:ln/>
+        </p:spPr>
+        <p:txBody>
+          <a:bodyPr wrap="square" lIns="0" tIns="0" rIns="0" bIns="0" rtlCol="0" anchor="ctr"/>
+          <a:lstStyle/>
+          <a:p>
+            <a:pPr indent="0" marL="0">
+              <a:buNone/>
+            </a:pPr>
+            <a:r>
+              <a:rPr lang="en-US" sz="1500" b="1" dirty="0">
+                <a:solidFill>
+                  <a:srgbClr val="0F172A"/>
+                </a:solidFill>
+                <a:latin typeface="Calibri" pitchFamily="34" charset="0"/>
+                <a:ea typeface="Calibri" pitchFamily="34" charset="-122"/>
+                <a:cs typeface="Calibri" pitchFamily="34" charset="-120"/>
+              </a:rPr>
+              <a:t>Spreadsheets + email</a:t>
+            </a:r>
+            <a:endParaRPr lang="en-US" sz="1500" dirty="0"/>
+          </a:p>
+        </p:txBody>
+      </p:sp>
+      <p:sp>
+        <p:nvSpPr>
+          <p:cNvPr id="14" name="Text 12"/>
+          <p:cNvSpPr/>
+          <p:nvPr/>
+        </p:nvSpPr>
+        <p:spPr>
+          <a:xfrm>
+            <a:off x="4325112" y="4572000"/>
+            <a:ext cx="2834640" cy="1188720"/>
+          </a:xfrm>
+          <a:prstGeom prst="rect">
+            <a:avLst/>
+          </a:prstGeom>
+          <a:noFill/>
+          <a:ln/>
+        </p:spPr>
+        <p:txBody>
+          <a:bodyPr wrap="square" lIns="0" tIns="0" rIns="0" bIns="0" rtlCol="0" anchor="ctr"/>
+          <a:lstStyle/>
+          <a:p>
+            <a:pPr indent="0" marL="0">
+              <a:buNone/>
+            </a:pPr>
+            <a:r>
+              <a:rPr lang="en-US" sz="1150" dirty="0">
+                <a:solidFill>
+                  <a:srgbClr val="475569"/>
+                </a:solidFill>
+                <a:latin typeface="Calibri" pitchFamily="34" charset="0"/>
+                <a:ea typeface="Calibri" pitchFamily="34" charset="-122"/>
+                <a:cs typeface="Calibri" pitchFamily="34" charset="-120"/>
+              </a:rPr>
+              <a:t>The actual incumbent. Transaction dates live in inboxes until an auditor asks.</a:t>
+            </a:r>
+            <a:endParaRPr lang="en-US" sz="1150" dirty="0"/>
+          </a:p>
+        </p:txBody>
+      </p:sp>
+      <p:sp>
+        <p:nvSpPr>
+          <p:cNvPr id="15" name="Shape 13"/>
+          <p:cNvSpPr/>
+          <p:nvPr/>
+        </p:nvSpPr>
+        <p:spPr>
+          <a:xfrm>
+            <a:off x="7772400" y="1417320"/>
+            <a:ext cx="3840480" cy="4663440"/>
+          </a:xfrm>
+          <a:prstGeom prst="roundRect">
+            <a:avLst>
+              <a:gd name="adj" fmla="val 2381"/>
             </a:avLst>
           </a:prstGeom>
           <a:solidFill>
@@ -3378,14 +3447,53 @@
       </p:sp>
       <p:sp>
         <p:nvSpPr>
-          <p:cNvPr id="19" name="Text 14"/>
-          <p:cNvSpPr/>
-          <p:nvPr/>
-        </p:nvSpPr>
-        <p:spPr>
-          <a:xfrm>
-            <a:off x="914400" y="4754880"/>
-            <a:ext cx="2743200" cy="365760"/>
+          <p:cNvPr id="16" name="Text 14"/>
+          <p:cNvSpPr/>
+          <p:nvPr/>
+        </p:nvSpPr>
+        <p:spPr>
+          <a:xfrm>
+            <a:off x="8092440" y="1691640"/>
+            <a:ext cx="3200400" cy="411480"/>
+          </a:xfrm>
+          <a:prstGeom prst="rect">
+            <a:avLst/>
+          </a:prstGeom>
+          <a:noFill/>
+          <a:ln/>
+        </p:spPr>
+        <p:txBody>
+          <a:bodyPr wrap="square" lIns="0" tIns="0" rIns="0" bIns="0" rtlCol="0" anchor="ctr"/>
+          <a:lstStyle/>
+          <a:p>
+            <a:pPr indent="0" marL="0">
+              <a:buNone/>
+            </a:pPr>
+            <a:r>
+              <a:rPr lang="en-US" sz="1800" b="1" dirty="0">
+                <a:solidFill>
+                  <a:srgbClr val="34D399"/>
+                </a:solidFill>
+                <a:latin typeface="Calibri" pitchFamily="34" charset="0"/>
+                <a:ea typeface="Calibri" pitchFamily="34" charset="-122"/>
+                <a:cs typeface="Calibri" pitchFamily="34" charset="-120"/>
+              </a:rPr>
+              <a:t>Only Transit Guard</a:t>
+            </a:r>
+            <a:endParaRPr lang="en-US" sz="1800" dirty="0"/>
+          </a:p>
+        </p:txBody>
+      </p:sp>
+      <p:sp>
+        <p:nvSpPr>
+          <p:cNvPr id="17" name="Text 15"/>
+          <p:cNvSpPr/>
+          <p:nvPr/>
+        </p:nvSpPr>
+        <p:spPr>
+          <a:xfrm>
+            <a:off x="8092440" y="2286000"/>
+            <a:ext cx="320040" cy="365760"/>
           </a:xfrm>
           <a:prstGeom prst="rect">
             <a:avLst/>
@@ -3409,7 +3517,7 @@
                 <a:ea typeface="Calibri" pitchFamily="34" charset="-122"/>
                 <a:cs typeface="Calibri" pitchFamily="34" charset="-120"/>
               </a:rPr>
-              <a:t>The ask</a:t>
+              <a:t>✓</a:t>
             </a:r>
             <a:endParaRPr lang="en-US" sz="1600" dirty="0"/>
           </a:p>
@@ -3417,30 +3525,30 @@
       </p:sp>
       <p:sp>
         <p:nvSpPr>
-          <p:cNvPr id="20" name="Text 15"/>
-          <p:cNvSpPr/>
-          <p:nvPr/>
-        </p:nvSpPr>
-        <p:spPr>
-          <a:xfrm>
-            <a:off x="914400" y="5138928"/>
-            <a:ext cx="10332720" cy="868680"/>
-          </a:xfrm>
-          <a:prstGeom prst="rect">
-            <a:avLst/>
-          </a:prstGeom>
-          <a:noFill/>
-          <a:ln/>
-        </p:spPr>
-        <p:txBody>
-          <a:bodyPr wrap="square" lIns="0" tIns="0" rIns="0" bIns="0" rtlCol="0" anchor="ctr"/>
-          <a:lstStyle/>
-          <a:p>
-            <a:pPr indent="0" marL="0">
-              <a:buNone/>
-            </a:pPr>
-            <a:r>
-              <a:rPr lang="en-US" sz="1300" dirty="0">
+          <p:cNvPr id="18" name="Text 16"/>
+          <p:cNvSpPr/>
+          <p:nvPr/>
+        </p:nvSpPr>
+        <p:spPr>
+          <a:xfrm>
+            <a:off x="8458200" y="2286000"/>
+            <a:ext cx="2971800" cy="868680"/>
+          </a:xfrm>
+          <a:prstGeom prst="rect">
+            <a:avLst/>
+          </a:prstGeom>
+          <a:noFill/>
+          <a:ln/>
+        </p:spPr>
+        <p:txBody>
+          <a:bodyPr wrap="square" lIns="0" tIns="0" rIns="0" bIns="0" rtlCol="0" anchor="ctr"/>
+          <a:lstStyle/>
+          <a:p>
+            <a:pPr indent="0" marL="0">
+              <a:buNone/>
+            </a:pPr>
+            <a:r>
+              <a:rPr lang="en-US" sz="1150" dirty="0">
                 <a:solidFill>
                   <a:srgbClr val="E2E8F0"/>
                 </a:solidFill>
@@ -3448,9 +3556,243 @@
                 <a:ea typeface="Calibri" pitchFamily="34" charset="-122"/>
                 <a:cs typeface="Calibri" pitchFamily="34" charset="-120"/>
               </a:rPr>
-              <a:t>Three design-partner pilots: hardware companies shipping serialized product internationally on NetSuite or SAP. We instrument one real shipment lane end-to-end and hand your controller the December cutoff file — free, in exchange for feedback and a case study.</a:t>
-            </a:r>
-            <a:endParaRPr lang="en-US" sz="1300" dirty="0"/>
+              <a:t>Accounting-grade custody ledger — every hand-off dated, vendor-signed, exportable</a:t>
+            </a:r>
+            <a:endParaRPr lang="en-US" sz="1150" dirty="0"/>
+          </a:p>
+        </p:txBody>
+      </p:sp>
+      <p:sp>
+        <p:nvSpPr>
+          <p:cNvPr id="19" name="Text 17"/>
+          <p:cNvSpPr/>
+          <p:nvPr/>
+        </p:nvSpPr>
+        <p:spPr>
+          <a:xfrm>
+            <a:off x="8092440" y="3218688"/>
+            <a:ext cx="320040" cy="365760"/>
+          </a:xfrm>
+          <a:prstGeom prst="rect">
+            <a:avLst/>
+          </a:prstGeom>
+          <a:noFill/>
+          <a:ln/>
+        </p:spPr>
+        <p:txBody>
+          <a:bodyPr wrap="square" lIns="0" tIns="0" rIns="0" bIns="0" rtlCol="0" anchor="ctr"/>
+          <a:lstStyle/>
+          <a:p>
+            <a:pPr indent="0" marL="0">
+              <a:buNone/>
+            </a:pPr>
+            <a:r>
+              <a:rPr lang="en-US" sz="1600" b="1" dirty="0">
+                <a:solidFill>
+                  <a:srgbClr val="34D399"/>
+                </a:solidFill>
+                <a:latin typeface="Calibri" pitchFamily="34" charset="0"/>
+                <a:ea typeface="Calibri" pitchFamily="34" charset="-122"/>
+                <a:cs typeface="Calibri" pitchFamily="34" charset="-120"/>
+              </a:rPr>
+              <a:t>✓</a:t>
+            </a:r>
+            <a:endParaRPr lang="en-US" sz="1600" dirty="0"/>
+          </a:p>
+        </p:txBody>
+      </p:sp>
+      <p:sp>
+        <p:nvSpPr>
+          <p:cNvPr id="20" name="Text 18"/>
+          <p:cNvSpPr/>
+          <p:nvPr/>
+        </p:nvSpPr>
+        <p:spPr>
+          <a:xfrm>
+            <a:off x="8458200" y="3218688"/>
+            <a:ext cx="2971800" cy="868680"/>
+          </a:xfrm>
+          <a:prstGeom prst="rect">
+            <a:avLst/>
+          </a:prstGeom>
+          <a:noFill/>
+          <a:ln/>
+        </p:spPr>
+        <p:txBody>
+          <a:bodyPr wrap="square" lIns="0" tIns="0" rIns="0" bIns="0" rtlCol="0" anchor="ctr"/>
+          <a:lstStyle/>
+          <a:p>
+            <a:pPr indent="0" marL="0">
+              <a:buNone/>
+            </a:pPr>
+            <a:r>
+              <a:rPr lang="en-US" sz="1150" dirty="0">
+                <a:solidFill>
+                  <a:srgbClr val="E2E8F0"/>
+                </a:solidFill>
+                <a:latin typeface="Calibri" pitchFamily="34" charset="0"/>
+                <a:ea typeface="Calibri" pitchFamily="34" charset="-122"/>
+                <a:cs typeface="Calibri" pitchFamily="34" charset="-120"/>
+              </a:rPr>
+              <a:t>Customs document engine with valuation-method evidence</a:t>
+            </a:r>
+            <a:endParaRPr lang="en-US" sz="1150" dirty="0"/>
+          </a:p>
+        </p:txBody>
+      </p:sp>
+      <p:sp>
+        <p:nvSpPr>
+          <p:cNvPr id="21" name="Text 19"/>
+          <p:cNvSpPr/>
+          <p:nvPr/>
+        </p:nvSpPr>
+        <p:spPr>
+          <a:xfrm>
+            <a:off x="8092440" y="4151376"/>
+            <a:ext cx="320040" cy="365760"/>
+          </a:xfrm>
+          <a:prstGeom prst="rect">
+            <a:avLst/>
+          </a:prstGeom>
+          <a:noFill/>
+          <a:ln/>
+        </p:spPr>
+        <p:txBody>
+          <a:bodyPr wrap="square" lIns="0" tIns="0" rIns="0" bIns="0" rtlCol="0" anchor="ctr"/>
+          <a:lstStyle/>
+          <a:p>
+            <a:pPr indent="0" marL="0">
+              <a:buNone/>
+            </a:pPr>
+            <a:r>
+              <a:rPr lang="en-US" sz="1600" b="1" dirty="0">
+                <a:solidFill>
+                  <a:srgbClr val="34D399"/>
+                </a:solidFill>
+                <a:latin typeface="Calibri" pitchFamily="34" charset="0"/>
+                <a:ea typeface="Calibri" pitchFamily="34" charset="-122"/>
+                <a:cs typeface="Calibri" pitchFamily="34" charset="-120"/>
+              </a:rPr>
+              <a:t>✓</a:t>
+            </a:r>
+            <a:endParaRPr lang="en-US" sz="1600" dirty="0"/>
+          </a:p>
+        </p:txBody>
+      </p:sp>
+      <p:sp>
+        <p:nvSpPr>
+          <p:cNvPr id="22" name="Text 20"/>
+          <p:cNvSpPr/>
+          <p:nvPr/>
+        </p:nvSpPr>
+        <p:spPr>
+          <a:xfrm>
+            <a:off x="8458200" y="4151376"/>
+            <a:ext cx="2971800" cy="868680"/>
+          </a:xfrm>
+          <a:prstGeom prst="rect">
+            <a:avLst/>
+          </a:prstGeom>
+          <a:noFill/>
+          <a:ln/>
+        </p:spPr>
+        <p:txBody>
+          <a:bodyPr wrap="square" lIns="0" tIns="0" rIns="0" bIns="0" rtlCol="0" anchor="ctr"/>
+          <a:lstStyle/>
+          <a:p>
+            <a:pPr indent="0" marL="0">
+              <a:buNone/>
+            </a:pPr>
+            <a:r>
+              <a:rPr lang="en-US" sz="1150" dirty="0">
+                <a:solidFill>
+                  <a:srgbClr val="E2E8F0"/>
+                </a:solidFill>
+                <a:latin typeface="Calibri" pitchFamily="34" charset="0"/>
+                <a:ea typeface="Calibri" pitchFamily="34" charset="-122"/>
+                <a:cs typeface="Calibri" pitchFamily="34" charset="-120"/>
+              </a:rPr>
+              <a:t>AI flags tied to materiality: cutoff, accruals, count scope, tax timing</a:t>
+            </a:r>
+            <a:endParaRPr lang="en-US" sz="1150" dirty="0"/>
+          </a:p>
+        </p:txBody>
+      </p:sp>
+      <p:sp>
+        <p:nvSpPr>
+          <p:cNvPr id="23" name="Text 21"/>
+          <p:cNvSpPr/>
+          <p:nvPr/>
+        </p:nvSpPr>
+        <p:spPr>
+          <a:xfrm>
+            <a:off x="8092440" y="5084064"/>
+            <a:ext cx="320040" cy="365760"/>
+          </a:xfrm>
+          <a:prstGeom prst="rect">
+            <a:avLst/>
+          </a:prstGeom>
+          <a:noFill/>
+          <a:ln/>
+        </p:spPr>
+        <p:txBody>
+          <a:bodyPr wrap="square" lIns="0" tIns="0" rIns="0" bIns="0" rtlCol="0" anchor="ctr"/>
+          <a:lstStyle/>
+          <a:p>
+            <a:pPr indent="0" marL="0">
+              <a:buNone/>
+            </a:pPr>
+            <a:r>
+              <a:rPr lang="en-US" sz="1600" b="1" dirty="0">
+                <a:solidFill>
+                  <a:srgbClr val="34D399"/>
+                </a:solidFill>
+                <a:latin typeface="Calibri" pitchFamily="34" charset="0"/>
+                <a:ea typeface="Calibri" pitchFamily="34" charset="-122"/>
+                <a:cs typeface="Calibri" pitchFamily="34" charset="-120"/>
+              </a:rPr>
+              <a:t>✓</a:t>
+            </a:r>
+            <a:endParaRPr lang="en-US" sz="1600" dirty="0"/>
+          </a:p>
+        </p:txBody>
+      </p:sp>
+      <p:sp>
+        <p:nvSpPr>
+          <p:cNvPr id="24" name="Text 22"/>
+          <p:cNvSpPr/>
+          <p:nvPr/>
+        </p:nvSpPr>
+        <p:spPr>
+          <a:xfrm>
+            <a:off x="8458200" y="5084064"/>
+            <a:ext cx="2971800" cy="868680"/>
+          </a:xfrm>
+          <a:prstGeom prst="rect">
+            <a:avLst/>
+          </a:prstGeom>
+          <a:noFill/>
+          <a:ln/>
+        </p:spPr>
+        <p:txBody>
+          <a:bodyPr wrap="square" lIns="0" tIns="0" rIns="0" bIns="0" rtlCol="0" anchor="ctr"/>
+          <a:lstStyle/>
+          <a:p>
+            <a:pPr indent="0" marL="0">
+              <a:buNone/>
+            </a:pPr>
+            <a:r>
+              <a:rPr lang="en-US" sz="1150" dirty="0">
+                <a:solidFill>
+                  <a:srgbClr val="E2E8F0"/>
+                </a:solidFill>
+                <a:latin typeface="Calibri" pitchFamily="34" charset="0"/>
+                <a:ea typeface="Calibri" pitchFamily="34" charset="-122"/>
+                <a:cs typeface="Calibri" pitchFamily="34" charset="-120"/>
+              </a:rPr>
+              <a:t>Built for the warehouse: mobile-first, multilingual, on-device OCR</a:t>
+            </a:r>
+            <a:endParaRPr lang="en-US" sz="1150" dirty="0"/>
           </a:p>
         </p:txBody>
       </p:sp>
@@ -3519,6 +3861,657 @@
                 <a:ea typeface="Calibri" pitchFamily="34" charset="-122"/>
                 <a:cs typeface="Calibri" pitchFamily="34" charset="-120"/>
               </a:rPr>
+              <a:t>From hackathon to pilot.</a:t>
+            </a:r>
+            <a:endParaRPr lang="en-US" sz="3400" dirty="0"/>
+          </a:p>
+        </p:txBody>
+      </p:sp>
+      <p:sp>
+        <p:nvSpPr>
+          <p:cNvPr id="3" name="Shape 1"/>
+          <p:cNvSpPr/>
+          <p:nvPr/>
+        </p:nvSpPr>
+        <p:spPr>
+          <a:xfrm>
+            <a:off x="548640" y="1417320"/>
+            <a:ext cx="3611880" cy="2743200"/>
+          </a:xfrm>
+          <a:prstGeom prst="roundRect">
+            <a:avLst>
+              <a:gd name="adj" fmla="val 3333"/>
+            </a:avLst>
+          </a:prstGeom>
+          <a:solidFill>
+            <a:srgbClr val="FFFFFF"/>
+          </a:solidFill>
+          <a:ln w="12700">
+            <a:solidFill>
+              <a:srgbClr val="E2E8F0"/>
+            </a:solidFill>
+            <a:prstDash val="solid"/>
+          </a:ln>
+          <a:effectLst>
+            <a:outerShdw sx="100000" sy="100000" kx="0" ky="0" algn="bl" rotWithShape="0" blurRad="88900" dist="25400" dir="5400000">
+              <a:srgbClr val="CBD5E1">
+                <a:alpha val="40000"/>
+              </a:srgbClr>
+            </a:outerShdw>
+          </a:effectLst>
+        </p:spPr>
+      </p:sp>
+      <p:sp>
+        <p:nvSpPr>
+          <p:cNvPr id="4" name="Shape 2"/>
+          <p:cNvSpPr/>
+          <p:nvPr/>
+        </p:nvSpPr>
+        <p:spPr>
+          <a:xfrm>
+            <a:off x="804672" y="1691640"/>
+            <a:ext cx="512064" cy="512064"/>
+          </a:xfrm>
+          <a:prstGeom prst="ellipse">
+            <a:avLst/>
+          </a:prstGeom>
+          <a:solidFill>
+            <a:srgbClr val="D1FAE5"/>
+          </a:solidFill>
+          <a:ln/>
+        </p:spPr>
+      </p:sp>
+      <p:pic>
+        <p:nvPicPr>
+          <p:cNvPr id="5" name="Image 0" descr="preencoded.png">    </p:cNvPr>
+          <p:cNvPicPr>
+            <a:picLocks noChangeAspect="1"/>
+          </p:cNvPicPr>
+          <p:nvPr/>
+        </p:nvPicPr>
+        <p:blipFill>
+          <a:blip r:embed="rId1"/>
+          <a:stretch>
+            <a:fillRect/>
+          </a:stretch>
+        </p:blipFill>
+        <p:spPr>
+          <a:xfrm>
+            <a:off x="937809" y="1824777"/>
+            <a:ext cx="245791" cy="245791"/>
+          </a:xfrm>
+          <a:prstGeom prst="rect">
+            <a:avLst/>
+          </a:prstGeom>
+        </p:spPr>
+      </p:pic>
+      <p:sp>
+        <p:nvSpPr>
+          <p:cNvPr id="6" name="Text 3"/>
+          <p:cNvSpPr/>
+          <p:nvPr/>
+        </p:nvSpPr>
+        <p:spPr>
+          <a:xfrm>
+            <a:off x="804672" y="2359152"/>
+            <a:ext cx="3108960" cy="365760"/>
+          </a:xfrm>
+          <a:prstGeom prst="rect">
+            <a:avLst/>
+          </a:prstGeom>
+          <a:noFill/>
+          <a:ln/>
+        </p:spPr>
+        <p:txBody>
+          <a:bodyPr wrap="square" lIns="0" tIns="0" rIns="0" bIns="0" rtlCol="0" anchor="ctr"/>
+          <a:lstStyle/>
+          <a:p>
+            <a:pPr indent="0" marL="0">
+              <a:buNone/>
+            </a:pPr>
+            <a:r>
+              <a:rPr lang="en-US" sz="1550" b="1" dirty="0">
+                <a:solidFill>
+                  <a:srgbClr val="0F172A"/>
+                </a:solidFill>
+                <a:latin typeface="Calibri" pitchFamily="34" charset="0"/>
+                <a:ea typeface="Calibri" pitchFamily="34" charset="-122"/>
+                <a:cs typeface="Calibri" pitchFamily="34" charset="-120"/>
+              </a:rPr>
+              <a:t>Now — built this week</a:t>
+            </a:r>
+            <a:endParaRPr lang="en-US" sz="1550" dirty="0"/>
+          </a:p>
+        </p:txBody>
+      </p:sp>
+      <p:sp>
+        <p:nvSpPr>
+          <p:cNvPr id="7" name="Text 4"/>
+          <p:cNvSpPr/>
+          <p:nvPr/>
+        </p:nvSpPr>
+        <p:spPr>
+          <a:xfrm>
+            <a:off x="804672" y="2743200"/>
+            <a:ext cx="3127248" cy="1325880"/>
+          </a:xfrm>
+          <a:prstGeom prst="rect">
+            <a:avLst/>
+          </a:prstGeom>
+          <a:noFill/>
+          <a:ln/>
+        </p:spPr>
+        <p:txBody>
+          <a:bodyPr wrap="square" lIns="0" tIns="0" rIns="0" bIns="0" rtlCol="0" anchor="ctr"/>
+          <a:lstStyle/>
+          <a:p>
+            <a:pPr indent="0" marL="0">
+              <a:buNone/>
+            </a:pPr>
+            <a:r>
+              <a:rPr lang="en-US" sz="1150" dirty="0">
+                <a:solidFill>
+                  <a:srgbClr val="475569"/>
+                </a:solidFill>
+                <a:latin typeface="Calibri" pitchFamily="34" charset="0"/>
+                <a:ea typeface="Calibri" pitchFamily="34" charset="-122"/>
+                <a:cs typeface="Calibri" pitchFamily="34" charset="-120"/>
+              </a:rPr>
+              <a:t>Working phone-frame demo: AI vendor search, scan intake, custody chains, EU hand-off QR, customs engine, AI flags, audit export, EN/ES/FR, on-device OCR.</a:t>
+            </a:r>
+            <a:endParaRPr lang="en-US" sz="1150" dirty="0"/>
+          </a:p>
+        </p:txBody>
+      </p:sp>
+      <p:sp>
+        <p:nvSpPr>
+          <p:cNvPr id="8" name="Shape 5"/>
+          <p:cNvSpPr/>
+          <p:nvPr/>
+        </p:nvSpPr>
+        <p:spPr>
+          <a:xfrm>
+            <a:off x="4370832" y="1417320"/>
+            <a:ext cx="3611880" cy="2743200"/>
+          </a:xfrm>
+          <a:prstGeom prst="roundRect">
+            <a:avLst>
+              <a:gd name="adj" fmla="val 3333"/>
+            </a:avLst>
+          </a:prstGeom>
+          <a:solidFill>
+            <a:srgbClr val="FFFFFF"/>
+          </a:solidFill>
+          <a:ln w="12700">
+            <a:solidFill>
+              <a:srgbClr val="E2E8F0"/>
+            </a:solidFill>
+            <a:prstDash val="solid"/>
+          </a:ln>
+          <a:effectLst>
+            <a:outerShdw sx="100000" sy="100000" kx="0" ky="0" algn="bl" rotWithShape="0" blurRad="88900" dist="25400" dir="5400000">
+              <a:srgbClr val="CBD5E1">
+                <a:alpha val="40000"/>
+              </a:srgbClr>
+            </a:outerShdw>
+          </a:effectLst>
+        </p:spPr>
+      </p:sp>
+      <p:sp>
+        <p:nvSpPr>
+          <p:cNvPr id="9" name="Shape 6"/>
+          <p:cNvSpPr/>
+          <p:nvPr/>
+        </p:nvSpPr>
+        <p:spPr>
+          <a:xfrm>
+            <a:off x="4626864" y="1691640"/>
+            <a:ext cx="512064" cy="512064"/>
+          </a:xfrm>
+          <a:prstGeom prst="ellipse">
+            <a:avLst/>
+          </a:prstGeom>
+          <a:solidFill>
+            <a:srgbClr val="D1FAE5"/>
+          </a:solidFill>
+          <a:ln/>
+        </p:spPr>
+      </p:sp>
+      <p:pic>
+        <p:nvPicPr>
+          <p:cNvPr id="10" name="Image 1" descr="preencoded.png">    </p:cNvPr>
+          <p:cNvPicPr>
+            <a:picLocks noChangeAspect="1"/>
+          </p:cNvPicPr>
+          <p:nvPr/>
+        </p:nvPicPr>
+        <p:blipFill>
+          <a:blip r:embed="rId2"/>
+          <a:stretch>
+            <a:fillRect/>
+          </a:stretch>
+        </p:blipFill>
+        <p:spPr>
+          <a:xfrm>
+            <a:off x="4760001" y="1824777"/>
+            <a:ext cx="245791" cy="245791"/>
+          </a:xfrm>
+          <a:prstGeom prst="rect">
+            <a:avLst/>
+          </a:prstGeom>
+        </p:spPr>
+      </p:pic>
+      <p:sp>
+        <p:nvSpPr>
+          <p:cNvPr id="11" name="Text 7"/>
+          <p:cNvSpPr/>
+          <p:nvPr/>
+        </p:nvSpPr>
+        <p:spPr>
+          <a:xfrm>
+            <a:off x="4626864" y="2359152"/>
+            <a:ext cx="3108960" cy="365760"/>
+          </a:xfrm>
+          <a:prstGeom prst="rect">
+            <a:avLst/>
+          </a:prstGeom>
+          <a:noFill/>
+          <a:ln/>
+        </p:spPr>
+        <p:txBody>
+          <a:bodyPr wrap="square" lIns="0" tIns="0" rIns="0" bIns="0" rtlCol="0" anchor="ctr"/>
+          <a:lstStyle/>
+          <a:p>
+            <a:pPr indent="0" marL="0">
+              <a:buNone/>
+            </a:pPr>
+            <a:r>
+              <a:rPr lang="en-US" sz="1550" b="1" dirty="0">
+                <a:solidFill>
+                  <a:srgbClr val="0F172A"/>
+                </a:solidFill>
+                <a:latin typeface="Calibri" pitchFamily="34" charset="0"/>
+                <a:ea typeface="Calibri" pitchFamily="34" charset="-122"/>
+                <a:cs typeface="Calibri" pitchFamily="34" charset="-120"/>
+              </a:rPr>
+              <a:t>Next two quarters</a:t>
+            </a:r>
+            <a:endParaRPr lang="en-US" sz="1550" dirty="0"/>
+          </a:p>
+        </p:txBody>
+      </p:sp>
+      <p:sp>
+        <p:nvSpPr>
+          <p:cNvPr id="12" name="Text 8"/>
+          <p:cNvSpPr/>
+          <p:nvPr/>
+        </p:nvSpPr>
+        <p:spPr>
+          <a:xfrm>
+            <a:off x="4626864" y="2743200"/>
+            <a:ext cx="3127248" cy="1325880"/>
+          </a:xfrm>
+          <a:prstGeom prst="rect">
+            <a:avLst/>
+          </a:prstGeom>
+          <a:noFill/>
+          <a:ln/>
+        </p:spPr>
+        <p:txBody>
+          <a:bodyPr wrap="square" lIns="0" tIns="0" rIns="0" bIns="0" rtlCol="0" anchor="ctr"/>
+          <a:lstStyle/>
+          <a:p>
+            <a:pPr indent="0" marL="0">
+              <a:buNone/>
+            </a:pPr>
+            <a:r>
+              <a:rPr lang="en-US" sz="1150" dirty="0">
+                <a:solidFill>
+                  <a:srgbClr val="475569"/>
+                </a:solidFill>
+                <a:latin typeface="Calibri" pitchFamily="34" charset="0"/>
+                <a:ea typeface="Calibri" pitchFamily="34" charset="-122"/>
+                <a:cs typeface="Calibri" pitchFamily="34" charset="-120"/>
+              </a:rPr>
+              <a:t>NetSuite SuiteApp connector first, then SAP/Oracle. Carrier partner API GA + EU QR hand-off standard. Auditor read-only portal. Camera scanning hardened for warehouse light.</a:t>
+            </a:r>
+            <a:endParaRPr lang="en-US" sz="1150" dirty="0"/>
+          </a:p>
+        </p:txBody>
+      </p:sp>
+      <p:sp>
+        <p:nvSpPr>
+          <p:cNvPr id="13" name="Shape 9"/>
+          <p:cNvSpPr/>
+          <p:nvPr/>
+        </p:nvSpPr>
+        <p:spPr>
+          <a:xfrm>
+            <a:off x="8193024" y="1417320"/>
+            <a:ext cx="3611880" cy="2743200"/>
+          </a:xfrm>
+          <a:prstGeom prst="roundRect">
+            <a:avLst>
+              <a:gd name="adj" fmla="val 3333"/>
+            </a:avLst>
+          </a:prstGeom>
+          <a:solidFill>
+            <a:srgbClr val="FFFFFF"/>
+          </a:solidFill>
+          <a:ln w="12700">
+            <a:solidFill>
+              <a:srgbClr val="E2E8F0"/>
+            </a:solidFill>
+            <a:prstDash val="solid"/>
+          </a:ln>
+          <a:effectLst>
+            <a:outerShdw sx="100000" sy="100000" kx="0" ky="0" algn="bl" rotWithShape="0" blurRad="88900" dist="25400" dir="5400000">
+              <a:srgbClr val="CBD5E1">
+                <a:alpha val="40000"/>
+              </a:srgbClr>
+            </a:outerShdw>
+          </a:effectLst>
+        </p:spPr>
+      </p:sp>
+      <p:sp>
+        <p:nvSpPr>
+          <p:cNvPr id="14" name="Shape 10"/>
+          <p:cNvSpPr/>
+          <p:nvPr/>
+        </p:nvSpPr>
+        <p:spPr>
+          <a:xfrm>
+            <a:off x="8449056" y="1691640"/>
+            <a:ext cx="512064" cy="512064"/>
+          </a:xfrm>
+          <a:prstGeom prst="ellipse">
+            <a:avLst/>
+          </a:prstGeom>
+          <a:solidFill>
+            <a:srgbClr val="CCFBF1"/>
+          </a:solidFill>
+          <a:ln/>
+        </p:spPr>
+      </p:sp>
+      <p:pic>
+        <p:nvPicPr>
+          <p:cNvPr id="15" name="Image 2" descr="preencoded.png">    </p:cNvPr>
+          <p:cNvPicPr>
+            <a:picLocks noChangeAspect="1"/>
+          </p:cNvPicPr>
+          <p:nvPr/>
+        </p:nvPicPr>
+        <p:blipFill>
+          <a:blip r:embed="rId3"/>
+          <a:stretch>
+            <a:fillRect/>
+          </a:stretch>
+        </p:blipFill>
+        <p:spPr>
+          <a:xfrm>
+            <a:off x="8582193" y="1824777"/>
+            <a:ext cx="245791" cy="245791"/>
+          </a:xfrm>
+          <a:prstGeom prst="rect">
+            <a:avLst/>
+          </a:prstGeom>
+        </p:spPr>
+      </p:pic>
+      <p:sp>
+        <p:nvSpPr>
+          <p:cNvPr id="16" name="Text 11"/>
+          <p:cNvSpPr/>
+          <p:nvPr/>
+        </p:nvSpPr>
+        <p:spPr>
+          <a:xfrm>
+            <a:off x="8449056" y="2359152"/>
+            <a:ext cx="3108960" cy="365760"/>
+          </a:xfrm>
+          <a:prstGeom prst="rect">
+            <a:avLst/>
+          </a:prstGeom>
+          <a:noFill/>
+          <a:ln/>
+        </p:spPr>
+        <p:txBody>
+          <a:bodyPr wrap="square" lIns="0" tIns="0" rIns="0" bIns="0" rtlCol="0" anchor="ctr"/>
+          <a:lstStyle/>
+          <a:p>
+            <a:pPr indent="0" marL="0">
+              <a:buNone/>
+            </a:pPr>
+            <a:r>
+              <a:rPr lang="en-US" sz="1550" b="1" dirty="0">
+                <a:solidFill>
+                  <a:srgbClr val="0F172A"/>
+                </a:solidFill>
+                <a:latin typeface="Calibri" pitchFamily="34" charset="0"/>
+                <a:ea typeface="Calibri" pitchFamily="34" charset="-122"/>
+                <a:cs typeface="Calibri" pitchFamily="34" charset="-120"/>
+              </a:rPr>
+              <a:t>Later</a:t>
+            </a:r>
+            <a:endParaRPr lang="en-US" sz="1550" dirty="0"/>
+          </a:p>
+        </p:txBody>
+      </p:sp>
+      <p:sp>
+        <p:nvSpPr>
+          <p:cNvPr id="17" name="Text 12"/>
+          <p:cNvSpPr/>
+          <p:nvPr/>
+        </p:nvSpPr>
+        <p:spPr>
+          <a:xfrm>
+            <a:off x="8449056" y="2743200"/>
+            <a:ext cx="3127248" cy="1325880"/>
+          </a:xfrm>
+          <a:prstGeom prst="rect">
+            <a:avLst/>
+          </a:prstGeom>
+          <a:noFill/>
+          <a:ln/>
+        </p:spPr>
+        <p:txBody>
+          <a:bodyPr wrap="square" lIns="0" tIns="0" rIns="0" bIns="0" rtlCol="0" anchor="ctr"/>
+          <a:lstStyle/>
+          <a:p>
+            <a:pPr indent="0" marL="0">
+              <a:buNone/>
+            </a:pPr>
+            <a:r>
+              <a:rPr lang="en-US" sz="1150" dirty="0">
+                <a:solidFill>
+                  <a:srgbClr val="475569"/>
+                </a:solidFill>
+                <a:latin typeface="Calibri" pitchFamily="34" charset="0"/>
+                <a:ea typeface="Calibri" pitchFamily="34" charset="-122"/>
+                <a:cs typeface="Calibri" pitchFamily="34" charset="-120"/>
+              </a:rPr>
+              <a:t>Duty and tax-timing optimizer (the Dec-vs-Jan purchase planner, productized). Multi-entity and multi-currency. SOC 2.</a:t>
+            </a:r>
+            <a:endParaRPr lang="en-US" sz="1150" dirty="0"/>
+          </a:p>
+        </p:txBody>
+      </p:sp>
+      <p:sp>
+        <p:nvSpPr>
+          <p:cNvPr id="18" name="Shape 13"/>
+          <p:cNvSpPr/>
+          <p:nvPr/>
+        </p:nvSpPr>
+        <p:spPr>
+          <a:xfrm>
+            <a:off x="548640" y="4526280"/>
+            <a:ext cx="11064240" cy="1600200"/>
+          </a:xfrm>
+          <a:prstGeom prst="roundRect">
+            <a:avLst>
+              <a:gd name="adj" fmla="val 5714"/>
+            </a:avLst>
+          </a:prstGeom>
+          <a:solidFill>
+            <a:srgbClr val="0F172A"/>
+          </a:solidFill>
+          <a:ln w="12700">
+            <a:solidFill>
+              <a:srgbClr val="E2E8F0"/>
+            </a:solidFill>
+            <a:prstDash val="solid"/>
+          </a:ln>
+          <a:effectLst>
+            <a:outerShdw sx="100000" sy="100000" kx="0" ky="0" algn="bl" rotWithShape="0" blurRad="88900" dist="25400" dir="5400000">
+              <a:srgbClr val="CBD5E1">
+                <a:alpha val="40000"/>
+              </a:srgbClr>
+            </a:outerShdw>
+          </a:effectLst>
+        </p:spPr>
+      </p:sp>
+      <p:sp>
+        <p:nvSpPr>
+          <p:cNvPr id="19" name="Text 14"/>
+          <p:cNvSpPr/>
+          <p:nvPr/>
+        </p:nvSpPr>
+        <p:spPr>
+          <a:xfrm>
+            <a:off x="914400" y="4754880"/>
+            <a:ext cx="2743200" cy="365760"/>
+          </a:xfrm>
+          <a:prstGeom prst="rect">
+            <a:avLst/>
+          </a:prstGeom>
+          <a:noFill/>
+          <a:ln/>
+        </p:spPr>
+        <p:txBody>
+          <a:bodyPr wrap="square" lIns="0" tIns="0" rIns="0" bIns="0" rtlCol="0" anchor="ctr"/>
+          <a:lstStyle/>
+          <a:p>
+            <a:pPr indent="0" marL="0">
+              <a:buNone/>
+            </a:pPr>
+            <a:r>
+              <a:rPr lang="en-US" sz="1600" b="1" dirty="0">
+                <a:solidFill>
+                  <a:srgbClr val="34D399"/>
+                </a:solidFill>
+                <a:latin typeface="Calibri" pitchFamily="34" charset="0"/>
+                <a:ea typeface="Calibri" pitchFamily="34" charset="-122"/>
+                <a:cs typeface="Calibri" pitchFamily="34" charset="-120"/>
+              </a:rPr>
+              <a:t>The ask</a:t>
+            </a:r>
+            <a:endParaRPr lang="en-US" sz="1600" dirty="0"/>
+          </a:p>
+        </p:txBody>
+      </p:sp>
+      <p:sp>
+        <p:nvSpPr>
+          <p:cNvPr id="20" name="Text 15"/>
+          <p:cNvSpPr/>
+          <p:nvPr/>
+        </p:nvSpPr>
+        <p:spPr>
+          <a:xfrm>
+            <a:off x="914400" y="5138928"/>
+            <a:ext cx="10332720" cy="868680"/>
+          </a:xfrm>
+          <a:prstGeom prst="rect">
+            <a:avLst/>
+          </a:prstGeom>
+          <a:noFill/>
+          <a:ln/>
+        </p:spPr>
+        <p:txBody>
+          <a:bodyPr wrap="square" lIns="0" tIns="0" rIns="0" bIns="0" rtlCol="0" anchor="ctr"/>
+          <a:lstStyle/>
+          <a:p>
+            <a:pPr indent="0" marL="0">
+              <a:buNone/>
+            </a:pPr>
+            <a:r>
+              <a:rPr lang="en-US" sz="1300" dirty="0">
+                <a:solidFill>
+                  <a:srgbClr val="E2E8F0"/>
+                </a:solidFill>
+                <a:latin typeface="Calibri" pitchFamily="34" charset="0"/>
+                <a:ea typeface="Calibri" pitchFamily="34" charset="-122"/>
+                <a:cs typeface="Calibri" pitchFamily="34" charset="-120"/>
+              </a:rPr>
+              <a:t>Three design-partner pilots: hardware companies shipping serialized product internationally on NetSuite or SAP. We instrument one real shipment lane end-to-end and hand your controller the December cutoff file — free, in exchange for feedback and a case study.</a:t>
+            </a:r>
+            <a:endParaRPr lang="en-US" sz="1300" dirty="0"/>
+          </a:p>
+        </p:txBody>
+      </p:sp>
+    </p:spTree>
+  </p:cSld>
+  <p:clrMapOvr>
+    <a:masterClrMapping/>
+  </p:clrMapOvr>
+</p:sld>
+</file>
+
+<file path=ppt/slides/slide12.xml><?xml version="1.0" encoding="utf-8"?>
+<p:sld xmlns:a="http://schemas.openxmlformats.org/drawingml/2006/main" xmlns:r="http://schemas.openxmlformats.org/officeDocument/2006/relationships" xmlns:p="http://schemas.openxmlformats.org/presentationml/2006/main">
+  <p:cSld name="Slide 12">
+    <p:bg>
+      <p:bgPr>
+        <a:solidFill>
+          <a:srgbClr val="FFFFFF"/>
+        </a:solidFill>
+      </p:bgPr>
+    </p:bg>
+    <p:spTree>
+      <p:nvGrpSpPr>
+        <p:cNvPr id="1" name=""/>
+        <p:cNvGrpSpPr/>
+        <p:nvPr/>
+      </p:nvGrpSpPr>
+      <p:grpSpPr>
+        <a:xfrm>
+          <a:off x="0" y="0"/>
+          <a:ext cx="0" cy="0"/>
+          <a:chOff x="0" y="0"/>
+          <a:chExt cx="0" cy="0"/>
+        </a:xfrm>
+      </p:grpSpPr>
+      <p:sp>
+        <p:nvSpPr>
+          <p:cNvPr id="2" name="Text 0"/>
+          <p:cNvSpPr/>
+          <p:nvPr/>
+        </p:nvSpPr>
+        <p:spPr>
+          <a:xfrm>
+            <a:off x="548640" y="411480"/>
+            <a:ext cx="11064240" cy="640080"/>
+          </a:xfrm>
+          <a:prstGeom prst="rect">
+            <a:avLst/>
+          </a:prstGeom>
+          <a:noFill/>
+          <a:ln/>
+        </p:spPr>
+        <p:txBody>
+          <a:bodyPr wrap="square" lIns="0" tIns="0" rIns="0" bIns="0" rtlCol="0" anchor="ctr"/>
+          <a:lstStyle/>
+          <a:p>
+            <a:pPr indent="0" marL="0">
+              <a:buNone/>
+            </a:pPr>
+            <a:r>
+              <a:rPr lang="en-US" sz="3400" b="1" dirty="0">
+                <a:solidFill>
+                  <a:srgbClr val="0F172A"/>
+                </a:solidFill>
+                <a:latin typeface="Calibri" pitchFamily="34" charset="0"/>
+                <a:ea typeface="Calibri" pitchFamily="34" charset="-122"/>
+                <a:cs typeface="Calibri" pitchFamily="34" charset="-120"/>
+              </a:rPr>
               <a:t>Track 2 — Value of Intelligence.</a:t>
             </a:r>
             <a:endParaRPr lang="en-US" sz="3400" dirty="0"/>
@@ -4124,9 +5117,9 @@
 </p:sld>
 </file>
 
-<file path=ppt/slides/slide12.xml><?xml version="1.0" encoding="utf-8"?>
+<file path=ppt/slides/slide13.xml><?xml version="1.0" encoding="utf-8"?>
 <p:sld xmlns:a="http://schemas.openxmlformats.org/drawingml/2006/main" xmlns:r="http://schemas.openxmlformats.org/officeDocument/2006/relationships" xmlns:p="http://schemas.openxmlformats.org/presentationml/2006/main">
-  <p:cSld name="Slide 12">
+  <p:cSld name="Slide 13">
     <p:bg>
       <p:bgPr>
         <a:solidFill>
@@ -10979,7 +11972,7 @@
                 <a:ea typeface="Calibri" pitchFamily="34" charset="-122"/>
                 <a:cs typeface="Calibri" pitchFamily="34" charset="-120"/>
               </a:rPr>
-              <a:t>Built to complement the stack you already run.</a:t>
+              <a:t>Agents coordinate. Humans stay in control.</a:t>
             </a:r>
             <a:endParaRPr lang="en-US" sz="3400" dirty="0"/>
           </a:p>
@@ -10987,22 +11980,609 @@
       </p:sp>
       <p:sp>
         <p:nvSpPr>
-          <p:cNvPr id="3" name="Shape 1"/>
-          <p:cNvSpPr/>
-          <p:nvPr/>
-        </p:nvSpPr>
-        <p:spPr>
-          <a:xfrm>
-            <a:off x="548640" y="1600200"/>
-            <a:ext cx="3383280" cy="2651760"/>
+          <p:cNvPr id="3" name="Text 1"/>
+          <p:cNvSpPr/>
+          <p:nvPr/>
+        </p:nvSpPr>
+        <p:spPr>
+          <a:xfrm>
+            <a:off x="548640" y="1078992"/>
+            <a:ext cx="10881360" cy="411480"/>
+          </a:xfrm>
+          <a:prstGeom prst="rect">
+            <a:avLst/>
+          </a:prstGeom>
+          <a:noFill/>
+          <a:ln/>
+        </p:spPr>
+        <p:txBody>
+          <a:bodyPr wrap="square" lIns="0" tIns="0" rIns="0" bIns="0" rtlCol="0" anchor="ctr"/>
+          <a:lstStyle/>
+          <a:p>
+            <a:pPr indent="0" marL="0">
+              <a:buNone/>
+            </a:pPr>
+            <a:r>
+              <a:rPr lang="en-US" sz="1400" dirty="0">
+                <a:solidFill>
+                  <a:srgbClr val="475569"/>
+                </a:solidFill>
+                <a:latin typeface="Calibri" pitchFamily="34" charset="0"/>
+                <a:ea typeface="Calibri" pitchFamily="34" charset="-122"/>
+                <a:cs typeface="Calibri" pitchFamily="34" charset="-120"/>
+              </a:rPr>
+              <a:t>Routes are defined by carrier acceptance of availability — matched on weights &amp; measures through each freight vendor’s availability API.</a:t>
+            </a:r>
+            <a:endParaRPr lang="en-US" sz="1400" dirty="0"/>
+          </a:p>
+        </p:txBody>
+      </p:sp>
+      <p:sp>
+        <p:nvSpPr>
+          <p:cNvPr id="4" name="Shape 2"/>
+          <p:cNvSpPr/>
+          <p:nvPr/>
+        </p:nvSpPr>
+        <p:spPr>
+          <a:xfrm>
+            <a:off x="548640" y="1755648"/>
+            <a:ext cx="475488" cy="475488"/>
+          </a:xfrm>
+          <a:prstGeom prst="ellipse">
+            <a:avLst/>
+          </a:prstGeom>
+          <a:solidFill>
+            <a:srgbClr val="059669"/>
+          </a:solidFill>
+          <a:ln/>
+        </p:spPr>
+      </p:sp>
+      <p:sp>
+        <p:nvSpPr>
+          <p:cNvPr id="5" name="Text 3"/>
+          <p:cNvSpPr/>
+          <p:nvPr/>
+        </p:nvSpPr>
+        <p:spPr>
+          <a:xfrm>
+            <a:off x="548640" y="1755648"/>
+            <a:ext cx="475488" cy="475488"/>
+          </a:xfrm>
+          <a:prstGeom prst="rect">
+            <a:avLst/>
+          </a:prstGeom>
+          <a:noFill/>
+          <a:ln/>
+        </p:spPr>
+        <p:txBody>
+          <a:bodyPr wrap="square" lIns="0" tIns="0" rIns="0" bIns="0" rtlCol="0" anchor="ctr"/>
+          <a:lstStyle/>
+          <a:p>
+            <a:pPr algn="ctr" indent="0" marL="0">
+              <a:buNone/>
+            </a:pPr>
+            <a:r>
+              <a:rPr lang="en-US" sz="1600" b="1" dirty="0">
+                <a:solidFill>
+                  <a:srgbClr val="FFFFFF"/>
+                </a:solidFill>
+                <a:latin typeface="Calibri" pitchFamily="34" charset="0"/>
+                <a:ea typeface="Calibri" pitchFamily="34" charset="-122"/>
+                <a:cs typeface="Calibri" pitchFamily="34" charset="-120"/>
+              </a:rPr>
+              <a:t>1</a:t>
+            </a:r>
+            <a:endParaRPr lang="en-US" sz="1600" dirty="0"/>
+          </a:p>
+        </p:txBody>
+      </p:sp>
+      <p:sp>
+        <p:nvSpPr>
+          <p:cNvPr id="6" name="Text 4"/>
+          <p:cNvSpPr/>
+          <p:nvPr/>
+        </p:nvSpPr>
+        <p:spPr>
+          <a:xfrm>
+            <a:off x="1188720" y="1682496"/>
+            <a:ext cx="5394960" cy="347472"/>
+          </a:xfrm>
+          <a:prstGeom prst="rect">
+            <a:avLst/>
+          </a:prstGeom>
+          <a:noFill/>
+          <a:ln/>
+        </p:spPr>
+        <p:txBody>
+          <a:bodyPr wrap="square" lIns="0" tIns="0" rIns="0" bIns="0" rtlCol="0" anchor="ctr"/>
+          <a:lstStyle/>
+          <a:p>
+            <a:pPr indent="0" marL="0">
+              <a:buNone/>
+            </a:pPr>
+            <a:r>
+              <a:rPr lang="en-US" sz="1550" b="1" dirty="0">
+                <a:solidFill>
+                  <a:srgbClr val="0F172A"/>
+                </a:solidFill>
+                <a:latin typeface="Calibri" pitchFamily="34" charset="0"/>
+                <a:ea typeface="Calibri" pitchFamily="34" charset="-122"/>
+                <a:cs typeface="Calibri" pitchFamily="34" charset="-120"/>
+              </a:rPr>
+              <a:t>Match</a:t>
+            </a:r>
+            <a:endParaRPr lang="en-US" sz="1550" dirty="0"/>
+          </a:p>
+        </p:txBody>
+      </p:sp>
+      <p:sp>
+        <p:nvSpPr>
+          <p:cNvPr id="7" name="Text 5"/>
+          <p:cNvSpPr/>
+          <p:nvPr/>
+        </p:nvSpPr>
+        <p:spPr>
+          <a:xfrm>
+            <a:off x="1188720" y="2011680"/>
+            <a:ext cx="5486400" cy="777240"/>
+          </a:xfrm>
+          <a:prstGeom prst="rect">
+            <a:avLst/>
+          </a:prstGeom>
+          <a:noFill/>
+          <a:ln/>
+        </p:spPr>
+        <p:txBody>
+          <a:bodyPr wrap="square" lIns="0" tIns="0" rIns="0" bIns="0" rtlCol="0" anchor="ctr"/>
+          <a:lstStyle/>
+          <a:p>
+            <a:pPr indent="0" marL="0">
+              <a:buNone/>
+            </a:pPr>
+            <a:r>
+              <a:rPr lang="en-US" sz="1150" dirty="0">
+                <a:solidFill>
+                  <a:srgbClr val="475569"/>
+                </a:solidFill>
+                <a:latin typeface="Calibri" pitchFamily="34" charset="0"/>
+                <a:ea typeface="Calibri" pitchFamily="34" charset="-122"/>
+                <a:cs typeface="Calibri" pitchFamily="34" charset="-120"/>
+              </a:rPr>
+              <a:t>The agent matches load to lane: date window, weights &amp; measures, cost per ton — availability confirmed through the carrier’s API.</a:t>
+            </a:r>
+            <a:endParaRPr lang="en-US" sz="1150" dirty="0"/>
+          </a:p>
+        </p:txBody>
+      </p:sp>
+      <p:sp>
+        <p:nvSpPr>
+          <p:cNvPr id="8" name="Shape 6"/>
+          <p:cNvSpPr/>
+          <p:nvPr/>
+        </p:nvSpPr>
+        <p:spPr>
+          <a:xfrm>
+            <a:off x="548640" y="2871216"/>
+            <a:ext cx="475488" cy="475488"/>
+          </a:xfrm>
+          <a:prstGeom prst="ellipse">
+            <a:avLst/>
+          </a:prstGeom>
+          <a:solidFill>
+            <a:srgbClr val="059669"/>
+          </a:solidFill>
+          <a:ln/>
+        </p:spPr>
+      </p:sp>
+      <p:sp>
+        <p:nvSpPr>
+          <p:cNvPr id="9" name="Text 7"/>
+          <p:cNvSpPr/>
+          <p:nvPr/>
+        </p:nvSpPr>
+        <p:spPr>
+          <a:xfrm>
+            <a:off x="548640" y="2871216"/>
+            <a:ext cx="475488" cy="475488"/>
+          </a:xfrm>
+          <a:prstGeom prst="rect">
+            <a:avLst/>
+          </a:prstGeom>
+          <a:noFill/>
+          <a:ln/>
+        </p:spPr>
+        <p:txBody>
+          <a:bodyPr wrap="square" lIns="0" tIns="0" rIns="0" bIns="0" rtlCol="0" anchor="ctr"/>
+          <a:lstStyle/>
+          <a:p>
+            <a:pPr algn="ctr" indent="0" marL="0">
+              <a:buNone/>
+            </a:pPr>
+            <a:r>
+              <a:rPr lang="en-US" sz="1600" b="1" dirty="0">
+                <a:solidFill>
+                  <a:srgbClr val="FFFFFF"/>
+                </a:solidFill>
+                <a:latin typeface="Calibri" pitchFamily="34" charset="0"/>
+                <a:ea typeface="Calibri" pitchFamily="34" charset="-122"/>
+                <a:cs typeface="Calibri" pitchFamily="34" charset="-120"/>
+              </a:rPr>
+              <a:t>2</a:t>
+            </a:r>
+            <a:endParaRPr lang="en-US" sz="1600" dirty="0"/>
+          </a:p>
+        </p:txBody>
+      </p:sp>
+      <p:sp>
+        <p:nvSpPr>
+          <p:cNvPr id="10" name="Text 8"/>
+          <p:cNvSpPr/>
+          <p:nvPr/>
+        </p:nvSpPr>
+        <p:spPr>
+          <a:xfrm>
+            <a:off x="1188720" y="2798064"/>
+            <a:ext cx="5394960" cy="347472"/>
+          </a:xfrm>
+          <a:prstGeom prst="rect">
+            <a:avLst/>
+          </a:prstGeom>
+          <a:noFill/>
+          <a:ln/>
+        </p:spPr>
+        <p:txBody>
+          <a:bodyPr wrap="square" lIns="0" tIns="0" rIns="0" bIns="0" rtlCol="0" anchor="ctr"/>
+          <a:lstStyle/>
+          <a:p>
+            <a:pPr indent="0" marL="0">
+              <a:buNone/>
+            </a:pPr>
+            <a:r>
+              <a:rPr lang="en-US" sz="1550" b="1" dirty="0">
+                <a:solidFill>
+                  <a:srgbClr val="0F172A"/>
+                </a:solidFill>
+                <a:latin typeface="Calibri" pitchFamily="34" charset="0"/>
+                <a:ea typeface="Calibri" pitchFamily="34" charset="-122"/>
+                <a:cs typeface="Calibri" pitchFamily="34" charset="-120"/>
+              </a:rPr>
+              <a:t>Accept</a:t>
+            </a:r>
+            <a:endParaRPr lang="en-US" sz="1550" dirty="0"/>
+          </a:p>
+        </p:txBody>
+      </p:sp>
+      <p:sp>
+        <p:nvSpPr>
+          <p:cNvPr id="11" name="Text 9"/>
+          <p:cNvSpPr/>
+          <p:nvPr/>
+        </p:nvSpPr>
+        <p:spPr>
+          <a:xfrm>
+            <a:off x="1188720" y="3127248"/>
+            <a:ext cx="5486400" cy="777240"/>
+          </a:xfrm>
+          <a:prstGeom prst="rect">
+            <a:avLst/>
+          </a:prstGeom>
+          <a:noFill/>
+          <a:ln/>
+        </p:spPr>
+        <p:txBody>
+          <a:bodyPr wrap="square" lIns="0" tIns="0" rIns="0" bIns="0" rtlCol="0" anchor="ctr"/>
+          <a:lstStyle/>
+          <a:p>
+            <a:pPr indent="0" marL="0">
+              <a:buNone/>
+            </a:pPr>
+            <a:r>
+              <a:rPr lang="en-US" sz="1150" dirty="0">
+                <a:solidFill>
+                  <a:srgbClr val="475569"/>
+                </a:solidFill>
+                <a:latin typeface="Calibri" pitchFamily="34" charset="0"/>
+                <a:ea typeface="Calibri" pitchFamily="34" charset="-122"/>
+                <a:cs typeface="Calibri" pitchFamily="34" charset="-120"/>
+              </a:rPr>
+              <a:t>The carrier-side agent accepts and locks the leg. One transaction ID; the company-approved docs pack is issued for the stop.</a:t>
+            </a:r>
+            <a:endParaRPr lang="en-US" sz="1150" dirty="0"/>
+          </a:p>
+        </p:txBody>
+      </p:sp>
+      <p:sp>
+        <p:nvSpPr>
+          <p:cNvPr id="12" name="Shape 10"/>
+          <p:cNvSpPr/>
+          <p:nvPr/>
+        </p:nvSpPr>
+        <p:spPr>
+          <a:xfrm>
+            <a:off x="548640" y="3986784"/>
+            <a:ext cx="475488" cy="475488"/>
+          </a:xfrm>
+          <a:prstGeom prst="ellipse">
+            <a:avLst/>
+          </a:prstGeom>
+          <a:solidFill>
+            <a:srgbClr val="059669"/>
+          </a:solidFill>
+          <a:ln/>
+        </p:spPr>
+      </p:sp>
+      <p:sp>
+        <p:nvSpPr>
+          <p:cNvPr id="13" name="Text 11"/>
+          <p:cNvSpPr/>
+          <p:nvPr/>
+        </p:nvSpPr>
+        <p:spPr>
+          <a:xfrm>
+            <a:off x="548640" y="3986784"/>
+            <a:ext cx="475488" cy="475488"/>
+          </a:xfrm>
+          <a:prstGeom prst="rect">
+            <a:avLst/>
+          </a:prstGeom>
+          <a:noFill/>
+          <a:ln/>
+        </p:spPr>
+        <p:txBody>
+          <a:bodyPr wrap="square" lIns="0" tIns="0" rIns="0" bIns="0" rtlCol="0" anchor="ctr"/>
+          <a:lstStyle/>
+          <a:p>
+            <a:pPr algn="ctr" indent="0" marL="0">
+              <a:buNone/>
+            </a:pPr>
+            <a:r>
+              <a:rPr lang="en-US" sz="1600" b="1" dirty="0">
+                <a:solidFill>
+                  <a:srgbClr val="FFFFFF"/>
+                </a:solidFill>
+                <a:latin typeface="Calibri" pitchFamily="34" charset="0"/>
+                <a:ea typeface="Calibri" pitchFamily="34" charset="-122"/>
+                <a:cs typeface="Calibri" pitchFamily="34" charset="-120"/>
+              </a:rPr>
+              <a:t>3</a:t>
+            </a:r>
+            <a:endParaRPr lang="en-US" sz="1600" dirty="0"/>
+          </a:p>
+        </p:txBody>
+      </p:sp>
+      <p:sp>
+        <p:nvSpPr>
+          <p:cNvPr id="14" name="Text 12"/>
+          <p:cNvSpPr/>
+          <p:nvPr/>
+        </p:nvSpPr>
+        <p:spPr>
+          <a:xfrm>
+            <a:off x="1188720" y="3913632"/>
+            <a:ext cx="5394960" cy="347472"/>
+          </a:xfrm>
+          <a:prstGeom prst="rect">
+            <a:avLst/>
+          </a:prstGeom>
+          <a:noFill/>
+          <a:ln/>
+        </p:spPr>
+        <p:txBody>
+          <a:bodyPr wrap="square" lIns="0" tIns="0" rIns="0" bIns="0" rtlCol="0" anchor="ctr"/>
+          <a:lstStyle/>
+          <a:p>
+            <a:pPr indent="0" marL="0">
+              <a:buNone/>
+            </a:pPr>
+            <a:r>
+              <a:rPr lang="en-US" sz="1550" b="1" dirty="0">
+                <a:solidFill>
+                  <a:srgbClr val="0F172A"/>
+                </a:solidFill>
+                <a:latin typeface="Calibri" pitchFamily="34" charset="0"/>
+                <a:ea typeface="Calibri" pitchFamily="34" charset="-122"/>
+                <a:cs typeface="Calibri" pitchFamily="34" charset="-120"/>
+              </a:rPr>
+              <a:t>Human rejects?</a:t>
+            </a:r>
+            <a:endParaRPr lang="en-US" sz="1550" dirty="0"/>
+          </a:p>
+        </p:txBody>
+      </p:sp>
+      <p:sp>
+        <p:nvSpPr>
+          <p:cNvPr id="15" name="Text 13"/>
+          <p:cNvSpPr/>
+          <p:nvPr/>
+        </p:nvSpPr>
+        <p:spPr>
+          <a:xfrm>
+            <a:off x="1188720" y="4242816"/>
+            <a:ext cx="5486400" cy="777240"/>
+          </a:xfrm>
+          <a:prstGeom prst="rect">
+            <a:avLst/>
+          </a:prstGeom>
+          <a:noFill/>
+          <a:ln/>
+        </p:spPr>
+        <p:txBody>
+          <a:bodyPr wrap="square" lIns="0" tIns="0" rIns="0" bIns="0" rtlCol="0" anchor="ctr"/>
+          <a:lstStyle/>
+          <a:p>
+            <a:pPr indent="0" marL="0">
+              <a:buNone/>
+            </a:pPr>
+            <a:r>
+              <a:rPr lang="en-US" sz="1150" dirty="0">
+                <a:solidFill>
+                  <a:srgbClr val="475569"/>
+                </a:solidFill>
+                <a:latin typeface="Calibri" pitchFamily="34" charset="0"/>
+                <a:ea typeface="Calibri" pitchFamily="34" charset="-122"/>
+                <a:cs typeface="Calibri" pitchFamily="34" charset="-120"/>
+              </a:rPr>
+              <a:t>The upstream agent is triggered: it reroutes on availability and re-verifies that the delivery date did not change.</a:t>
+            </a:r>
+            <a:endParaRPr lang="en-US" sz="1150" dirty="0"/>
+          </a:p>
+        </p:txBody>
+      </p:sp>
+      <p:sp>
+        <p:nvSpPr>
+          <p:cNvPr id="16" name="Shape 14"/>
+          <p:cNvSpPr/>
+          <p:nvPr/>
+        </p:nvSpPr>
+        <p:spPr>
+          <a:xfrm>
+            <a:off x="548640" y="5102352"/>
+            <a:ext cx="475488" cy="475488"/>
+          </a:xfrm>
+          <a:prstGeom prst="ellipse">
+            <a:avLst/>
+          </a:prstGeom>
+          <a:solidFill>
+            <a:srgbClr val="B45309"/>
+          </a:solidFill>
+          <a:ln/>
+        </p:spPr>
+      </p:sp>
+      <p:sp>
+        <p:nvSpPr>
+          <p:cNvPr id="17" name="Text 15"/>
+          <p:cNvSpPr/>
+          <p:nvPr/>
+        </p:nvSpPr>
+        <p:spPr>
+          <a:xfrm>
+            <a:off x="548640" y="5102352"/>
+            <a:ext cx="475488" cy="475488"/>
+          </a:xfrm>
+          <a:prstGeom prst="rect">
+            <a:avLst/>
+          </a:prstGeom>
+          <a:noFill/>
+          <a:ln/>
+        </p:spPr>
+        <p:txBody>
+          <a:bodyPr wrap="square" lIns="0" tIns="0" rIns="0" bIns="0" rtlCol="0" anchor="ctr"/>
+          <a:lstStyle/>
+          <a:p>
+            <a:pPr algn="ctr" indent="0" marL="0">
+              <a:buNone/>
+            </a:pPr>
+            <a:r>
+              <a:rPr lang="en-US" sz="1600" b="1" dirty="0">
+                <a:solidFill>
+                  <a:srgbClr val="FFFFFF"/>
+                </a:solidFill>
+                <a:latin typeface="Calibri" pitchFamily="34" charset="0"/>
+                <a:ea typeface="Calibri" pitchFamily="34" charset="-122"/>
+                <a:cs typeface="Calibri" pitchFamily="34" charset="-120"/>
+              </a:rPr>
+              <a:t>4</a:t>
+            </a:r>
+            <a:endParaRPr lang="en-US" sz="1600" dirty="0"/>
+          </a:p>
+        </p:txBody>
+      </p:sp>
+      <p:sp>
+        <p:nvSpPr>
+          <p:cNvPr id="18" name="Text 16"/>
+          <p:cNvSpPr/>
+          <p:nvPr/>
+        </p:nvSpPr>
+        <p:spPr>
+          <a:xfrm>
+            <a:off x="1188720" y="5029200"/>
+            <a:ext cx="5394960" cy="347472"/>
+          </a:xfrm>
+          <a:prstGeom prst="rect">
+            <a:avLst/>
+          </a:prstGeom>
+          <a:noFill/>
+          <a:ln/>
+        </p:spPr>
+        <p:txBody>
+          <a:bodyPr wrap="square" lIns="0" tIns="0" rIns="0" bIns="0" rtlCol="0" anchor="ctr"/>
+          <a:lstStyle/>
+          <a:p>
+            <a:pPr indent="0" marL="0">
+              <a:buNone/>
+            </a:pPr>
+            <a:r>
+              <a:rPr lang="en-US" sz="1550" b="1" dirty="0">
+                <a:solidFill>
+                  <a:srgbClr val="0F172A"/>
+                </a:solidFill>
+                <a:latin typeface="Calibri" pitchFamily="34" charset="0"/>
+                <a:ea typeface="Calibri" pitchFamily="34" charset="-122"/>
+                <a:cs typeface="Calibri" pitchFamily="34" charset="-120"/>
+              </a:rPr>
+              <a:t>Tolerance gate</a:t>
+            </a:r>
+            <a:endParaRPr lang="en-US" sz="1550" dirty="0"/>
+          </a:p>
+        </p:txBody>
+      </p:sp>
+      <p:sp>
+        <p:nvSpPr>
+          <p:cNvPr id="19" name="Text 17"/>
+          <p:cNvSpPr/>
+          <p:nvPr/>
+        </p:nvSpPr>
+        <p:spPr>
+          <a:xfrm>
+            <a:off x="1188720" y="5358384"/>
+            <a:ext cx="5486400" cy="777240"/>
+          </a:xfrm>
+          <a:prstGeom prst="rect">
+            <a:avLst/>
+          </a:prstGeom>
+          <a:noFill/>
+          <a:ln/>
+        </p:spPr>
+        <p:txBody>
+          <a:bodyPr wrap="square" lIns="0" tIns="0" rIns="0" bIns="0" rtlCol="0" anchor="ctr"/>
+          <a:lstStyle/>
+          <a:p>
+            <a:pPr indent="0" marL="0">
+              <a:buNone/>
+            </a:pPr>
+            <a:r>
+              <a:rPr lang="en-US" sz="1150" dirty="0">
+                <a:solidFill>
+                  <a:srgbClr val="475569"/>
+                </a:solidFill>
+                <a:latin typeface="Calibri" pitchFamily="34" charset="0"/>
+                <a:ea typeface="Calibri" pitchFamily="34" charset="-122"/>
+                <a:cs typeface="Calibri" pitchFamily="34" charset="-120"/>
+              </a:rPr>
+              <a:t>Auto-confirm only within ±10% / $200 / 2 days. Anything larger requests approval from the sender — shown live on the $1M lane.</a:t>
+            </a:r>
+            <a:endParaRPr lang="en-US" sz="1150" dirty="0"/>
+          </a:p>
+        </p:txBody>
+      </p:sp>
+      <p:sp>
+        <p:nvSpPr>
+          <p:cNvPr id="20" name="Shape 18"/>
+          <p:cNvSpPr/>
+          <p:nvPr/>
+        </p:nvSpPr>
+        <p:spPr>
+          <a:xfrm>
+            <a:off x="7040880" y="1737360"/>
+            <a:ext cx="4572000" cy="4343400"/>
           </a:xfrm>
           <a:prstGeom prst="roundRect">
             <a:avLst>
-              <a:gd name="adj" fmla="val 3448"/>
+              <a:gd name="adj" fmla="val 2105"/>
             </a:avLst>
           </a:prstGeom>
           <a:solidFill>
-            <a:srgbClr val="F8FAFC"/>
+            <a:srgbClr val="0F172A"/>
           </a:solidFill>
           <a:ln w="12700">
             <a:solidFill>
@@ -11021,30 +12601,69 @@
       </p:sp>
       <p:sp>
         <p:nvSpPr>
-          <p:cNvPr id="4" name="Text 2"/>
-          <p:cNvSpPr/>
-          <p:nvPr/>
-        </p:nvSpPr>
-        <p:spPr>
-          <a:xfrm>
-            <a:off x="822960" y="1828800"/>
-            <a:ext cx="2834640" cy="320040"/>
-          </a:xfrm>
-          <a:prstGeom prst="rect">
-            <a:avLst/>
-          </a:prstGeom>
-          <a:noFill/>
-          <a:ln/>
-        </p:spPr>
-        <p:txBody>
-          <a:bodyPr wrap="square" lIns="0" tIns="0" rIns="0" bIns="0" rtlCol="0" anchor="ctr"/>
-          <a:lstStyle/>
-          <a:p>
-            <a:pPr indent="0" marL="0">
-              <a:buNone/>
-            </a:pPr>
-            <a:r>
-              <a:rPr lang="en-US" sz="1300" b="1" dirty="0">
+          <p:cNvPr id="21" name="Text 19"/>
+          <p:cNvSpPr/>
+          <p:nvPr/>
+        </p:nvSpPr>
+        <p:spPr>
+          <a:xfrm>
+            <a:off x="7360920" y="1993392"/>
+            <a:ext cx="3931920" cy="365760"/>
+          </a:xfrm>
+          <a:prstGeom prst="rect">
+            <a:avLst/>
+          </a:prstGeom>
+          <a:noFill/>
+          <a:ln/>
+        </p:spPr>
+        <p:txBody>
+          <a:bodyPr wrap="square" lIns="0" tIns="0" rIns="0" bIns="0" rtlCol="0" anchor="ctr"/>
+          <a:lstStyle/>
+          <a:p>
+            <a:pPr indent="0" marL="0">
+              <a:buNone/>
+            </a:pPr>
+            <a:r>
+              <a:rPr lang="en-US" sz="1600" b="1" dirty="0">
+                <a:solidFill>
+                  <a:srgbClr val="34D399"/>
+                </a:solidFill>
+                <a:latin typeface="Calibri" pitchFamily="34" charset="0"/>
+                <a:ea typeface="Calibri" pitchFamily="34" charset="-122"/>
+                <a:cs typeface="Calibri" pitchFamily="34" charset="-120"/>
+              </a:rPr>
+              <a:t>Vendor memory profile</a:t>
+            </a:r>
+            <a:endParaRPr lang="en-US" sz="1600" dirty="0"/>
+          </a:p>
+        </p:txBody>
+      </p:sp>
+      <p:sp>
+        <p:nvSpPr>
+          <p:cNvPr id="22" name="Text 20"/>
+          <p:cNvSpPr/>
+          <p:nvPr/>
+        </p:nvSpPr>
+        <p:spPr>
+          <a:xfrm>
+            <a:off x="7360920" y="2487168"/>
+            <a:ext cx="3931920" cy="274320"/>
+          </a:xfrm>
+          <a:prstGeom prst="rect">
+            <a:avLst/>
+          </a:prstGeom>
+          <a:noFill/>
+          <a:ln/>
+        </p:spPr>
+        <p:txBody>
+          <a:bodyPr wrap="square" lIns="0" tIns="0" rIns="0" bIns="0" rtlCol="0" anchor="ctr"/>
+          <a:lstStyle/>
+          <a:p>
+            <a:pPr indent="0" marL="0">
+              <a:buNone/>
+            </a:pPr>
+            <a:r>
+              <a:rPr lang="en-US" sz="1050" b="1" spc="100" kern="0" dirty="0">
                 <a:solidFill>
                   <a:srgbClr val="94A3B8"/>
                 </a:solidFill>
@@ -11052,61 +12671,22 @@
                 <a:ea typeface="Calibri" pitchFamily="34" charset="-122"/>
                 <a:cs typeface="Calibri" pitchFamily="34" charset="-120"/>
               </a:rPr>
-              <a:t>Systems of record</a:t>
-            </a:r>
-            <a:endParaRPr lang="en-US" sz="1300" dirty="0"/>
-          </a:p>
-        </p:txBody>
-      </p:sp>
-      <p:sp>
-        <p:nvSpPr>
-          <p:cNvPr id="5" name="Text 3"/>
-          <p:cNvSpPr/>
-          <p:nvPr/>
-        </p:nvSpPr>
-        <p:spPr>
-          <a:xfrm>
-            <a:off x="822960" y="2194560"/>
-            <a:ext cx="2834640" cy="457200"/>
-          </a:xfrm>
-          <a:prstGeom prst="rect">
-            <a:avLst/>
-          </a:prstGeom>
-          <a:noFill/>
-          <a:ln/>
-        </p:spPr>
-        <p:txBody>
-          <a:bodyPr wrap="square" lIns="0" tIns="0" rIns="0" bIns="0" rtlCol="0" anchor="ctr"/>
-          <a:lstStyle/>
-          <a:p>
-            <a:pPr indent="0" marL="0">
-              <a:buNone/>
-            </a:pPr>
-            <a:r>
-              <a:rPr lang="en-US" sz="1800" b="1" dirty="0">
-                <a:solidFill>
-                  <a:srgbClr val="0F172A"/>
-                </a:solidFill>
-                <a:latin typeface="Calibri" pitchFamily="34" charset="0"/>
-                <a:ea typeface="Calibri" pitchFamily="34" charset="-122"/>
-                <a:cs typeface="Calibri" pitchFamily="34" charset="-120"/>
-              </a:rPr>
-              <a:t>NetSuite · Oracle · SAP</a:t>
-            </a:r>
-            <a:endParaRPr lang="en-US" sz="1800" dirty="0"/>
-          </a:p>
-        </p:txBody>
-      </p:sp>
-      <p:sp>
-        <p:nvSpPr>
-          <p:cNvPr id="6" name="Text 4"/>
-          <p:cNvSpPr/>
-          <p:nvPr/>
-        </p:nvSpPr>
-        <p:spPr>
-          <a:xfrm>
-            <a:off x="822960" y="2697480"/>
-            <a:ext cx="2880360" cy="1371600"/>
+              <a:t>CONSTANT — cached in memory</a:t>
+            </a:r>
+            <a:endParaRPr lang="en-US" sz="1050" dirty="0"/>
+          </a:p>
+        </p:txBody>
+      </p:sp>
+      <p:sp>
+        <p:nvSpPr>
+          <p:cNvPr id="23" name="Text 21"/>
+          <p:cNvSpPr/>
+          <p:nvPr/>
+        </p:nvSpPr>
+        <p:spPr>
+          <a:xfrm>
+            <a:off x="7360920" y="2761488"/>
+            <a:ext cx="3931920" cy="685800"/>
           </a:xfrm>
           <a:prstGeom prst="rect">
             <a:avLst/>
@@ -11124,13 +12704,13 @@
             <a:r>
               <a:rPr lang="en-US" sz="1200" dirty="0">
                 <a:solidFill>
-                  <a:srgbClr val="475569"/>
-                </a:solidFill>
-                <a:latin typeface="Calibri" pitchFamily="34" charset="0"/>
-                <a:ea typeface="Calibri" pitchFamily="34" charset="-122"/>
-                <a:cs typeface="Calibri" pitchFamily="34" charset="-120"/>
-              </a:rPr>
-              <a:t>Own the books and the item master. Blind between warehouse scans — they record what happened only after someone types it in.</a:t>
+                  <a:srgbClr val="E2E8F0"/>
+                </a:solidFill>
+                <a:latin typeface="Calibri" pitchFamily="34" charset="0"/>
+                <a:ea typeface="Calibri" pitchFamily="34" charset="-122"/>
+                <a:cs typeface="Calibri" pitchFamily="34" charset="-120"/>
+              </a:rPr>
+              <a:t>Average cost per ton. The business map: lanes each carrier owns and serves. Certifications (reefer, hazmat).</a:t>
             </a:r>
             <a:endParaRPr lang="en-US" sz="1200" dirty="0"/>
           </a:p>
@@ -11138,64 +12718,108 @@
       </p:sp>
       <p:sp>
         <p:nvSpPr>
-          <p:cNvPr id="7" name="Shape 5"/>
-          <p:cNvSpPr/>
-          <p:nvPr/>
-        </p:nvSpPr>
-        <p:spPr>
-          <a:xfrm>
-            <a:off x="4389120" y="1417320"/>
-            <a:ext cx="3429000" cy="3017520"/>
-          </a:xfrm>
-          <a:prstGeom prst="roundRect">
-            <a:avLst>
-              <a:gd name="adj" fmla="val 3030"/>
-            </a:avLst>
-          </a:prstGeom>
-          <a:solidFill>
-            <a:srgbClr val="059669"/>
-          </a:solidFill>
-          <a:ln w="12700">
-            <a:solidFill>
-              <a:srgbClr val="E2E8F0"/>
-            </a:solidFill>
-            <a:prstDash val="solid"/>
-          </a:ln>
-          <a:effectLst>
-            <a:outerShdw sx="100000" sy="100000" kx="0" ky="0" algn="bl" rotWithShape="0" blurRad="88900" dist="25400" dir="5400000">
-              <a:srgbClr val="CBD5E1">
-                <a:alpha val="40000"/>
-              </a:srgbClr>
-            </a:outerShdw>
-          </a:effectLst>
-        </p:spPr>
-      </p:sp>
-      <p:sp>
-        <p:nvSpPr>
-          <p:cNvPr id="8" name="Text 6"/>
-          <p:cNvSpPr/>
-          <p:nvPr/>
-        </p:nvSpPr>
-        <p:spPr>
-          <a:xfrm>
-            <a:off x="4663440" y="1691640"/>
-            <a:ext cx="2926080" cy="365760"/>
-          </a:xfrm>
-          <a:prstGeom prst="rect">
-            <a:avLst/>
-          </a:prstGeom>
-          <a:noFill/>
-          <a:ln/>
-        </p:spPr>
-        <p:txBody>
-          <a:bodyPr wrap="square" lIns="0" tIns="0" rIns="0" bIns="0" rtlCol="0" anchor="ctr"/>
-          <a:lstStyle/>
-          <a:p>
-            <a:pPr indent="0" marL="0">
-              <a:buNone/>
-            </a:pPr>
-            <a:r>
-              <a:rPr lang="en-US" sz="1600" b="1" spc="200" kern="0" dirty="0">
+          <p:cNvPr id="24" name="Text 22"/>
+          <p:cNvSpPr/>
+          <p:nvPr/>
+        </p:nvSpPr>
+        <p:spPr>
+          <a:xfrm>
+            <a:off x="7360920" y="3520440"/>
+            <a:ext cx="3931920" cy="274320"/>
+          </a:xfrm>
+          <a:prstGeom prst="rect">
+            <a:avLst/>
+          </a:prstGeom>
+          <a:noFill/>
+          <a:ln/>
+        </p:spPr>
+        <p:txBody>
+          <a:bodyPr wrap="square" lIns="0" tIns="0" rIns="0" bIns="0" rtlCol="0" anchor="ctr"/>
+          <a:lstStyle/>
+          <a:p>
+            <a:pPr indent="0" marL="0">
+              <a:buNone/>
+            </a:pPr>
+            <a:r>
+              <a:rPr lang="en-US" sz="1050" b="1" spc="100" kern="0" dirty="0">
+                <a:solidFill>
+                  <a:srgbClr val="94A3B8"/>
+                </a:solidFill>
+                <a:latin typeface="Calibri" pitchFamily="34" charset="0"/>
+                <a:ea typeface="Calibri" pitchFamily="34" charset="-122"/>
+                <a:cs typeface="Calibri" pitchFamily="34" charset="-120"/>
+              </a:rPr>
+              <a:t>VARIABLE — queried per order</a:t>
+            </a:r>
+            <a:endParaRPr lang="en-US" sz="1050" dirty="0"/>
+          </a:p>
+        </p:txBody>
+      </p:sp>
+      <p:sp>
+        <p:nvSpPr>
+          <p:cNvPr id="25" name="Text 23"/>
+          <p:cNvSpPr/>
+          <p:nvPr/>
+        </p:nvSpPr>
+        <p:spPr>
+          <a:xfrm>
+            <a:off x="7360920" y="3794760"/>
+            <a:ext cx="3931920" cy="731520"/>
+          </a:xfrm>
+          <a:prstGeom prst="rect">
+            <a:avLst/>
+          </a:prstGeom>
+          <a:noFill/>
+          <a:ln/>
+        </p:spPr>
+        <p:txBody>
+          <a:bodyPr wrap="square" lIns="0" tIns="0" rIns="0" bIns="0" rtlCol="0" anchor="ctr"/>
+          <a:lstStyle/>
+          <a:p>
+            <a:pPr indent="0" marL="0">
+              <a:buNone/>
+            </a:pPr>
+            <a:r>
+              <a:rPr lang="en-US" sz="1200" dirty="0">
+                <a:solidFill>
+                  <a:srgbClr val="E2E8F0"/>
+                </a:solidFill>
+                <a:latin typeface="Calibri" pitchFamily="34" charset="0"/>
+                <a:ea typeface="Calibri" pitchFamily="34" charset="-122"/>
+                <a:cs typeface="Calibri" pitchFamily="34" charset="-120"/>
+              </a:rPr>
+              <a:t>Availability between this date and that date — one API call to the vendor. Nothing else recomputes when an order is placed.</a:t>
+            </a:r>
+            <a:endParaRPr lang="en-US" sz="1200" dirty="0"/>
+          </a:p>
+        </p:txBody>
+      </p:sp>
+      <p:sp>
+        <p:nvSpPr>
+          <p:cNvPr id="26" name="Text 24"/>
+          <p:cNvSpPr/>
+          <p:nvPr/>
+        </p:nvSpPr>
+        <p:spPr>
+          <a:xfrm>
+            <a:off x="7360920" y="4663440"/>
+            <a:ext cx="3931920" cy="411480"/>
+          </a:xfrm>
+          <a:prstGeom prst="rect">
+            <a:avLst/>
+          </a:prstGeom>
+          <a:noFill/>
+          <a:ln/>
+        </p:spPr>
+        <p:txBody>
+          <a:bodyPr wrap="square" lIns="0" tIns="0" rIns="0" bIns="0" rtlCol="0" anchor="ctr"/>
+          <a:lstStyle/>
+          <a:p>
+            <a:pPr indent="0" marL="0">
+              <a:buNone/>
+            </a:pPr>
+            <a:r>
+              <a:rPr lang="en-US" sz="1250" b="1" i="1" dirty="0">
                 <a:solidFill>
                   <a:srgbClr val="FFFFFF"/>
                 </a:solidFill>
@@ -11203,38 +12827,38 @@
                 <a:ea typeface="Calibri" pitchFamily="34" charset="-122"/>
                 <a:cs typeface="Calibri" pitchFamily="34" charset="-120"/>
               </a:rPr>
-              <a:t>TRANSIT GUARD</a:t>
-            </a:r>
-            <a:endParaRPr lang="en-US" sz="1600" dirty="0"/>
-          </a:p>
-        </p:txBody>
-      </p:sp>
-      <p:sp>
-        <p:nvSpPr>
-          <p:cNvPr id="9" name="Text 7"/>
-          <p:cNvSpPr/>
-          <p:nvPr/>
-        </p:nvSpPr>
-        <p:spPr>
-          <a:xfrm>
-            <a:off x="4663440" y="2103120"/>
-            <a:ext cx="2926080" cy="365760"/>
-          </a:xfrm>
-          <a:prstGeom prst="rect">
-            <a:avLst/>
-          </a:prstGeom>
-          <a:noFill/>
-          <a:ln/>
-        </p:spPr>
-        <p:txBody>
-          <a:bodyPr wrap="square" lIns="0" tIns="0" rIns="0" bIns="0" rtlCol="0" anchor="ctr"/>
-          <a:lstStyle/>
-          <a:p>
-            <a:pPr indent="0" marL="0">
-              <a:buNone/>
-            </a:pPr>
-            <a:r>
-              <a:rPr lang="en-US" sz="1400" i="1" dirty="0">
+              <a:t>Cheap, fast agent decisions — cost discipline by design.</a:t>
+            </a:r>
+            <a:endParaRPr lang="en-US" sz="1250" dirty="0"/>
+          </a:p>
+        </p:txBody>
+      </p:sp>
+      <p:sp>
+        <p:nvSpPr>
+          <p:cNvPr id="27" name="Text 25"/>
+          <p:cNvSpPr/>
+          <p:nvPr/>
+        </p:nvSpPr>
+        <p:spPr>
+          <a:xfrm>
+            <a:off x="7360920" y="5166360"/>
+            <a:ext cx="3931920" cy="685800"/>
+          </a:xfrm>
+          <a:prstGeom prst="rect">
+            <a:avLst/>
+          </a:prstGeom>
+          <a:noFill/>
+          <a:ln/>
+        </p:spPr>
+        <p:txBody>
+          <a:bodyPr wrap="square" lIns="0" tIns="0" rIns="0" bIns="0" rtlCol="0" anchor="ctr"/>
+          <a:lstStyle/>
+          <a:p>
+            <a:pPr indent="0" marL="0">
+              <a:buNone/>
+            </a:pPr>
+            <a:r>
+              <a:rPr lang="en-US" sz="1050" dirty="0">
                 <a:solidFill>
                   <a:srgbClr val="D1FAE5"/>
                 </a:solidFill>
@@ -11242,502 +12866,9 @@
                 <a:ea typeface="Calibri" pitchFamily="34" charset="-122"/>
                 <a:cs typeface="Calibri" pitchFamily="34" charset="-120"/>
               </a:rPr>
-              <a:t>The custody capture layer</a:t>
-            </a:r>
-            <a:endParaRPr lang="en-US" sz="1400" dirty="0"/>
-          </a:p>
-        </p:txBody>
-      </p:sp>
-      <p:sp>
-        <p:nvSpPr>
-          <p:cNvPr id="10" name="Text 8"/>
-          <p:cNvSpPr/>
-          <p:nvPr/>
-        </p:nvSpPr>
-        <p:spPr>
-          <a:xfrm>
-            <a:off x="4663440" y="2514600"/>
-            <a:ext cx="2926080" cy="1188720"/>
-          </a:xfrm>
-          <a:prstGeom prst="rect">
-            <a:avLst/>
-          </a:prstGeom>
-          <a:noFill/>
-          <a:ln/>
-        </p:spPr>
-        <p:txBody>
-          <a:bodyPr wrap="square" lIns="0" tIns="0" rIns="0" bIns="0" rtlCol="0" anchor="ctr"/>
-          <a:lstStyle/>
-          <a:p>
-            <a:pPr indent="0" marL="0">
-              <a:buNone/>
-            </a:pPr>
-            <a:r>
-              <a:rPr lang="en-US" sz="1250" dirty="0">
-                <a:solidFill>
-                  <a:srgbClr val="FFFFFF"/>
-                </a:solidFill>
-                <a:latin typeface="Calibri" pitchFamily="34" charset="0"/>
-                <a:ea typeface="Calibri" pitchFamily="34" charset="-122"/>
-                <a:cs typeface="Calibri" pitchFamily="34" charset="-120"/>
-              </a:rPr>
-              <a:t>Scans, hand-offs, customs documents, and transaction dates captured where they happen — in the field, on a phone, in the local language.</a:t>
-            </a:r>
-            <a:endParaRPr lang="en-US" sz="1250" dirty="0"/>
-          </a:p>
-        </p:txBody>
-      </p:sp>
-      <p:sp>
-        <p:nvSpPr>
-          <p:cNvPr id="11" name="Text 9"/>
-          <p:cNvSpPr/>
-          <p:nvPr/>
-        </p:nvSpPr>
-        <p:spPr>
-          <a:xfrm>
-            <a:off x="4663440" y="3794760"/>
-            <a:ext cx="2926080" cy="502920"/>
-          </a:xfrm>
-          <a:prstGeom prst="rect">
-            <a:avLst/>
-          </a:prstGeom>
-          <a:noFill/>
-          <a:ln/>
-        </p:spPr>
-        <p:txBody>
-          <a:bodyPr wrap="square" lIns="0" tIns="0" rIns="0" bIns="0" rtlCol="0" anchor="ctr"/>
-          <a:lstStyle/>
-          <a:p>
-            <a:pPr indent="0" marL="0">
-              <a:buNone/>
-            </a:pPr>
-            <a:r>
-              <a:rPr lang="en-US" sz="1100" i="1" dirty="0">
-                <a:solidFill>
-                  <a:srgbClr val="D1FAE5"/>
-                </a:solidFill>
-                <a:latin typeface="Calibri" pitchFamily="34" charset="0"/>
-                <a:ea typeface="Calibri" pitchFamily="34" charset="-122"/>
-                <a:cs typeface="Calibri" pitchFamily="34" charset="-120"/>
-              </a:rPr>
-              <a:t>clean transaction dates in · audit-ready evidence out</a:t>
-            </a:r>
-            <a:endParaRPr lang="en-US" sz="1100" dirty="0"/>
-          </a:p>
-        </p:txBody>
-      </p:sp>
-      <p:sp>
-        <p:nvSpPr>
-          <p:cNvPr id="12" name="Shape 10"/>
-          <p:cNvSpPr/>
-          <p:nvPr/>
-        </p:nvSpPr>
-        <p:spPr>
-          <a:xfrm>
-            <a:off x="8275320" y="1600200"/>
-            <a:ext cx="3337560" cy="2651760"/>
-          </a:xfrm>
-          <a:prstGeom prst="roundRect">
-            <a:avLst>
-              <a:gd name="adj" fmla="val 3448"/>
-            </a:avLst>
-          </a:prstGeom>
-          <a:solidFill>
-            <a:srgbClr val="F8FAFC"/>
-          </a:solidFill>
-          <a:ln w="12700">
-            <a:solidFill>
-              <a:srgbClr val="E2E8F0"/>
-            </a:solidFill>
-            <a:prstDash val="solid"/>
-          </a:ln>
-          <a:effectLst>
-            <a:outerShdw sx="100000" sy="100000" kx="0" ky="0" algn="bl" rotWithShape="0" blurRad="88900" dist="25400" dir="5400000">
-              <a:srgbClr val="CBD5E1">
-                <a:alpha val="40000"/>
-              </a:srgbClr>
-            </a:outerShdw>
-          </a:effectLst>
-        </p:spPr>
-      </p:sp>
-      <p:sp>
-        <p:nvSpPr>
-          <p:cNvPr id="13" name="Text 11"/>
-          <p:cNvSpPr/>
-          <p:nvPr/>
-        </p:nvSpPr>
-        <p:spPr>
-          <a:xfrm>
-            <a:off x="8549640" y="1828800"/>
-            <a:ext cx="2788920" cy="320040"/>
-          </a:xfrm>
-          <a:prstGeom prst="rect">
-            <a:avLst/>
-          </a:prstGeom>
-          <a:noFill/>
-          <a:ln/>
-        </p:spPr>
-        <p:txBody>
-          <a:bodyPr wrap="square" lIns="0" tIns="0" rIns="0" bIns="0" rtlCol="0" anchor="ctr"/>
-          <a:lstStyle/>
-          <a:p>
-            <a:pPr indent="0" marL="0">
-              <a:buNone/>
-            </a:pPr>
-            <a:r>
-              <a:rPr lang="en-US" sz="1300" b="1" dirty="0">
-                <a:solidFill>
-                  <a:srgbClr val="94A3B8"/>
-                </a:solidFill>
-                <a:latin typeface="Calibri" pitchFamily="34" charset="0"/>
-                <a:ea typeface="Calibri" pitchFamily="34" charset="-122"/>
-                <a:cs typeface="Calibri" pitchFamily="34" charset="-120"/>
-              </a:rPr>
-              <a:t>Close &amp; assurance</a:t>
-            </a:r>
-            <a:endParaRPr lang="en-US" sz="1300" dirty="0"/>
-          </a:p>
-        </p:txBody>
-      </p:sp>
-      <p:sp>
-        <p:nvSpPr>
-          <p:cNvPr id="14" name="Text 12"/>
-          <p:cNvSpPr/>
-          <p:nvPr/>
-        </p:nvSpPr>
-        <p:spPr>
-          <a:xfrm>
-            <a:off x="8549640" y="2194560"/>
-            <a:ext cx="2788920" cy="685800"/>
-          </a:xfrm>
-          <a:prstGeom prst="rect">
-            <a:avLst/>
-          </a:prstGeom>
-          <a:noFill/>
-          <a:ln/>
-        </p:spPr>
-        <p:txBody>
-          <a:bodyPr wrap="square" lIns="0" tIns="0" rIns="0" bIns="0" rtlCol="0" anchor="ctr"/>
-          <a:lstStyle/>
-          <a:p>
-            <a:pPr indent="0" marL="0">
-              <a:buNone/>
-            </a:pPr>
-            <a:r>
-              <a:rPr lang="en-US" sz="1700" b="1" dirty="0">
-                <a:solidFill>
-                  <a:srgbClr val="0F172A"/>
-                </a:solidFill>
-                <a:latin typeface="Calibri" pitchFamily="34" charset="0"/>
-                <a:ea typeface="Calibri" pitchFamily="34" charset="-122"/>
-                <a:cs typeface="Calibri" pitchFamily="34" charset="-120"/>
-              </a:rPr>
-              <a:t>BlackLine · Inventory Close Guard</a:t>
-            </a:r>
-            <a:endParaRPr lang="en-US" sz="1700" dirty="0"/>
-          </a:p>
-        </p:txBody>
-      </p:sp>
-      <p:sp>
-        <p:nvSpPr>
-          <p:cNvPr id="15" name="Text 13"/>
-          <p:cNvSpPr/>
-          <p:nvPr/>
-        </p:nvSpPr>
-        <p:spPr>
-          <a:xfrm>
-            <a:off x="8549640" y="2926080"/>
-            <a:ext cx="2743200" cy="1097280"/>
-          </a:xfrm>
-          <a:prstGeom prst="rect">
-            <a:avLst/>
-          </a:prstGeom>
-          <a:noFill/>
-          <a:ln/>
-        </p:spPr>
-        <p:txBody>
-          <a:bodyPr wrap="square" lIns="0" tIns="0" rIns="0" bIns="0" rtlCol="0" anchor="ctr"/>
-          <a:lstStyle/>
-          <a:p>
-            <a:pPr indent="0" marL="0">
-              <a:buNone/>
-            </a:pPr>
-            <a:r>
-              <a:rPr lang="en-US" sz="1200" dirty="0">
-                <a:solidFill>
-                  <a:srgbClr val="475569"/>
-                </a:solidFill>
-                <a:latin typeface="Calibri" pitchFamily="34" charset="0"/>
-                <a:ea typeface="Calibri" pitchFamily="34" charset="-122"/>
-                <a:cs typeface="Calibri" pitchFamily="34" charset="-120"/>
-              </a:rPr>
-              <a:t>Close automation starts once trustworthy data exists. Transit Guard is where that data is born.</a:t>
-            </a:r>
-            <a:endParaRPr lang="en-US" sz="1200" dirty="0"/>
-          </a:p>
-        </p:txBody>
-      </p:sp>
-      <p:sp>
-        <p:nvSpPr>
-          <p:cNvPr id="16" name="Shape 14"/>
-          <p:cNvSpPr/>
-          <p:nvPr/>
-        </p:nvSpPr>
-        <p:spPr>
-          <a:xfrm>
-            <a:off x="3950208" y="2743200"/>
-            <a:ext cx="457200" cy="365760"/>
-          </a:xfrm>
-          <a:prstGeom prst="rightArrow">
-            <a:avLst/>
-          </a:prstGeom>
-          <a:solidFill>
-            <a:srgbClr val="059669"/>
-          </a:solidFill>
-          <a:ln/>
-        </p:spPr>
-      </p:sp>
-      <p:sp>
-        <p:nvSpPr>
-          <p:cNvPr id="17" name="Shape 15"/>
-          <p:cNvSpPr/>
-          <p:nvPr/>
-        </p:nvSpPr>
-        <p:spPr>
-          <a:xfrm>
-            <a:off x="7836408" y="2743200"/>
-            <a:ext cx="457200" cy="365760"/>
-          </a:xfrm>
-          <a:prstGeom prst="rightArrow">
-            <a:avLst/>
-          </a:prstGeom>
-          <a:solidFill>
-            <a:srgbClr val="059669"/>
-          </a:solidFill>
-          <a:ln/>
-        </p:spPr>
-      </p:sp>
-      <p:sp>
-        <p:nvSpPr>
-          <p:cNvPr id="18" name="Shape 16"/>
-          <p:cNvSpPr/>
-          <p:nvPr/>
-        </p:nvSpPr>
-        <p:spPr>
-          <a:xfrm>
-            <a:off x="548640" y="4709160"/>
-            <a:ext cx="5349240" cy="1463040"/>
-          </a:xfrm>
-          <a:prstGeom prst="roundRect">
-            <a:avLst>
-              <a:gd name="adj" fmla="val 6250"/>
-            </a:avLst>
-          </a:prstGeom>
-          <a:solidFill>
-            <a:srgbClr val="FFFFFF"/>
-          </a:solidFill>
-          <a:ln w="12700">
-            <a:solidFill>
-              <a:srgbClr val="E2E8F0"/>
-            </a:solidFill>
-            <a:prstDash val="solid"/>
-          </a:ln>
-          <a:effectLst>
-            <a:outerShdw sx="100000" sy="100000" kx="0" ky="0" algn="bl" rotWithShape="0" blurRad="88900" dist="25400" dir="5400000">
-              <a:srgbClr val="CBD5E1">
-                <a:alpha val="40000"/>
-              </a:srgbClr>
-            </a:outerShdw>
-          </a:effectLst>
-        </p:spPr>
-      </p:sp>
-      <p:sp>
-        <p:nvSpPr>
-          <p:cNvPr id="19" name="Text 17"/>
-          <p:cNvSpPr/>
-          <p:nvPr/>
-        </p:nvSpPr>
-        <p:spPr>
-          <a:xfrm>
-            <a:off x="822960" y="4919472"/>
-            <a:ext cx="4754880" cy="320040"/>
-          </a:xfrm>
-          <a:prstGeom prst="rect">
-            <a:avLst/>
-          </a:prstGeom>
-          <a:noFill/>
-          <a:ln/>
-        </p:spPr>
-        <p:txBody>
-          <a:bodyPr wrap="square" lIns="0" tIns="0" rIns="0" bIns="0" rtlCol="0" anchor="ctr"/>
-          <a:lstStyle/>
-          <a:p>
-            <a:pPr indent="0" marL="0">
-              <a:buNone/>
-            </a:pPr>
-            <a:r>
-              <a:rPr lang="en-US" sz="1450" b="1" dirty="0">
-                <a:solidFill>
-                  <a:srgbClr val="059669"/>
-                </a:solidFill>
-                <a:latin typeface="Calibri" pitchFamily="34" charset="0"/>
-                <a:ea typeface="Calibri" pitchFamily="34" charset="-122"/>
-                <a:cs typeface="Calibri" pitchFamily="34" charset="-120"/>
-              </a:rPr>
-              <a:t>Carriers plug in, not out</a:t>
-            </a:r>
-            <a:endParaRPr lang="en-US" sz="1450" dirty="0"/>
-          </a:p>
-        </p:txBody>
-      </p:sp>
-      <p:sp>
-        <p:nvSpPr>
-          <p:cNvPr id="20" name="Text 18"/>
-          <p:cNvSpPr/>
-          <p:nvPr/>
-        </p:nvSpPr>
-        <p:spPr>
-          <a:xfrm>
-            <a:off x="822960" y="5257800"/>
-            <a:ext cx="4846320" cy="822960"/>
-          </a:xfrm>
-          <a:prstGeom prst="rect">
-            <a:avLst/>
-          </a:prstGeom>
-          <a:noFill/>
-          <a:ln/>
-        </p:spPr>
-        <p:txBody>
-          <a:bodyPr wrap="square" lIns="0" tIns="0" rIns="0" bIns="0" rtlCol="0" anchor="ctr"/>
-          <a:lstStyle/>
-          <a:p>
-            <a:pPr indent="0" marL="0">
-              <a:buNone/>
-            </a:pPr>
-            <a:r>
-              <a:rPr lang="en-US" sz="1200" dirty="0">
-                <a:solidFill>
-                  <a:srgbClr val="475569"/>
-                </a:solidFill>
-                <a:latin typeface="Calibri" pitchFamily="34" charset="0"/>
-                <a:ea typeface="Calibri" pitchFamily="34" charset="-122"/>
-                <a:cs typeface="Calibri" pitchFamily="34" charset="-120"/>
-              </a:rPr>
-              <a:t>Partner carrier and 3PL apps log hand-offs through the Transit Guard API — same transaction ID end to end, with QR scans standardizing EU hand-offs. A connector, not a migration.</a:t>
-            </a:r>
-            <a:endParaRPr lang="en-US" sz="1200" dirty="0"/>
-          </a:p>
-        </p:txBody>
-      </p:sp>
-      <p:sp>
-        <p:nvSpPr>
-          <p:cNvPr id="21" name="Shape 19"/>
-          <p:cNvSpPr/>
-          <p:nvPr/>
-        </p:nvSpPr>
-        <p:spPr>
-          <a:xfrm>
-            <a:off x="6263640" y="4709160"/>
-            <a:ext cx="5349240" cy="1463040"/>
-          </a:xfrm>
-          <a:prstGeom prst="roundRect">
-            <a:avLst>
-              <a:gd name="adj" fmla="val 6250"/>
-            </a:avLst>
-          </a:prstGeom>
-          <a:solidFill>
-            <a:srgbClr val="FFFFFF"/>
-          </a:solidFill>
-          <a:ln w="12700">
-            <a:solidFill>
-              <a:srgbClr val="E2E8F0"/>
-            </a:solidFill>
-            <a:prstDash val="solid"/>
-          </a:ln>
-          <a:effectLst>
-            <a:outerShdw sx="100000" sy="100000" kx="0" ky="0" algn="bl" rotWithShape="0" blurRad="88900" dist="25400" dir="5400000">
-              <a:srgbClr val="CBD5E1">
-                <a:alpha val="40000"/>
-              </a:srgbClr>
-            </a:outerShdw>
-          </a:effectLst>
-        </p:spPr>
-      </p:sp>
-      <p:sp>
-        <p:nvSpPr>
-          <p:cNvPr id="22" name="Text 20"/>
-          <p:cNvSpPr/>
-          <p:nvPr/>
-        </p:nvSpPr>
-        <p:spPr>
-          <a:xfrm>
-            <a:off x="6537960" y="4919472"/>
-            <a:ext cx="4754880" cy="320040"/>
-          </a:xfrm>
-          <a:prstGeom prst="rect">
-            <a:avLst/>
-          </a:prstGeom>
-          <a:noFill/>
-          <a:ln/>
-        </p:spPr>
-        <p:txBody>
-          <a:bodyPr wrap="square" lIns="0" tIns="0" rIns="0" bIns="0" rtlCol="0" anchor="ctr"/>
-          <a:lstStyle/>
-          <a:p>
-            <a:pPr indent="0" marL="0">
-              <a:buNone/>
-            </a:pPr>
-            <a:r>
-              <a:rPr lang="en-US" sz="1450" b="1" dirty="0">
-                <a:solidFill>
-                  <a:srgbClr val="059669"/>
-                </a:solidFill>
-                <a:latin typeface="Calibri" pitchFamily="34" charset="0"/>
-                <a:ea typeface="Calibri" pitchFamily="34" charset="-122"/>
-                <a:cs typeface="Calibri" pitchFamily="34" charset="-120"/>
-              </a:rPr>
-              <a:t>The suite play</a:t>
-            </a:r>
-            <a:endParaRPr lang="en-US" sz="1450" dirty="0"/>
-          </a:p>
-        </p:txBody>
-      </p:sp>
-      <p:sp>
-        <p:nvSpPr>
-          <p:cNvPr id="23" name="Text 21"/>
-          <p:cNvSpPr/>
-          <p:nvPr/>
-        </p:nvSpPr>
-        <p:spPr>
-          <a:xfrm>
-            <a:off x="6537960" y="5257800"/>
-            <a:ext cx="4846320" cy="822960"/>
-          </a:xfrm>
-          <a:prstGeom prst="rect">
-            <a:avLst/>
-          </a:prstGeom>
-          <a:noFill/>
-          <a:ln/>
-        </p:spPr>
-        <p:txBody>
-          <a:bodyPr wrap="square" lIns="0" tIns="0" rIns="0" bIns="0" rtlCol="0" anchor="ctr"/>
-          <a:lstStyle/>
-          <a:p>
-            <a:pPr indent="0" marL="0">
-              <a:buNone/>
-            </a:pPr>
-            <a:r>
-              <a:rPr lang="en-US" sz="1200" dirty="0">
-                <a:solidFill>
-                  <a:srgbClr val="475569"/>
-                </a:solidFill>
-                <a:latin typeface="Calibri" pitchFamily="34" charset="0"/>
-                <a:ea typeface="Calibri" pitchFamily="34" charset="-122"/>
-                <a:cs typeface="Calibri" pitchFamily="34" charset="-120"/>
-              </a:rPr>
-              <a:t>At year-end, custody events become Inventory Close Guard’s cutoff and existence evidence. Capture once, close faster.</a:t>
-            </a:r>
-            <a:endParaRPr lang="en-US" sz="1200" dirty="0"/>
+              <a:t>Portable: the vetted workflow ships as an agent prompt + seed memory files — EverOS-ready (docs/EVEROS_AGENT_PROMPT.md).</a:t>
+            </a:r>
+            <a:endParaRPr lang="en-US" sz="1050" dirty="0"/>
           </a:p>
         </p:txBody>
       </p:sp>
@@ -11806,7 +12937,7 @@
                 <a:ea typeface="Calibri" pitchFamily="34" charset="-122"/>
                 <a:cs typeface="Calibri" pitchFamily="34" charset="-120"/>
               </a:rPr>
-              <a:t>A focused wedge into a $28B market.</a:t>
+              <a:t>Built to complement the stack you already run.</a:t>
             </a:r>
             <a:endParaRPr lang="en-US" sz="3400" dirty="0"/>
           </a:p>
@@ -11820,12 +12951,544 @@
         </p:nvSpPr>
         <p:spPr>
           <a:xfrm>
-            <a:off x="548640" y="1417320"/>
-            <a:ext cx="6309360" cy="1325880"/>
+            <a:off x="548640" y="1600200"/>
+            <a:ext cx="3383280" cy="2651760"/>
           </a:xfrm>
           <a:prstGeom prst="roundRect">
             <a:avLst>
-              <a:gd name="adj" fmla="val 6897"/>
+              <a:gd name="adj" fmla="val 3448"/>
+            </a:avLst>
+          </a:prstGeom>
+          <a:solidFill>
+            <a:srgbClr val="F8FAFC"/>
+          </a:solidFill>
+          <a:ln w="12700">
+            <a:solidFill>
+              <a:srgbClr val="E2E8F0"/>
+            </a:solidFill>
+            <a:prstDash val="solid"/>
+          </a:ln>
+          <a:effectLst>
+            <a:outerShdw sx="100000" sy="100000" kx="0" ky="0" algn="bl" rotWithShape="0" blurRad="88900" dist="25400" dir="5400000">
+              <a:srgbClr val="CBD5E1">
+                <a:alpha val="40000"/>
+              </a:srgbClr>
+            </a:outerShdw>
+          </a:effectLst>
+        </p:spPr>
+      </p:sp>
+      <p:sp>
+        <p:nvSpPr>
+          <p:cNvPr id="4" name="Text 2"/>
+          <p:cNvSpPr/>
+          <p:nvPr/>
+        </p:nvSpPr>
+        <p:spPr>
+          <a:xfrm>
+            <a:off x="822960" y="1828800"/>
+            <a:ext cx="2834640" cy="320040"/>
+          </a:xfrm>
+          <a:prstGeom prst="rect">
+            <a:avLst/>
+          </a:prstGeom>
+          <a:noFill/>
+          <a:ln/>
+        </p:spPr>
+        <p:txBody>
+          <a:bodyPr wrap="square" lIns="0" tIns="0" rIns="0" bIns="0" rtlCol="0" anchor="ctr"/>
+          <a:lstStyle/>
+          <a:p>
+            <a:pPr indent="0" marL="0">
+              <a:buNone/>
+            </a:pPr>
+            <a:r>
+              <a:rPr lang="en-US" sz="1300" b="1" dirty="0">
+                <a:solidFill>
+                  <a:srgbClr val="94A3B8"/>
+                </a:solidFill>
+                <a:latin typeface="Calibri" pitchFamily="34" charset="0"/>
+                <a:ea typeface="Calibri" pitchFamily="34" charset="-122"/>
+                <a:cs typeface="Calibri" pitchFamily="34" charset="-120"/>
+              </a:rPr>
+              <a:t>Systems of record</a:t>
+            </a:r>
+            <a:endParaRPr lang="en-US" sz="1300" dirty="0"/>
+          </a:p>
+        </p:txBody>
+      </p:sp>
+      <p:sp>
+        <p:nvSpPr>
+          <p:cNvPr id="5" name="Text 3"/>
+          <p:cNvSpPr/>
+          <p:nvPr/>
+        </p:nvSpPr>
+        <p:spPr>
+          <a:xfrm>
+            <a:off x="822960" y="2194560"/>
+            <a:ext cx="2834640" cy="457200"/>
+          </a:xfrm>
+          <a:prstGeom prst="rect">
+            <a:avLst/>
+          </a:prstGeom>
+          <a:noFill/>
+          <a:ln/>
+        </p:spPr>
+        <p:txBody>
+          <a:bodyPr wrap="square" lIns="0" tIns="0" rIns="0" bIns="0" rtlCol="0" anchor="ctr"/>
+          <a:lstStyle/>
+          <a:p>
+            <a:pPr indent="0" marL="0">
+              <a:buNone/>
+            </a:pPr>
+            <a:r>
+              <a:rPr lang="en-US" sz="1800" b="1" dirty="0">
+                <a:solidFill>
+                  <a:srgbClr val="0F172A"/>
+                </a:solidFill>
+                <a:latin typeface="Calibri" pitchFamily="34" charset="0"/>
+                <a:ea typeface="Calibri" pitchFamily="34" charset="-122"/>
+                <a:cs typeface="Calibri" pitchFamily="34" charset="-120"/>
+              </a:rPr>
+              <a:t>NetSuite · Oracle · SAP</a:t>
+            </a:r>
+            <a:endParaRPr lang="en-US" sz="1800" dirty="0"/>
+          </a:p>
+        </p:txBody>
+      </p:sp>
+      <p:sp>
+        <p:nvSpPr>
+          <p:cNvPr id="6" name="Text 4"/>
+          <p:cNvSpPr/>
+          <p:nvPr/>
+        </p:nvSpPr>
+        <p:spPr>
+          <a:xfrm>
+            <a:off x="822960" y="2697480"/>
+            <a:ext cx="2880360" cy="1371600"/>
+          </a:xfrm>
+          <a:prstGeom prst="rect">
+            <a:avLst/>
+          </a:prstGeom>
+          <a:noFill/>
+          <a:ln/>
+        </p:spPr>
+        <p:txBody>
+          <a:bodyPr wrap="square" lIns="0" tIns="0" rIns="0" bIns="0" rtlCol="0" anchor="ctr"/>
+          <a:lstStyle/>
+          <a:p>
+            <a:pPr indent="0" marL="0">
+              <a:buNone/>
+            </a:pPr>
+            <a:r>
+              <a:rPr lang="en-US" sz="1200" dirty="0">
+                <a:solidFill>
+                  <a:srgbClr val="475569"/>
+                </a:solidFill>
+                <a:latin typeface="Calibri" pitchFamily="34" charset="0"/>
+                <a:ea typeface="Calibri" pitchFamily="34" charset="-122"/>
+                <a:cs typeface="Calibri" pitchFamily="34" charset="-120"/>
+              </a:rPr>
+              <a:t>Own the books and the item master. Blind between warehouse scans — they record what happened only after someone types it in.</a:t>
+            </a:r>
+            <a:endParaRPr lang="en-US" sz="1200" dirty="0"/>
+          </a:p>
+        </p:txBody>
+      </p:sp>
+      <p:sp>
+        <p:nvSpPr>
+          <p:cNvPr id="7" name="Shape 5"/>
+          <p:cNvSpPr/>
+          <p:nvPr/>
+        </p:nvSpPr>
+        <p:spPr>
+          <a:xfrm>
+            <a:off x="4389120" y="1417320"/>
+            <a:ext cx="3429000" cy="3017520"/>
+          </a:xfrm>
+          <a:prstGeom prst="roundRect">
+            <a:avLst>
+              <a:gd name="adj" fmla="val 3030"/>
+            </a:avLst>
+          </a:prstGeom>
+          <a:solidFill>
+            <a:srgbClr val="059669"/>
+          </a:solidFill>
+          <a:ln w="12700">
+            <a:solidFill>
+              <a:srgbClr val="E2E8F0"/>
+            </a:solidFill>
+            <a:prstDash val="solid"/>
+          </a:ln>
+          <a:effectLst>
+            <a:outerShdw sx="100000" sy="100000" kx="0" ky="0" algn="bl" rotWithShape="0" blurRad="88900" dist="25400" dir="5400000">
+              <a:srgbClr val="CBD5E1">
+                <a:alpha val="40000"/>
+              </a:srgbClr>
+            </a:outerShdw>
+          </a:effectLst>
+        </p:spPr>
+      </p:sp>
+      <p:sp>
+        <p:nvSpPr>
+          <p:cNvPr id="8" name="Text 6"/>
+          <p:cNvSpPr/>
+          <p:nvPr/>
+        </p:nvSpPr>
+        <p:spPr>
+          <a:xfrm>
+            <a:off x="4663440" y="1691640"/>
+            <a:ext cx="2926080" cy="365760"/>
+          </a:xfrm>
+          <a:prstGeom prst="rect">
+            <a:avLst/>
+          </a:prstGeom>
+          <a:noFill/>
+          <a:ln/>
+        </p:spPr>
+        <p:txBody>
+          <a:bodyPr wrap="square" lIns="0" tIns="0" rIns="0" bIns="0" rtlCol="0" anchor="ctr"/>
+          <a:lstStyle/>
+          <a:p>
+            <a:pPr indent="0" marL="0">
+              <a:buNone/>
+            </a:pPr>
+            <a:r>
+              <a:rPr lang="en-US" sz="1600" b="1" spc="200" kern="0" dirty="0">
+                <a:solidFill>
+                  <a:srgbClr val="FFFFFF"/>
+                </a:solidFill>
+                <a:latin typeface="Calibri" pitchFamily="34" charset="0"/>
+                <a:ea typeface="Calibri" pitchFamily="34" charset="-122"/>
+                <a:cs typeface="Calibri" pitchFamily="34" charset="-120"/>
+              </a:rPr>
+              <a:t>TRANSIT GUARD</a:t>
+            </a:r>
+            <a:endParaRPr lang="en-US" sz="1600" dirty="0"/>
+          </a:p>
+        </p:txBody>
+      </p:sp>
+      <p:sp>
+        <p:nvSpPr>
+          <p:cNvPr id="9" name="Text 7"/>
+          <p:cNvSpPr/>
+          <p:nvPr/>
+        </p:nvSpPr>
+        <p:spPr>
+          <a:xfrm>
+            <a:off x="4663440" y="2103120"/>
+            <a:ext cx="2926080" cy="365760"/>
+          </a:xfrm>
+          <a:prstGeom prst="rect">
+            <a:avLst/>
+          </a:prstGeom>
+          <a:noFill/>
+          <a:ln/>
+        </p:spPr>
+        <p:txBody>
+          <a:bodyPr wrap="square" lIns="0" tIns="0" rIns="0" bIns="0" rtlCol="0" anchor="ctr"/>
+          <a:lstStyle/>
+          <a:p>
+            <a:pPr indent="0" marL="0">
+              <a:buNone/>
+            </a:pPr>
+            <a:r>
+              <a:rPr lang="en-US" sz="1400" i="1" dirty="0">
+                <a:solidFill>
+                  <a:srgbClr val="D1FAE5"/>
+                </a:solidFill>
+                <a:latin typeface="Calibri" pitchFamily="34" charset="0"/>
+                <a:ea typeface="Calibri" pitchFamily="34" charset="-122"/>
+                <a:cs typeface="Calibri" pitchFamily="34" charset="-120"/>
+              </a:rPr>
+              <a:t>The custody capture layer</a:t>
+            </a:r>
+            <a:endParaRPr lang="en-US" sz="1400" dirty="0"/>
+          </a:p>
+        </p:txBody>
+      </p:sp>
+      <p:sp>
+        <p:nvSpPr>
+          <p:cNvPr id="10" name="Text 8"/>
+          <p:cNvSpPr/>
+          <p:nvPr/>
+        </p:nvSpPr>
+        <p:spPr>
+          <a:xfrm>
+            <a:off x="4663440" y="2514600"/>
+            <a:ext cx="2926080" cy="1188720"/>
+          </a:xfrm>
+          <a:prstGeom prst="rect">
+            <a:avLst/>
+          </a:prstGeom>
+          <a:noFill/>
+          <a:ln/>
+        </p:spPr>
+        <p:txBody>
+          <a:bodyPr wrap="square" lIns="0" tIns="0" rIns="0" bIns="0" rtlCol="0" anchor="ctr"/>
+          <a:lstStyle/>
+          <a:p>
+            <a:pPr indent="0" marL="0">
+              <a:buNone/>
+            </a:pPr>
+            <a:r>
+              <a:rPr lang="en-US" sz="1250" dirty="0">
+                <a:solidFill>
+                  <a:srgbClr val="FFFFFF"/>
+                </a:solidFill>
+                <a:latin typeface="Calibri" pitchFamily="34" charset="0"/>
+                <a:ea typeface="Calibri" pitchFamily="34" charset="-122"/>
+                <a:cs typeface="Calibri" pitchFamily="34" charset="-120"/>
+              </a:rPr>
+              <a:t>Scans, hand-offs, customs documents, and transaction dates captured where they happen — in the field, on a phone, in the local language.</a:t>
+            </a:r>
+            <a:endParaRPr lang="en-US" sz="1250" dirty="0"/>
+          </a:p>
+        </p:txBody>
+      </p:sp>
+      <p:sp>
+        <p:nvSpPr>
+          <p:cNvPr id="11" name="Text 9"/>
+          <p:cNvSpPr/>
+          <p:nvPr/>
+        </p:nvSpPr>
+        <p:spPr>
+          <a:xfrm>
+            <a:off x="4663440" y="3794760"/>
+            <a:ext cx="2926080" cy="502920"/>
+          </a:xfrm>
+          <a:prstGeom prst="rect">
+            <a:avLst/>
+          </a:prstGeom>
+          <a:noFill/>
+          <a:ln/>
+        </p:spPr>
+        <p:txBody>
+          <a:bodyPr wrap="square" lIns="0" tIns="0" rIns="0" bIns="0" rtlCol="0" anchor="ctr"/>
+          <a:lstStyle/>
+          <a:p>
+            <a:pPr indent="0" marL="0">
+              <a:buNone/>
+            </a:pPr>
+            <a:r>
+              <a:rPr lang="en-US" sz="1100" i="1" dirty="0">
+                <a:solidFill>
+                  <a:srgbClr val="D1FAE5"/>
+                </a:solidFill>
+                <a:latin typeface="Calibri" pitchFamily="34" charset="0"/>
+                <a:ea typeface="Calibri" pitchFamily="34" charset="-122"/>
+                <a:cs typeface="Calibri" pitchFamily="34" charset="-120"/>
+              </a:rPr>
+              <a:t>clean transaction dates in · audit-ready evidence out</a:t>
+            </a:r>
+            <a:endParaRPr lang="en-US" sz="1100" dirty="0"/>
+          </a:p>
+        </p:txBody>
+      </p:sp>
+      <p:sp>
+        <p:nvSpPr>
+          <p:cNvPr id="12" name="Shape 10"/>
+          <p:cNvSpPr/>
+          <p:nvPr/>
+        </p:nvSpPr>
+        <p:spPr>
+          <a:xfrm>
+            <a:off x="8275320" y="1600200"/>
+            <a:ext cx="3337560" cy="2651760"/>
+          </a:xfrm>
+          <a:prstGeom prst="roundRect">
+            <a:avLst>
+              <a:gd name="adj" fmla="val 3448"/>
+            </a:avLst>
+          </a:prstGeom>
+          <a:solidFill>
+            <a:srgbClr val="F8FAFC"/>
+          </a:solidFill>
+          <a:ln w="12700">
+            <a:solidFill>
+              <a:srgbClr val="E2E8F0"/>
+            </a:solidFill>
+            <a:prstDash val="solid"/>
+          </a:ln>
+          <a:effectLst>
+            <a:outerShdw sx="100000" sy="100000" kx="0" ky="0" algn="bl" rotWithShape="0" blurRad="88900" dist="25400" dir="5400000">
+              <a:srgbClr val="CBD5E1">
+                <a:alpha val="40000"/>
+              </a:srgbClr>
+            </a:outerShdw>
+          </a:effectLst>
+        </p:spPr>
+      </p:sp>
+      <p:sp>
+        <p:nvSpPr>
+          <p:cNvPr id="13" name="Text 11"/>
+          <p:cNvSpPr/>
+          <p:nvPr/>
+        </p:nvSpPr>
+        <p:spPr>
+          <a:xfrm>
+            <a:off x="8549640" y="1828800"/>
+            <a:ext cx="2788920" cy="320040"/>
+          </a:xfrm>
+          <a:prstGeom prst="rect">
+            <a:avLst/>
+          </a:prstGeom>
+          <a:noFill/>
+          <a:ln/>
+        </p:spPr>
+        <p:txBody>
+          <a:bodyPr wrap="square" lIns="0" tIns="0" rIns="0" bIns="0" rtlCol="0" anchor="ctr"/>
+          <a:lstStyle/>
+          <a:p>
+            <a:pPr indent="0" marL="0">
+              <a:buNone/>
+            </a:pPr>
+            <a:r>
+              <a:rPr lang="en-US" sz="1300" b="1" dirty="0">
+                <a:solidFill>
+                  <a:srgbClr val="94A3B8"/>
+                </a:solidFill>
+                <a:latin typeface="Calibri" pitchFamily="34" charset="0"/>
+                <a:ea typeface="Calibri" pitchFamily="34" charset="-122"/>
+                <a:cs typeface="Calibri" pitchFamily="34" charset="-120"/>
+              </a:rPr>
+              <a:t>Close &amp; assurance</a:t>
+            </a:r>
+            <a:endParaRPr lang="en-US" sz="1300" dirty="0"/>
+          </a:p>
+        </p:txBody>
+      </p:sp>
+      <p:sp>
+        <p:nvSpPr>
+          <p:cNvPr id="14" name="Text 12"/>
+          <p:cNvSpPr/>
+          <p:nvPr/>
+        </p:nvSpPr>
+        <p:spPr>
+          <a:xfrm>
+            <a:off x="8549640" y="2194560"/>
+            <a:ext cx="2788920" cy="685800"/>
+          </a:xfrm>
+          <a:prstGeom prst="rect">
+            <a:avLst/>
+          </a:prstGeom>
+          <a:noFill/>
+          <a:ln/>
+        </p:spPr>
+        <p:txBody>
+          <a:bodyPr wrap="square" lIns="0" tIns="0" rIns="0" bIns="0" rtlCol="0" anchor="ctr"/>
+          <a:lstStyle/>
+          <a:p>
+            <a:pPr indent="0" marL="0">
+              <a:buNone/>
+            </a:pPr>
+            <a:r>
+              <a:rPr lang="en-US" sz="1700" b="1" dirty="0">
+                <a:solidFill>
+                  <a:srgbClr val="0F172A"/>
+                </a:solidFill>
+                <a:latin typeface="Calibri" pitchFamily="34" charset="0"/>
+                <a:ea typeface="Calibri" pitchFamily="34" charset="-122"/>
+                <a:cs typeface="Calibri" pitchFamily="34" charset="-120"/>
+              </a:rPr>
+              <a:t>BlackLine · Inventory Close Guard</a:t>
+            </a:r>
+            <a:endParaRPr lang="en-US" sz="1700" dirty="0"/>
+          </a:p>
+        </p:txBody>
+      </p:sp>
+      <p:sp>
+        <p:nvSpPr>
+          <p:cNvPr id="15" name="Text 13"/>
+          <p:cNvSpPr/>
+          <p:nvPr/>
+        </p:nvSpPr>
+        <p:spPr>
+          <a:xfrm>
+            <a:off x="8549640" y="2926080"/>
+            <a:ext cx="2743200" cy="1097280"/>
+          </a:xfrm>
+          <a:prstGeom prst="rect">
+            <a:avLst/>
+          </a:prstGeom>
+          <a:noFill/>
+          <a:ln/>
+        </p:spPr>
+        <p:txBody>
+          <a:bodyPr wrap="square" lIns="0" tIns="0" rIns="0" bIns="0" rtlCol="0" anchor="ctr"/>
+          <a:lstStyle/>
+          <a:p>
+            <a:pPr indent="0" marL="0">
+              <a:buNone/>
+            </a:pPr>
+            <a:r>
+              <a:rPr lang="en-US" sz="1200" dirty="0">
+                <a:solidFill>
+                  <a:srgbClr val="475569"/>
+                </a:solidFill>
+                <a:latin typeface="Calibri" pitchFamily="34" charset="0"/>
+                <a:ea typeface="Calibri" pitchFamily="34" charset="-122"/>
+                <a:cs typeface="Calibri" pitchFamily="34" charset="-120"/>
+              </a:rPr>
+              <a:t>Close automation starts once trustworthy data exists. Transit Guard is where that data is born.</a:t>
+            </a:r>
+            <a:endParaRPr lang="en-US" sz="1200" dirty="0"/>
+          </a:p>
+        </p:txBody>
+      </p:sp>
+      <p:sp>
+        <p:nvSpPr>
+          <p:cNvPr id="16" name="Shape 14"/>
+          <p:cNvSpPr/>
+          <p:nvPr/>
+        </p:nvSpPr>
+        <p:spPr>
+          <a:xfrm>
+            <a:off x="3950208" y="2743200"/>
+            <a:ext cx="457200" cy="365760"/>
+          </a:xfrm>
+          <a:prstGeom prst="rightArrow">
+            <a:avLst/>
+          </a:prstGeom>
+          <a:solidFill>
+            <a:srgbClr val="059669"/>
+          </a:solidFill>
+          <a:ln/>
+        </p:spPr>
+      </p:sp>
+      <p:sp>
+        <p:nvSpPr>
+          <p:cNvPr id="17" name="Shape 15"/>
+          <p:cNvSpPr/>
+          <p:nvPr/>
+        </p:nvSpPr>
+        <p:spPr>
+          <a:xfrm>
+            <a:off x="7836408" y="2743200"/>
+            <a:ext cx="457200" cy="365760"/>
+          </a:xfrm>
+          <a:prstGeom prst="rightArrow">
+            <a:avLst/>
+          </a:prstGeom>
+          <a:solidFill>
+            <a:srgbClr val="059669"/>
+          </a:solidFill>
+          <a:ln/>
+        </p:spPr>
+      </p:sp>
+      <p:sp>
+        <p:nvSpPr>
+          <p:cNvPr id="18" name="Shape 16"/>
+          <p:cNvSpPr/>
+          <p:nvPr/>
+        </p:nvSpPr>
+        <p:spPr>
+          <a:xfrm>
+            <a:off x="548640" y="4709160"/>
+            <a:ext cx="5349240" cy="1463040"/>
+          </a:xfrm>
+          <a:prstGeom prst="roundRect">
+            <a:avLst>
+              <a:gd name="adj" fmla="val 6250"/>
             </a:avLst>
           </a:prstGeom>
           <a:solidFill>
@@ -11848,139 +13511,96 @@
       </p:sp>
       <p:sp>
         <p:nvSpPr>
-          <p:cNvPr id="4" name="Text 2"/>
-          <p:cNvSpPr/>
-          <p:nvPr/>
-        </p:nvSpPr>
-        <p:spPr>
-          <a:xfrm>
-            <a:off x="822960" y="1801368"/>
-            <a:ext cx="868680" cy="502920"/>
+          <p:cNvPr id="19" name="Text 17"/>
+          <p:cNvSpPr/>
+          <p:nvPr/>
+        </p:nvSpPr>
+        <p:spPr>
+          <a:xfrm>
+            <a:off x="822960" y="4919472"/>
+            <a:ext cx="4754880" cy="320040"/>
+          </a:xfrm>
+          <a:prstGeom prst="rect">
+            <a:avLst/>
+          </a:prstGeom>
+          <a:noFill/>
+          <a:ln/>
+        </p:spPr>
+        <p:txBody>
+          <a:bodyPr wrap="square" lIns="0" tIns="0" rIns="0" bIns="0" rtlCol="0" anchor="ctr"/>
+          <a:lstStyle/>
+          <a:p>
+            <a:pPr indent="0" marL="0">
+              <a:buNone/>
+            </a:pPr>
+            <a:r>
+              <a:rPr lang="en-US" sz="1450" b="1" dirty="0">
+                <a:solidFill>
+                  <a:srgbClr val="059669"/>
+                </a:solidFill>
+                <a:latin typeface="Calibri" pitchFamily="34" charset="0"/>
+                <a:ea typeface="Calibri" pitchFamily="34" charset="-122"/>
+                <a:cs typeface="Calibri" pitchFamily="34" charset="-120"/>
+              </a:rPr>
+              <a:t>Carriers plug in, not out</a:t>
+            </a:r>
+            <a:endParaRPr lang="en-US" sz="1450" dirty="0"/>
+          </a:p>
+        </p:txBody>
+      </p:sp>
+      <p:sp>
+        <p:nvSpPr>
+          <p:cNvPr id="20" name="Text 18"/>
+          <p:cNvSpPr/>
+          <p:nvPr/>
+        </p:nvSpPr>
+        <p:spPr>
+          <a:xfrm>
+            <a:off x="822960" y="5257800"/>
+            <a:ext cx="4846320" cy="822960"/>
+          </a:xfrm>
+          <a:prstGeom prst="rect">
+            <a:avLst/>
+          </a:prstGeom>
+          <a:noFill/>
+          <a:ln/>
+        </p:spPr>
+        <p:txBody>
+          <a:bodyPr wrap="square" lIns="0" tIns="0" rIns="0" bIns="0" rtlCol="0" anchor="ctr"/>
+          <a:lstStyle/>
+          <a:p>
+            <a:pPr indent="0" marL="0">
+              <a:buNone/>
+            </a:pPr>
+            <a:r>
+              <a:rPr lang="en-US" sz="1200" dirty="0">
+                <a:solidFill>
+                  <a:srgbClr val="475569"/>
+                </a:solidFill>
+                <a:latin typeface="Calibri" pitchFamily="34" charset="0"/>
+                <a:ea typeface="Calibri" pitchFamily="34" charset="-122"/>
+                <a:cs typeface="Calibri" pitchFamily="34" charset="-120"/>
+              </a:rPr>
+              <a:t>Partner carrier and 3PL apps log hand-offs through the Transit Guard API — same transaction ID end to end, with QR scans standardizing EU hand-offs. A connector, not a migration.</a:t>
+            </a:r>
+            <a:endParaRPr lang="en-US" sz="1200" dirty="0"/>
+          </a:p>
+        </p:txBody>
+      </p:sp>
+      <p:sp>
+        <p:nvSpPr>
+          <p:cNvPr id="21" name="Shape 19"/>
+          <p:cNvSpPr/>
+          <p:nvPr/>
+        </p:nvSpPr>
+        <p:spPr>
+          <a:xfrm>
+            <a:off x="6263640" y="4709160"/>
+            <a:ext cx="5349240" cy="1463040"/>
           </a:xfrm>
           <a:prstGeom prst="roundRect">
             <a:avLst>
-              <a:gd name="adj" fmla="val 21818"/>
-            </a:avLst>
-          </a:prstGeom>
-          <a:solidFill>
-            <a:srgbClr val="D1FAE5"/>
-          </a:solidFill>
-          <a:ln/>
-        </p:spPr>
-        <p:txBody>
-          <a:bodyPr wrap="square" rtlCol="0" anchor="ctr"/>
-          <a:lstStyle/>
-          <a:p>
-            <a:pPr algn="ctr" indent="0" marL="0">
-              <a:buNone/>
-            </a:pPr>
-            <a:r>
-              <a:rPr lang="en-US" sz="1500" b="1" dirty="0">
-                <a:solidFill>
-                  <a:srgbClr val="059669"/>
-                </a:solidFill>
-                <a:latin typeface="Calibri" pitchFamily="34" charset="0"/>
-                <a:ea typeface="Calibri" pitchFamily="34" charset="-122"/>
-                <a:cs typeface="Calibri" pitchFamily="34" charset="-120"/>
-              </a:rPr>
-              <a:t>TAM</a:t>
-            </a:r>
-            <a:endParaRPr lang="en-US" sz="1500" dirty="0"/>
-          </a:p>
-        </p:txBody>
-      </p:sp>
-      <p:sp>
-        <p:nvSpPr>
-          <p:cNvPr id="5" name="Text 3"/>
-          <p:cNvSpPr/>
-          <p:nvPr/>
-        </p:nvSpPr>
-        <p:spPr>
-          <a:xfrm>
-            <a:off x="1874520" y="1581912"/>
-            <a:ext cx="1965960" cy="685800"/>
-          </a:xfrm>
-          <a:prstGeom prst="rect">
-            <a:avLst/>
-          </a:prstGeom>
-          <a:noFill/>
-          <a:ln/>
-        </p:spPr>
-        <p:txBody>
-          <a:bodyPr wrap="square" lIns="0" tIns="0" rIns="0" bIns="0" rtlCol="0" anchor="ctr"/>
-          <a:lstStyle/>
-          <a:p>
-            <a:pPr indent="0" marL="0">
-              <a:buNone/>
-            </a:pPr>
-            <a:r>
-              <a:rPr lang="en-US" sz="3000" b="1" dirty="0">
-                <a:solidFill>
-                  <a:srgbClr val="0F172A"/>
-                </a:solidFill>
-                <a:latin typeface="Calibri" pitchFamily="34" charset="0"/>
-                <a:ea typeface="Calibri" pitchFamily="34" charset="-122"/>
-                <a:cs typeface="Calibri" pitchFamily="34" charset="-120"/>
-              </a:rPr>
-              <a:t>$28B</a:t>
-            </a:r>
-            <a:endParaRPr lang="en-US" sz="3000" dirty="0"/>
-          </a:p>
-        </p:txBody>
-      </p:sp>
-      <p:sp>
-        <p:nvSpPr>
-          <p:cNvPr id="6" name="Text 4"/>
-          <p:cNvSpPr/>
-          <p:nvPr/>
-        </p:nvSpPr>
-        <p:spPr>
-          <a:xfrm>
-            <a:off x="3886200" y="1563624"/>
-            <a:ext cx="2788920" cy="1051560"/>
-          </a:xfrm>
-          <a:prstGeom prst="rect">
-            <a:avLst/>
-          </a:prstGeom>
-          <a:noFill/>
-          <a:ln/>
-        </p:spPr>
-        <p:txBody>
-          <a:bodyPr wrap="square" lIns="0" tIns="0" rIns="0" bIns="0" rtlCol="0" anchor="ctr"/>
-          <a:lstStyle/>
-          <a:p>
-            <a:pPr indent="0" marL="0">
-              <a:buNone/>
-            </a:pPr>
-            <a:r>
-              <a:rPr lang="en-US" sz="1100" dirty="0">
-                <a:solidFill>
-                  <a:srgbClr val="475569"/>
-                </a:solidFill>
-                <a:latin typeface="Calibri" pitchFamily="34" charset="0"/>
-                <a:ea typeface="Calibri" pitchFamily="34" charset="-122"/>
-                <a:cs typeface="Calibri" pitchFamily="34" charset="-120"/>
-              </a:rPr>
-              <a:t>Global supply chain management software spend, 2025.</a:t>
-            </a:r>
-            <a:endParaRPr lang="en-US" sz="1100" dirty="0"/>
-          </a:p>
-        </p:txBody>
-      </p:sp>
-      <p:sp>
-        <p:nvSpPr>
-          <p:cNvPr id="7" name="Shape 5"/>
-          <p:cNvSpPr/>
-          <p:nvPr/>
-        </p:nvSpPr>
-        <p:spPr>
-          <a:xfrm>
-            <a:off x="548640" y="2898648"/>
-            <a:ext cx="6309360" cy="1325880"/>
-          </a:xfrm>
-          <a:prstGeom prst="roundRect">
-            <a:avLst>
-              <a:gd name="adj" fmla="val 6897"/>
+              <a:gd name="adj" fmla="val 6250"/>
             </a:avLst>
           </a:prstGeom>
           <a:solidFill>
@@ -12003,112 +13623,69 @@
       </p:sp>
       <p:sp>
         <p:nvSpPr>
-          <p:cNvPr id="8" name="Text 6"/>
-          <p:cNvSpPr/>
-          <p:nvPr/>
-        </p:nvSpPr>
-        <p:spPr>
-          <a:xfrm>
-            <a:off x="822960" y="3282696"/>
-            <a:ext cx="868680" cy="502920"/>
-          </a:xfrm>
-          <a:prstGeom prst="roundRect">
-            <a:avLst>
-              <a:gd name="adj" fmla="val 21818"/>
-            </a:avLst>
-          </a:prstGeom>
-          <a:solidFill>
-            <a:srgbClr val="CCFBF1"/>
-          </a:solidFill>
-          <a:ln/>
-        </p:spPr>
-        <p:txBody>
-          <a:bodyPr wrap="square" rtlCol="0" anchor="ctr"/>
-          <a:lstStyle/>
-          <a:p>
-            <a:pPr algn="ctr" indent="0" marL="0">
-              <a:buNone/>
-            </a:pPr>
-            <a:r>
-              <a:rPr lang="en-US" sz="1500" b="1" dirty="0">
-                <a:solidFill>
-                  <a:srgbClr val="0F766E"/>
-                </a:solidFill>
-                <a:latin typeface="Calibri" pitchFamily="34" charset="0"/>
-                <a:ea typeface="Calibri" pitchFamily="34" charset="-122"/>
-                <a:cs typeface="Calibri" pitchFamily="34" charset="-120"/>
-              </a:rPr>
-              <a:t>SAM</a:t>
-            </a:r>
-            <a:endParaRPr lang="en-US" sz="1500" dirty="0"/>
-          </a:p>
-        </p:txBody>
-      </p:sp>
-      <p:sp>
-        <p:nvSpPr>
-          <p:cNvPr id="9" name="Text 7"/>
-          <p:cNvSpPr/>
-          <p:nvPr/>
-        </p:nvSpPr>
-        <p:spPr>
-          <a:xfrm>
-            <a:off x="1874520" y="3063240"/>
-            <a:ext cx="1965960" cy="685800"/>
-          </a:xfrm>
-          <a:prstGeom prst="rect">
-            <a:avLst/>
-          </a:prstGeom>
-          <a:noFill/>
-          <a:ln/>
-        </p:spPr>
-        <p:txBody>
-          <a:bodyPr wrap="square" lIns="0" tIns="0" rIns="0" bIns="0" rtlCol="0" anchor="ctr"/>
-          <a:lstStyle/>
-          <a:p>
-            <a:pPr indent="0" marL="0">
-              <a:buNone/>
-            </a:pPr>
-            <a:r>
-              <a:rPr lang="en-US" sz="3000" b="1" dirty="0">
-                <a:solidFill>
-                  <a:srgbClr val="0F172A"/>
-                </a:solidFill>
-                <a:latin typeface="Calibri" pitchFamily="34" charset="0"/>
-                <a:ea typeface="Calibri" pitchFamily="34" charset="-122"/>
-                <a:cs typeface="Calibri" pitchFamily="34" charset="-120"/>
-              </a:rPr>
-              <a:t>$6.5B</a:t>
-            </a:r>
-            <a:endParaRPr lang="en-US" sz="3000" dirty="0"/>
-          </a:p>
-        </p:txBody>
-      </p:sp>
-      <p:sp>
-        <p:nvSpPr>
-          <p:cNvPr id="10" name="Text 8"/>
-          <p:cNvSpPr/>
-          <p:nvPr/>
-        </p:nvSpPr>
-        <p:spPr>
-          <a:xfrm>
-            <a:off x="3886200" y="3044952"/>
-            <a:ext cx="2788920" cy="1051560"/>
-          </a:xfrm>
-          <a:prstGeom prst="rect">
-            <a:avLst/>
-          </a:prstGeom>
-          <a:noFill/>
-          <a:ln/>
-        </p:spPr>
-        <p:txBody>
-          <a:bodyPr wrap="square" lIns="0" tIns="0" rIns="0" bIns="0" rtlCol="0" anchor="ctr"/>
-          <a:lstStyle/>
-          <a:p>
-            <a:pPr indent="0" marL="0">
-              <a:buNone/>
-            </a:pPr>
-            <a:r>
-              <a:rPr lang="en-US" sz="1100" dirty="0">
+          <p:cNvPr id="22" name="Text 20"/>
+          <p:cNvSpPr/>
+          <p:nvPr/>
+        </p:nvSpPr>
+        <p:spPr>
+          <a:xfrm>
+            <a:off x="6537960" y="4919472"/>
+            <a:ext cx="4754880" cy="320040"/>
+          </a:xfrm>
+          <a:prstGeom prst="rect">
+            <a:avLst/>
+          </a:prstGeom>
+          <a:noFill/>
+          <a:ln/>
+        </p:spPr>
+        <p:txBody>
+          <a:bodyPr wrap="square" lIns="0" tIns="0" rIns="0" bIns="0" rtlCol="0" anchor="ctr"/>
+          <a:lstStyle/>
+          <a:p>
+            <a:pPr indent="0" marL="0">
+              <a:buNone/>
+            </a:pPr>
+            <a:r>
+              <a:rPr lang="en-US" sz="1450" b="1" dirty="0">
+                <a:solidFill>
+                  <a:srgbClr val="059669"/>
+                </a:solidFill>
+                <a:latin typeface="Calibri" pitchFamily="34" charset="0"/>
+                <a:ea typeface="Calibri" pitchFamily="34" charset="-122"/>
+                <a:cs typeface="Calibri" pitchFamily="34" charset="-120"/>
+              </a:rPr>
+              <a:t>The suite play</a:t>
+            </a:r>
+            <a:endParaRPr lang="en-US" sz="1450" dirty="0"/>
+          </a:p>
+        </p:txBody>
+      </p:sp>
+      <p:sp>
+        <p:nvSpPr>
+          <p:cNvPr id="23" name="Text 21"/>
+          <p:cNvSpPr/>
+          <p:nvPr/>
+        </p:nvSpPr>
+        <p:spPr>
+          <a:xfrm>
+            <a:off x="6537960" y="5257800"/>
+            <a:ext cx="4846320" cy="822960"/>
+          </a:xfrm>
+          <a:prstGeom prst="rect">
+            <a:avLst/>
+          </a:prstGeom>
+          <a:noFill/>
+          <a:ln/>
+        </p:spPr>
+        <p:txBody>
+          <a:bodyPr wrap="square" lIns="0" tIns="0" rIns="0" bIns="0" rtlCol="0" anchor="ctr"/>
+          <a:lstStyle/>
+          <a:p>
+            <a:pPr indent="0" marL="0">
+              <a:buNone/>
+            </a:pPr>
+            <a:r>
+              <a:rPr lang="en-US" sz="1200" dirty="0">
                 <a:solidFill>
                   <a:srgbClr val="475569"/>
                 </a:solidFill>
@@ -12116,292 +13693,9 @@
                 <a:ea typeface="Calibri" pitchFamily="34" charset="-122"/>
                 <a:cs typeface="Calibri" pitchFamily="34" charset="-120"/>
               </a:rPr>
-              <a:t>Supply chain visibility (~$3.3B) + inventory management software (~$3.2B) — the goods-in-motion layer, growing 13%+ per year.</a:t>
-            </a:r>
-            <a:endParaRPr lang="en-US" sz="1100" dirty="0"/>
-          </a:p>
-        </p:txBody>
-      </p:sp>
-      <p:sp>
-        <p:nvSpPr>
-          <p:cNvPr id="11" name="Shape 9"/>
-          <p:cNvSpPr/>
-          <p:nvPr/>
-        </p:nvSpPr>
-        <p:spPr>
-          <a:xfrm>
-            <a:off x="548640" y="4379976"/>
-            <a:ext cx="6309360" cy="1325880"/>
-          </a:xfrm>
-          <a:prstGeom prst="roundRect">
-            <a:avLst>
-              <a:gd name="adj" fmla="val 6897"/>
-            </a:avLst>
-          </a:prstGeom>
-          <a:solidFill>
-            <a:srgbClr val="FFFFFF"/>
-          </a:solidFill>
-          <a:ln w="12700">
-            <a:solidFill>
-              <a:srgbClr val="E2E8F0"/>
-            </a:solidFill>
-            <a:prstDash val="solid"/>
-          </a:ln>
-          <a:effectLst>
-            <a:outerShdw sx="100000" sy="100000" kx="0" ky="0" algn="bl" rotWithShape="0" blurRad="88900" dist="25400" dir="5400000">
-              <a:srgbClr val="CBD5E1">
-                <a:alpha val="40000"/>
-              </a:srgbClr>
-            </a:outerShdw>
-          </a:effectLst>
-        </p:spPr>
-      </p:sp>
-      <p:sp>
-        <p:nvSpPr>
-          <p:cNvPr id="12" name="Text 10"/>
-          <p:cNvSpPr/>
-          <p:nvPr/>
-        </p:nvSpPr>
-        <p:spPr>
-          <a:xfrm>
-            <a:off x="822960" y="4764024"/>
-            <a:ext cx="868680" cy="502920"/>
-          </a:xfrm>
-          <a:prstGeom prst="roundRect">
-            <a:avLst>
-              <a:gd name="adj" fmla="val 21818"/>
-            </a:avLst>
-          </a:prstGeom>
-          <a:solidFill>
-            <a:srgbClr val="FEF3C7"/>
-          </a:solidFill>
-          <a:ln/>
-        </p:spPr>
-        <p:txBody>
-          <a:bodyPr wrap="square" rtlCol="0" anchor="ctr"/>
-          <a:lstStyle/>
-          <a:p>
-            <a:pPr algn="ctr" indent="0" marL="0">
-              <a:buNone/>
-            </a:pPr>
-            <a:r>
-              <a:rPr lang="en-US" sz="1500" b="1" dirty="0">
-                <a:solidFill>
-                  <a:srgbClr val="B45309"/>
-                </a:solidFill>
-                <a:latin typeface="Calibri" pitchFamily="34" charset="0"/>
-                <a:ea typeface="Calibri" pitchFamily="34" charset="-122"/>
-                <a:cs typeface="Calibri" pitchFamily="34" charset="-120"/>
-              </a:rPr>
-              <a:t>SOM</a:t>
-            </a:r>
-            <a:endParaRPr lang="en-US" sz="1500" dirty="0"/>
-          </a:p>
-        </p:txBody>
-      </p:sp>
-      <p:sp>
-        <p:nvSpPr>
-          <p:cNvPr id="13" name="Text 11"/>
-          <p:cNvSpPr/>
-          <p:nvPr/>
-        </p:nvSpPr>
-        <p:spPr>
-          <a:xfrm>
-            <a:off x="1874520" y="4544568"/>
-            <a:ext cx="1965960" cy="685800"/>
-          </a:xfrm>
-          <a:prstGeom prst="rect">
-            <a:avLst/>
-          </a:prstGeom>
-          <a:noFill/>
-          <a:ln/>
-        </p:spPr>
-        <p:txBody>
-          <a:bodyPr wrap="square" lIns="0" tIns="0" rIns="0" bIns="0" rtlCol="0" anchor="ctr"/>
-          <a:lstStyle/>
-          <a:p>
-            <a:pPr indent="0" marL="0">
-              <a:buNone/>
-            </a:pPr>
-            <a:r>
-              <a:rPr lang="en-US" sz="3000" b="1" dirty="0">
-                <a:solidFill>
-                  <a:srgbClr val="0F172A"/>
-                </a:solidFill>
-                <a:latin typeface="Calibri" pitchFamily="34" charset="0"/>
-                <a:ea typeface="Calibri" pitchFamily="34" charset="-122"/>
-                <a:cs typeface="Calibri" pitchFamily="34" charset="-120"/>
-              </a:rPr>
-              <a:t>$48M ARR</a:t>
-            </a:r>
-            <a:endParaRPr lang="en-US" sz="3000" dirty="0"/>
-          </a:p>
-        </p:txBody>
-      </p:sp>
-      <p:sp>
-        <p:nvSpPr>
-          <p:cNvPr id="14" name="Text 12"/>
-          <p:cNvSpPr/>
-          <p:nvPr/>
-        </p:nvSpPr>
-        <p:spPr>
-          <a:xfrm>
-            <a:off x="3886200" y="4526280"/>
-            <a:ext cx="2788920" cy="1051560"/>
-          </a:xfrm>
-          <a:prstGeom prst="rect">
-            <a:avLst/>
-          </a:prstGeom>
-          <a:noFill/>
-          <a:ln/>
-        </p:spPr>
-        <p:txBody>
-          <a:bodyPr wrap="square" lIns="0" tIns="0" rIns="0" bIns="0" rtlCol="0" anchor="ctr"/>
-          <a:lstStyle/>
-          <a:p>
-            <a:pPr indent="0" marL="0">
-              <a:buNone/>
-            </a:pPr>
-            <a:r>
-              <a:rPr lang="en-US" sz="1100" dirty="0">
-                <a:solidFill>
-                  <a:srgbClr val="475569"/>
-                </a:solidFill>
-                <a:latin typeface="Calibri" pitchFamily="34" charset="0"/>
-                <a:ea typeface="Calibri" pitchFamily="34" charset="-122"/>
-                <a:cs typeface="Calibri" pitchFamily="34" charset="-120"/>
-              </a:rPr>
-              <a:t>Beachhead: ~4,000 U.S. mid-market serialized-hardware exporters × $12K average contract.</a:t>
-            </a:r>
-            <a:endParaRPr lang="en-US" sz="1100" dirty="0"/>
-          </a:p>
-        </p:txBody>
-      </p:sp>
-      <p:sp>
-        <p:nvSpPr>
-          <p:cNvPr id="15" name="Shape 13"/>
-          <p:cNvSpPr/>
-          <p:nvPr/>
-        </p:nvSpPr>
-        <p:spPr>
-          <a:xfrm>
-            <a:off x="7178040" y="1417320"/>
-            <a:ext cx="4434840" cy="4526280"/>
-          </a:xfrm>
-          <a:prstGeom prst="roundRect">
-            <a:avLst>
-              <a:gd name="adj" fmla="val 2062"/>
-            </a:avLst>
-          </a:prstGeom>
-          <a:solidFill>
-            <a:srgbClr val="FFFFFF"/>
-          </a:solidFill>
-          <a:ln w="12700">
-            <a:solidFill>
-              <a:srgbClr val="E2E8F0"/>
-            </a:solidFill>
-            <a:prstDash val="solid"/>
-          </a:ln>
-          <a:effectLst>
-            <a:outerShdw sx="100000" sy="100000" kx="0" ky="0" algn="bl" rotWithShape="0" blurRad="88900" dist="25400" dir="5400000">
-              <a:srgbClr val="CBD5E1">
-                <a:alpha val="40000"/>
-              </a:srgbClr>
-            </a:outerShdw>
-          </a:effectLst>
-        </p:spPr>
-      </p:sp>
-      <p:graphicFrame>
-        <p:nvGraphicFramePr>
-          <p:cNvPr id="16" name="Chart 0" descr=""/>
-          <p:cNvGraphicFramePr/>
-          <p:nvPr/>
-        </p:nvGraphicFramePr>
-        <p:xfrm>
-          <a:off x="7452360" y="1783080"/>
-          <a:ext cx="3886200" cy="3291840"/>
-        </p:xfrm>
-        <a:graphic xmlns:a="http://schemas.openxmlformats.org/drawingml/2006/main">
-          <a:graphicData uri="http://schemas.openxmlformats.org/drawingml/2006/chart">
-            <c:chart xmlns:c="http://schemas.openxmlformats.org/drawingml/2006/chart" r:id="rId1"/>
-          </a:graphicData>
-        </a:graphic>
-      </p:graphicFrame>
-      <p:sp>
-        <p:nvSpPr>
-          <p:cNvPr id="17" name="Text 14"/>
-          <p:cNvSpPr/>
-          <p:nvPr/>
-        </p:nvSpPr>
-        <p:spPr>
-          <a:xfrm>
-            <a:off x="7452360" y="5120640"/>
-            <a:ext cx="3886200" cy="365760"/>
-          </a:xfrm>
-          <a:prstGeom prst="rect">
-            <a:avLst/>
-          </a:prstGeom>
-          <a:noFill/>
-          <a:ln/>
-        </p:spPr>
-        <p:txBody>
-          <a:bodyPr wrap="square" lIns="0" tIns="0" rIns="0" bIns="0" rtlCol="0" anchor="ctr"/>
-          <a:lstStyle/>
-          <a:p>
-            <a:pPr algn="ctr" indent="0" marL="0">
-              <a:buNone/>
-            </a:pPr>
-            <a:r>
-              <a:rPr lang="en-US" sz="1400" b="1" dirty="0">
-                <a:solidFill>
-                  <a:srgbClr val="059669"/>
-                </a:solidFill>
-                <a:latin typeface="Calibri" pitchFamily="34" charset="0"/>
-                <a:ea typeface="Calibri" pitchFamily="34" charset="-122"/>
-                <a:cs typeface="Calibri" pitchFamily="34" charset="-120"/>
-              </a:rPr>
-              <a:t>13%+ CAGR</a:t>
-            </a:r>
-            <a:endParaRPr lang="en-US" sz="1400" dirty="0"/>
-          </a:p>
-        </p:txBody>
-      </p:sp>
-      <p:sp>
-        <p:nvSpPr>
-          <p:cNvPr id="18" name="Text 15"/>
-          <p:cNvSpPr/>
-          <p:nvPr/>
-        </p:nvSpPr>
-        <p:spPr>
-          <a:xfrm>
-            <a:off x="548640" y="6172200"/>
-            <a:ext cx="11064240" cy="457200"/>
-          </a:xfrm>
-          <a:prstGeom prst="rect">
-            <a:avLst/>
-          </a:prstGeom>
-          <a:noFill/>
-          <a:ln/>
-        </p:spPr>
-        <p:txBody>
-          <a:bodyPr wrap="square" lIns="0" tIns="0" rIns="0" bIns="0" rtlCol="0" anchor="ctr"/>
-          <a:lstStyle/>
-          <a:p>
-            <a:pPr indent="0" marL="0">
-              <a:buNone/>
-            </a:pPr>
-            <a:r>
-              <a:rPr lang="en-US" sz="900" dirty="0">
-                <a:solidFill>
-                  <a:srgbClr val="94A3B8"/>
-                </a:solidFill>
-                <a:latin typeface="Calibri" pitchFamily="34" charset="0"/>
-                <a:ea typeface="Calibri" pitchFamily="34" charset="-122"/>
-                <a:cs typeface="Calibri" pitchFamily="34" charset="-120"/>
-              </a:rPr>
-              <a:t>Sources: Technavio (SCM software, 2025); GM Insights &amp; Mordor Intelligence (supply chain visibility, 2025); Grand View Research (inventory management software, 2025). SOM is an internal estimate.</a:t>
-            </a:r>
-            <a:endParaRPr lang="en-US" sz="900" dirty="0"/>
+              <a:t>At year-end, custody events become Inventory Close Guard’s cutoff and existence evidence. Capture once, close faster.</a:t>
+            </a:r>
+            <a:endParaRPr lang="en-US" sz="1200" dirty="0"/>
           </a:p>
         </p:txBody>
       </p:sp>
@@ -12470,7 +13764,7 @@
                 <a:ea typeface="Calibri" pitchFamily="34" charset="-122"/>
                 <a:cs typeface="Calibri" pitchFamily="34" charset="-120"/>
               </a:rPr>
-              <a:t>Visibility tools see trucks. We see accounting truth.</a:t>
+              <a:t>A focused wedge into a $28B market.</a:t>
             </a:r>
             <a:endParaRPr lang="en-US" sz="3400" dirty="0"/>
           </a:p>
@@ -12485,15 +13779,15 @@
         <p:spPr>
           <a:xfrm>
             <a:off x="548640" y="1417320"/>
-            <a:ext cx="3337560" cy="2148840"/>
+            <a:ext cx="6309360" cy="1325880"/>
           </a:xfrm>
           <a:prstGeom prst="roundRect">
             <a:avLst>
-              <a:gd name="adj" fmla="val 4255"/>
+              <a:gd name="adj" fmla="val 6897"/>
             </a:avLst>
           </a:prstGeom>
           <a:solidFill>
-            <a:srgbClr val="F8FAFC"/>
+            <a:srgbClr val="FFFFFF"/>
           </a:solidFill>
           <a:ln w="12700">
             <a:solidFill>
@@ -12518,94 +13812,137 @@
         </p:nvSpPr>
         <p:spPr>
           <a:xfrm>
-            <a:off x="804672" y="1645920"/>
-            <a:ext cx="2834640" cy="548640"/>
-          </a:xfrm>
-          <a:prstGeom prst="rect">
-            <a:avLst/>
-          </a:prstGeom>
-          <a:noFill/>
-          <a:ln/>
-        </p:spPr>
-        <p:txBody>
-          <a:bodyPr wrap="square" lIns="0" tIns="0" rIns="0" bIns="0" rtlCol="0" anchor="ctr"/>
-          <a:lstStyle/>
-          <a:p>
-            <a:pPr indent="0" marL="0">
-              <a:buNone/>
-            </a:pPr>
-            <a:r>
-              <a:rPr lang="en-US" sz="1500" b="1" dirty="0">
-                <a:solidFill>
-                  <a:srgbClr val="0F172A"/>
-                </a:solidFill>
-                <a:latin typeface="Calibri" pitchFamily="34" charset="0"/>
-                <a:ea typeface="Calibri" pitchFamily="34" charset="-122"/>
-                <a:cs typeface="Calibri" pitchFamily="34" charset="-120"/>
-              </a:rPr>
-              <a:t>project44 · FourKites</a:t>
-            </a:r>
-            <a:endParaRPr lang="en-US" sz="1500" dirty="0"/>
-          </a:p>
-        </p:txBody>
-      </p:sp>
-      <p:sp>
-        <p:nvSpPr>
-          <p:cNvPr id="5" name="Text 3"/>
-          <p:cNvSpPr/>
-          <p:nvPr/>
-        </p:nvSpPr>
-        <p:spPr>
-          <a:xfrm>
-            <a:off x="804672" y="2240280"/>
-            <a:ext cx="2834640" cy="1188720"/>
-          </a:xfrm>
-          <a:prstGeom prst="rect">
-            <a:avLst/>
-          </a:prstGeom>
-          <a:noFill/>
-          <a:ln/>
-        </p:spPr>
-        <p:txBody>
-          <a:bodyPr wrap="square" lIns="0" tIns="0" rIns="0" bIns="0" rtlCol="0" anchor="ctr"/>
-          <a:lstStyle/>
-          <a:p>
-            <a:pPr indent="0" marL="0">
-              <a:buNone/>
-            </a:pPr>
-            <a:r>
-              <a:rPr lang="en-US" sz="1150" dirty="0">
-                <a:solidFill>
-                  <a:srgbClr val="475569"/>
-                </a:solidFill>
-                <a:latin typeface="Calibri" pitchFamily="34" charset="0"/>
-                <a:ea typeface="Calibri" pitchFamily="34" charset="-122"/>
-                <a:cs typeface="Calibri" pitchFamily="34" charset="-120"/>
-              </a:rPr>
-              <a:t>Carrier telemetry: where the truck is — not who has custody, or what that means for revenue.</a:t>
-            </a:r>
-            <a:endParaRPr lang="en-US" sz="1150" dirty="0"/>
-          </a:p>
-        </p:txBody>
-      </p:sp>
-      <p:sp>
-        <p:nvSpPr>
-          <p:cNvPr id="6" name="Shape 4"/>
-          <p:cNvSpPr/>
-          <p:nvPr/>
-        </p:nvSpPr>
-        <p:spPr>
-          <a:xfrm>
-            <a:off x="4069080" y="1417320"/>
-            <a:ext cx="3337560" cy="2148840"/>
+            <a:off x="822960" y="1801368"/>
+            <a:ext cx="868680" cy="502920"/>
           </a:xfrm>
           <a:prstGeom prst="roundRect">
             <a:avLst>
-              <a:gd name="adj" fmla="val 4255"/>
+              <a:gd name="adj" fmla="val 21818"/>
             </a:avLst>
           </a:prstGeom>
           <a:solidFill>
-            <a:srgbClr val="F8FAFC"/>
+            <a:srgbClr val="D1FAE5"/>
+          </a:solidFill>
+          <a:ln/>
+        </p:spPr>
+        <p:txBody>
+          <a:bodyPr wrap="square" rtlCol="0" anchor="ctr"/>
+          <a:lstStyle/>
+          <a:p>
+            <a:pPr algn="ctr" indent="0" marL="0">
+              <a:buNone/>
+            </a:pPr>
+            <a:r>
+              <a:rPr lang="en-US" sz="1500" b="1" dirty="0">
+                <a:solidFill>
+                  <a:srgbClr val="059669"/>
+                </a:solidFill>
+                <a:latin typeface="Calibri" pitchFamily="34" charset="0"/>
+                <a:ea typeface="Calibri" pitchFamily="34" charset="-122"/>
+                <a:cs typeface="Calibri" pitchFamily="34" charset="-120"/>
+              </a:rPr>
+              <a:t>TAM</a:t>
+            </a:r>
+            <a:endParaRPr lang="en-US" sz="1500" dirty="0"/>
+          </a:p>
+        </p:txBody>
+      </p:sp>
+      <p:sp>
+        <p:nvSpPr>
+          <p:cNvPr id="5" name="Text 3"/>
+          <p:cNvSpPr/>
+          <p:nvPr/>
+        </p:nvSpPr>
+        <p:spPr>
+          <a:xfrm>
+            <a:off x="1874520" y="1581912"/>
+            <a:ext cx="1965960" cy="685800"/>
+          </a:xfrm>
+          <a:prstGeom prst="rect">
+            <a:avLst/>
+          </a:prstGeom>
+          <a:noFill/>
+          <a:ln/>
+        </p:spPr>
+        <p:txBody>
+          <a:bodyPr wrap="square" lIns="0" tIns="0" rIns="0" bIns="0" rtlCol="0" anchor="ctr"/>
+          <a:lstStyle/>
+          <a:p>
+            <a:pPr indent="0" marL="0">
+              <a:buNone/>
+            </a:pPr>
+            <a:r>
+              <a:rPr lang="en-US" sz="3000" b="1" dirty="0">
+                <a:solidFill>
+                  <a:srgbClr val="0F172A"/>
+                </a:solidFill>
+                <a:latin typeface="Calibri" pitchFamily="34" charset="0"/>
+                <a:ea typeface="Calibri" pitchFamily="34" charset="-122"/>
+                <a:cs typeface="Calibri" pitchFamily="34" charset="-120"/>
+              </a:rPr>
+              <a:t>$28B</a:t>
+            </a:r>
+            <a:endParaRPr lang="en-US" sz="3000" dirty="0"/>
+          </a:p>
+        </p:txBody>
+      </p:sp>
+      <p:sp>
+        <p:nvSpPr>
+          <p:cNvPr id="6" name="Text 4"/>
+          <p:cNvSpPr/>
+          <p:nvPr/>
+        </p:nvSpPr>
+        <p:spPr>
+          <a:xfrm>
+            <a:off x="3886200" y="1563624"/>
+            <a:ext cx="2788920" cy="1051560"/>
+          </a:xfrm>
+          <a:prstGeom prst="rect">
+            <a:avLst/>
+          </a:prstGeom>
+          <a:noFill/>
+          <a:ln/>
+        </p:spPr>
+        <p:txBody>
+          <a:bodyPr wrap="square" lIns="0" tIns="0" rIns="0" bIns="0" rtlCol="0" anchor="ctr"/>
+          <a:lstStyle/>
+          <a:p>
+            <a:pPr indent="0" marL="0">
+              <a:buNone/>
+            </a:pPr>
+            <a:r>
+              <a:rPr lang="en-US" sz="1100" dirty="0">
+                <a:solidFill>
+                  <a:srgbClr val="475569"/>
+                </a:solidFill>
+                <a:latin typeface="Calibri" pitchFamily="34" charset="0"/>
+                <a:ea typeface="Calibri" pitchFamily="34" charset="-122"/>
+                <a:cs typeface="Calibri" pitchFamily="34" charset="-120"/>
+              </a:rPr>
+              <a:t>Global supply chain management software spend, 2025.</a:t>
+            </a:r>
+            <a:endParaRPr lang="en-US" sz="1100" dirty="0"/>
+          </a:p>
+        </p:txBody>
+      </p:sp>
+      <p:sp>
+        <p:nvSpPr>
+          <p:cNvPr id="7" name="Shape 5"/>
+          <p:cNvSpPr/>
+          <p:nvPr/>
+        </p:nvSpPr>
+        <p:spPr>
+          <a:xfrm>
+            <a:off x="548640" y="2898648"/>
+            <a:ext cx="6309360" cy="1325880"/>
+          </a:xfrm>
+          <a:prstGeom prst="roundRect">
+            <a:avLst>
+              <a:gd name="adj" fmla="val 6897"/>
+            </a:avLst>
+          </a:prstGeom>
+          <a:solidFill>
+            <a:srgbClr val="FFFFFF"/>
           </a:solidFill>
           <a:ln w="12700">
             <a:solidFill>
@@ -12624,100 +13961,143 @@
       </p:sp>
       <p:sp>
         <p:nvSpPr>
-          <p:cNvPr id="7" name="Text 5"/>
-          <p:cNvSpPr/>
-          <p:nvPr/>
-        </p:nvSpPr>
-        <p:spPr>
-          <a:xfrm>
-            <a:off x="4325112" y="1645920"/>
-            <a:ext cx="2834640" cy="548640"/>
-          </a:xfrm>
-          <a:prstGeom prst="rect">
-            <a:avLst/>
-          </a:prstGeom>
-          <a:noFill/>
-          <a:ln/>
-        </p:spPr>
-        <p:txBody>
-          <a:bodyPr wrap="square" lIns="0" tIns="0" rIns="0" bIns="0" rtlCol="0" anchor="ctr"/>
-          <a:lstStyle/>
-          <a:p>
-            <a:pPr indent="0" marL="0">
-              <a:buNone/>
-            </a:pPr>
-            <a:r>
-              <a:rPr lang="en-US" sz="1500" b="1" dirty="0">
-                <a:solidFill>
-                  <a:srgbClr val="0F172A"/>
-                </a:solidFill>
-                <a:latin typeface="Calibri" pitchFamily="34" charset="0"/>
-                <a:ea typeface="Calibri" pitchFamily="34" charset="-122"/>
-                <a:cs typeface="Calibri" pitchFamily="34" charset="-120"/>
-              </a:rPr>
-              <a:t>ERP inventory modules</a:t>
-            </a:r>
-            <a:endParaRPr lang="en-US" sz="1500" dirty="0"/>
-          </a:p>
-        </p:txBody>
-      </p:sp>
-      <p:sp>
-        <p:nvSpPr>
           <p:cNvPr id="8" name="Text 6"/>
           <p:cNvSpPr/>
           <p:nvPr/>
         </p:nvSpPr>
         <p:spPr>
           <a:xfrm>
-            <a:off x="4325112" y="2240280"/>
-            <a:ext cx="2834640" cy="1188720"/>
-          </a:xfrm>
-          <a:prstGeom prst="rect">
-            <a:avLst/>
-          </a:prstGeom>
-          <a:noFill/>
-          <a:ln/>
-        </p:spPr>
-        <p:txBody>
-          <a:bodyPr wrap="square" lIns="0" tIns="0" rIns="0" bIns="0" rtlCol="0" anchor="ctr"/>
-          <a:lstStyle/>
-          <a:p>
-            <a:pPr indent="0" marL="0">
-              <a:buNone/>
-            </a:pPr>
-            <a:r>
-              <a:rPr lang="en-US" sz="1150" dirty="0">
-                <a:solidFill>
-                  <a:srgbClr val="475569"/>
-                </a:solidFill>
-                <a:latin typeface="Calibri" pitchFamily="34" charset="0"/>
-                <a:ea typeface="Calibri" pitchFamily="34" charset="-122"/>
-                <a:cs typeface="Calibri" pitchFamily="34" charset="-120"/>
-              </a:rPr>
-              <a:t>Records after the fact. Blind between warehouse scans; nothing captures the hand-off itself.</a:t>
-            </a:r>
-            <a:endParaRPr lang="en-US" sz="1150" dirty="0"/>
-          </a:p>
-        </p:txBody>
-      </p:sp>
-      <p:sp>
-        <p:nvSpPr>
-          <p:cNvPr id="9" name="Shape 7"/>
-          <p:cNvSpPr/>
-          <p:nvPr/>
-        </p:nvSpPr>
-        <p:spPr>
-          <a:xfrm>
-            <a:off x="548640" y="3749040"/>
-            <a:ext cx="3337560" cy="2148840"/>
+            <a:off x="822960" y="3282696"/>
+            <a:ext cx="868680" cy="502920"/>
           </a:xfrm>
           <a:prstGeom prst="roundRect">
             <a:avLst>
-              <a:gd name="adj" fmla="val 4255"/>
+              <a:gd name="adj" fmla="val 21818"/>
             </a:avLst>
           </a:prstGeom>
           <a:solidFill>
-            <a:srgbClr val="F8FAFC"/>
+            <a:srgbClr val="CCFBF1"/>
+          </a:solidFill>
+          <a:ln/>
+        </p:spPr>
+        <p:txBody>
+          <a:bodyPr wrap="square" rtlCol="0" anchor="ctr"/>
+          <a:lstStyle/>
+          <a:p>
+            <a:pPr algn="ctr" indent="0" marL="0">
+              <a:buNone/>
+            </a:pPr>
+            <a:r>
+              <a:rPr lang="en-US" sz="1500" b="1" dirty="0">
+                <a:solidFill>
+                  <a:srgbClr val="0F766E"/>
+                </a:solidFill>
+                <a:latin typeface="Calibri" pitchFamily="34" charset="0"/>
+                <a:ea typeface="Calibri" pitchFamily="34" charset="-122"/>
+                <a:cs typeface="Calibri" pitchFamily="34" charset="-120"/>
+              </a:rPr>
+              <a:t>SAM</a:t>
+            </a:r>
+            <a:endParaRPr lang="en-US" sz="1500" dirty="0"/>
+          </a:p>
+        </p:txBody>
+      </p:sp>
+      <p:sp>
+        <p:nvSpPr>
+          <p:cNvPr id="9" name="Text 7"/>
+          <p:cNvSpPr/>
+          <p:nvPr/>
+        </p:nvSpPr>
+        <p:spPr>
+          <a:xfrm>
+            <a:off x="1874520" y="3063240"/>
+            <a:ext cx="1965960" cy="685800"/>
+          </a:xfrm>
+          <a:prstGeom prst="rect">
+            <a:avLst/>
+          </a:prstGeom>
+          <a:noFill/>
+          <a:ln/>
+        </p:spPr>
+        <p:txBody>
+          <a:bodyPr wrap="square" lIns="0" tIns="0" rIns="0" bIns="0" rtlCol="0" anchor="ctr"/>
+          <a:lstStyle/>
+          <a:p>
+            <a:pPr indent="0" marL="0">
+              <a:buNone/>
+            </a:pPr>
+            <a:r>
+              <a:rPr lang="en-US" sz="3000" b="1" dirty="0">
+                <a:solidFill>
+                  <a:srgbClr val="0F172A"/>
+                </a:solidFill>
+                <a:latin typeface="Calibri" pitchFamily="34" charset="0"/>
+                <a:ea typeface="Calibri" pitchFamily="34" charset="-122"/>
+                <a:cs typeface="Calibri" pitchFamily="34" charset="-120"/>
+              </a:rPr>
+              <a:t>$6.5B</a:t>
+            </a:r>
+            <a:endParaRPr lang="en-US" sz="3000" dirty="0"/>
+          </a:p>
+        </p:txBody>
+      </p:sp>
+      <p:sp>
+        <p:nvSpPr>
+          <p:cNvPr id="10" name="Text 8"/>
+          <p:cNvSpPr/>
+          <p:nvPr/>
+        </p:nvSpPr>
+        <p:spPr>
+          <a:xfrm>
+            <a:off x="3886200" y="3044952"/>
+            <a:ext cx="2788920" cy="1051560"/>
+          </a:xfrm>
+          <a:prstGeom prst="rect">
+            <a:avLst/>
+          </a:prstGeom>
+          <a:noFill/>
+          <a:ln/>
+        </p:spPr>
+        <p:txBody>
+          <a:bodyPr wrap="square" lIns="0" tIns="0" rIns="0" bIns="0" rtlCol="0" anchor="ctr"/>
+          <a:lstStyle/>
+          <a:p>
+            <a:pPr indent="0" marL="0">
+              <a:buNone/>
+            </a:pPr>
+            <a:r>
+              <a:rPr lang="en-US" sz="1100" dirty="0">
+                <a:solidFill>
+                  <a:srgbClr val="475569"/>
+                </a:solidFill>
+                <a:latin typeface="Calibri" pitchFamily="34" charset="0"/>
+                <a:ea typeface="Calibri" pitchFamily="34" charset="-122"/>
+                <a:cs typeface="Calibri" pitchFamily="34" charset="-120"/>
+              </a:rPr>
+              <a:t>Supply chain visibility (~$3.3B) + inventory management software (~$3.2B) — the goods-in-motion layer, growing 13%+ per year.</a:t>
+            </a:r>
+            <a:endParaRPr lang="en-US" sz="1100" dirty="0"/>
+          </a:p>
+        </p:txBody>
+      </p:sp>
+      <p:sp>
+        <p:nvSpPr>
+          <p:cNvPr id="11" name="Shape 9"/>
+          <p:cNvSpPr/>
+          <p:nvPr/>
+        </p:nvSpPr>
+        <p:spPr>
+          <a:xfrm>
+            <a:off x="548640" y="4379976"/>
+            <a:ext cx="6309360" cy="1325880"/>
+          </a:xfrm>
+          <a:prstGeom prst="roundRect">
+            <a:avLst>
+              <a:gd name="adj" fmla="val 6897"/>
+            </a:avLst>
+          </a:prstGeom>
+          <a:solidFill>
+            <a:srgbClr val="FFFFFF"/>
           </a:solidFill>
           <a:ln w="12700">
             <a:solidFill>
@@ -12736,100 +14116,143 @@
       </p:sp>
       <p:sp>
         <p:nvSpPr>
-          <p:cNvPr id="10" name="Text 8"/>
-          <p:cNvSpPr/>
-          <p:nvPr/>
-        </p:nvSpPr>
-        <p:spPr>
-          <a:xfrm>
-            <a:off x="804672" y="3977640"/>
-            <a:ext cx="2834640" cy="548640"/>
-          </a:xfrm>
-          <a:prstGeom prst="rect">
-            <a:avLst/>
-          </a:prstGeom>
-          <a:noFill/>
-          <a:ln/>
-        </p:spPr>
-        <p:txBody>
-          <a:bodyPr wrap="square" lIns="0" tIns="0" rIns="0" bIns="0" rtlCol="0" anchor="ctr"/>
-          <a:lstStyle/>
-          <a:p>
-            <a:pPr indent="0" marL="0">
-              <a:buNone/>
-            </a:pPr>
-            <a:r>
-              <a:rPr lang="en-US" sz="1500" b="1" dirty="0">
-                <a:solidFill>
-                  <a:srgbClr val="0F172A"/>
-                </a:solidFill>
-                <a:latin typeface="Calibri" pitchFamily="34" charset="0"/>
-                <a:ea typeface="Calibri" pitchFamily="34" charset="-122"/>
-                <a:cs typeface="Calibri" pitchFamily="34" charset="-120"/>
-              </a:rPr>
-              <a:t>BlackLine &amp; close tools</a:t>
-            </a:r>
-            <a:endParaRPr lang="en-US" sz="1500" dirty="0"/>
-          </a:p>
-        </p:txBody>
-      </p:sp>
-      <p:sp>
-        <p:nvSpPr>
-          <p:cNvPr id="11" name="Text 9"/>
-          <p:cNvSpPr/>
-          <p:nvPr/>
-        </p:nvSpPr>
-        <p:spPr>
-          <a:xfrm>
-            <a:off x="804672" y="4572000"/>
-            <a:ext cx="2834640" cy="1188720"/>
-          </a:xfrm>
-          <a:prstGeom prst="rect">
-            <a:avLst/>
-          </a:prstGeom>
-          <a:noFill/>
-          <a:ln/>
-        </p:spPr>
-        <p:txBody>
-          <a:bodyPr wrap="square" lIns="0" tIns="0" rIns="0" bIns="0" rtlCol="0" anchor="ctr"/>
-          <a:lstStyle/>
-          <a:p>
-            <a:pPr indent="0" marL="0">
-              <a:buNone/>
-            </a:pPr>
-            <a:r>
-              <a:rPr lang="en-US" sz="1150" dirty="0">
-                <a:solidFill>
-                  <a:srgbClr val="475569"/>
-                </a:solidFill>
-                <a:latin typeface="Calibri" pitchFamily="34" charset="0"/>
-                <a:ea typeface="Calibri" pitchFamily="34" charset="-122"/>
-                <a:cs typeface="Calibri" pitchFamily="34" charset="-120"/>
-              </a:rPr>
-              <a:t>Automation begins once data exists. They inherit whatever the field failed to capture.</a:t>
-            </a:r>
-            <a:endParaRPr lang="en-US" sz="1150" dirty="0"/>
-          </a:p>
-        </p:txBody>
-      </p:sp>
-      <p:sp>
-        <p:nvSpPr>
-          <p:cNvPr id="12" name="Shape 10"/>
-          <p:cNvSpPr/>
-          <p:nvPr/>
-        </p:nvSpPr>
-        <p:spPr>
-          <a:xfrm>
-            <a:off x="4069080" y="3749040"/>
-            <a:ext cx="3337560" cy="2148840"/>
+          <p:cNvPr id="12" name="Text 10"/>
+          <p:cNvSpPr/>
+          <p:nvPr/>
+        </p:nvSpPr>
+        <p:spPr>
+          <a:xfrm>
+            <a:off x="822960" y="4764024"/>
+            <a:ext cx="868680" cy="502920"/>
           </a:xfrm>
           <a:prstGeom prst="roundRect">
             <a:avLst>
-              <a:gd name="adj" fmla="val 4255"/>
+              <a:gd name="adj" fmla="val 21818"/>
             </a:avLst>
           </a:prstGeom>
           <a:solidFill>
-            <a:srgbClr val="F8FAFC"/>
+            <a:srgbClr val="FEF3C7"/>
+          </a:solidFill>
+          <a:ln/>
+        </p:spPr>
+        <p:txBody>
+          <a:bodyPr wrap="square" rtlCol="0" anchor="ctr"/>
+          <a:lstStyle/>
+          <a:p>
+            <a:pPr algn="ctr" indent="0" marL="0">
+              <a:buNone/>
+            </a:pPr>
+            <a:r>
+              <a:rPr lang="en-US" sz="1500" b="1" dirty="0">
+                <a:solidFill>
+                  <a:srgbClr val="B45309"/>
+                </a:solidFill>
+                <a:latin typeface="Calibri" pitchFamily="34" charset="0"/>
+                <a:ea typeface="Calibri" pitchFamily="34" charset="-122"/>
+                <a:cs typeface="Calibri" pitchFamily="34" charset="-120"/>
+              </a:rPr>
+              <a:t>SOM</a:t>
+            </a:r>
+            <a:endParaRPr lang="en-US" sz="1500" dirty="0"/>
+          </a:p>
+        </p:txBody>
+      </p:sp>
+      <p:sp>
+        <p:nvSpPr>
+          <p:cNvPr id="13" name="Text 11"/>
+          <p:cNvSpPr/>
+          <p:nvPr/>
+        </p:nvSpPr>
+        <p:spPr>
+          <a:xfrm>
+            <a:off x="1874520" y="4544568"/>
+            <a:ext cx="1965960" cy="685800"/>
+          </a:xfrm>
+          <a:prstGeom prst="rect">
+            <a:avLst/>
+          </a:prstGeom>
+          <a:noFill/>
+          <a:ln/>
+        </p:spPr>
+        <p:txBody>
+          <a:bodyPr wrap="square" lIns="0" tIns="0" rIns="0" bIns="0" rtlCol="0" anchor="ctr"/>
+          <a:lstStyle/>
+          <a:p>
+            <a:pPr indent="0" marL="0">
+              <a:buNone/>
+            </a:pPr>
+            <a:r>
+              <a:rPr lang="en-US" sz="3000" b="1" dirty="0">
+                <a:solidFill>
+                  <a:srgbClr val="0F172A"/>
+                </a:solidFill>
+                <a:latin typeface="Calibri" pitchFamily="34" charset="0"/>
+                <a:ea typeface="Calibri" pitchFamily="34" charset="-122"/>
+                <a:cs typeface="Calibri" pitchFamily="34" charset="-120"/>
+              </a:rPr>
+              <a:t>$48M ARR</a:t>
+            </a:r>
+            <a:endParaRPr lang="en-US" sz="3000" dirty="0"/>
+          </a:p>
+        </p:txBody>
+      </p:sp>
+      <p:sp>
+        <p:nvSpPr>
+          <p:cNvPr id="14" name="Text 12"/>
+          <p:cNvSpPr/>
+          <p:nvPr/>
+        </p:nvSpPr>
+        <p:spPr>
+          <a:xfrm>
+            <a:off x="3886200" y="4526280"/>
+            <a:ext cx="2788920" cy="1051560"/>
+          </a:xfrm>
+          <a:prstGeom prst="rect">
+            <a:avLst/>
+          </a:prstGeom>
+          <a:noFill/>
+          <a:ln/>
+        </p:spPr>
+        <p:txBody>
+          <a:bodyPr wrap="square" lIns="0" tIns="0" rIns="0" bIns="0" rtlCol="0" anchor="ctr"/>
+          <a:lstStyle/>
+          <a:p>
+            <a:pPr indent="0" marL="0">
+              <a:buNone/>
+            </a:pPr>
+            <a:r>
+              <a:rPr lang="en-US" sz="1100" dirty="0">
+                <a:solidFill>
+                  <a:srgbClr val="475569"/>
+                </a:solidFill>
+                <a:latin typeface="Calibri" pitchFamily="34" charset="0"/>
+                <a:ea typeface="Calibri" pitchFamily="34" charset="-122"/>
+                <a:cs typeface="Calibri" pitchFamily="34" charset="-120"/>
+              </a:rPr>
+              <a:t>Beachhead: ~4,000 U.S. mid-market serialized-hardware exporters × $12K average contract.</a:t>
+            </a:r>
+            <a:endParaRPr lang="en-US" sz="1100" dirty="0"/>
+          </a:p>
+        </p:txBody>
+      </p:sp>
+      <p:sp>
+        <p:nvSpPr>
+          <p:cNvPr id="15" name="Shape 13"/>
+          <p:cNvSpPr/>
+          <p:nvPr/>
+        </p:nvSpPr>
+        <p:spPr>
+          <a:xfrm>
+            <a:off x="7178040" y="1417320"/>
+            <a:ext cx="4434840" cy="4526280"/>
+          </a:xfrm>
+          <a:prstGeom prst="roundRect">
+            <a:avLst>
+              <a:gd name="adj" fmla="val 2062"/>
+            </a:avLst>
+          </a:prstGeom>
+          <a:solidFill>
+            <a:srgbClr val="FFFFFF"/>
           </a:solidFill>
           <a:ln w="12700">
             <a:solidFill>
@@ -12846,466 +14269,97 @@
           </a:effectLst>
         </p:spPr>
       </p:sp>
-      <p:sp>
-        <p:nvSpPr>
-          <p:cNvPr id="13" name="Text 11"/>
-          <p:cNvSpPr/>
-          <p:nvPr/>
-        </p:nvSpPr>
-        <p:spPr>
-          <a:xfrm>
-            <a:off x="4325112" y="3977640"/>
-            <a:ext cx="2834640" cy="548640"/>
-          </a:xfrm>
-          <a:prstGeom prst="rect">
-            <a:avLst/>
-          </a:prstGeom>
-          <a:noFill/>
-          <a:ln/>
-        </p:spPr>
-        <p:txBody>
-          <a:bodyPr wrap="square" lIns="0" tIns="0" rIns="0" bIns="0" rtlCol="0" anchor="ctr"/>
-          <a:lstStyle/>
-          <a:p>
-            <a:pPr indent="0" marL="0">
-              <a:buNone/>
-            </a:pPr>
-            <a:r>
-              <a:rPr lang="en-US" sz="1500" b="1" dirty="0">
-                <a:solidFill>
-                  <a:srgbClr val="0F172A"/>
-                </a:solidFill>
-                <a:latin typeface="Calibri" pitchFamily="34" charset="0"/>
-                <a:ea typeface="Calibri" pitchFamily="34" charset="-122"/>
-                <a:cs typeface="Calibri" pitchFamily="34" charset="-120"/>
-              </a:rPr>
-              <a:t>Spreadsheets + email</a:t>
-            </a:r>
-            <a:endParaRPr lang="en-US" sz="1500" dirty="0"/>
-          </a:p>
-        </p:txBody>
-      </p:sp>
-      <p:sp>
-        <p:nvSpPr>
-          <p:cNvPr id="14" name="Text 12"/>
-          <p:cNvSpPr/>
-          <p:nvPr/>
-        </p:nvSpPr>
-        <p:spPr>
-          <a:xfrm>
-            <a:off x="4325112" y="4572000"/>
-            <a:ext cx="2834640" cy="1188720"/>
-          </a:xfrm>
-          <a:prstGeom prst="rect">
-            <a:avLst/>
-          </a:prstGeom>
-          <a:noFill/>
-          <a:ln/>
-        </p:spPr>
-        <p:txBody>
-          <a:bodyPr wrap="square" lIns="0" tIns="0" rIns="0" bIns="0" rtlCol="0" anchor="ctr"/>
-          <a:lstStyle/>
-          <a:p>
-            <a:pPr indent="0" marL="0">
-              <a:buNone/>
-            </a:pPr>
-            <a:r>
-              <a:rPr lang="en-US" sz="1150" dirty="0">
-                <a:solidFill>
-                  <a:srgbClr val="475569"/>
-                </a:solidFill>
-                <a:latin typeface="Calibri" pitchFamily="34" charset="0"/>
-                <a:ea typeface="Calibri" pitchFamily="34" charset="-122"/>
-                <a:cs typeface="Calibri" pitchFamily="34" charset="-120"/>
-              </a:rPr>
-              <a:t>The actual incumbent. Transaction dates live in inboxes until an auditor asks.</a:t>
-            </a:r>
-            <a:endParaRPr lang="en-US" sz="1150" dirty="0"/>
-          </a:p>
-        </p:txBody>
-      </p:sp>
-      <p:sp>
-        <p:nvSpPr>
-          <p:cNvPr id="15" name="Shape 13"/>
-          <p:cNvSpPr/>
-          <p:nvPr/>
-        </p:nvSpPr>
-        <p:spPr>
-          <a:xfrm>
-            <a:off x="7772400" y="1417320"/>
-            <a:ext cx="3840480" cy="4663440"/>
-          </a:xfrm>
-          <a:prstGeom prst="roundRect">
-            <a:avLst>
-              <a:gd name="adj" fmla="val 2381"/>
-            </a:avLst>
-          </a:prstGeom>
-          <a:solidFill>
-            <a:srgbClr val="0F172A"/>
-          </a:solidFill>
-          <a:ln w="12700">
-            <a:solidFill>
-              <a:srgbClr val="E2E8F0"/>
-            </a:solidFill>
-            <a:prstDash val="solid"/>
-          </a:ln>
-          <a:effectLst>
-            <a:outerShdw sx="100000" sy="100000" kx="0" ky="0" algn="bl" rotWithShape="0" blurRad="88900" dist="25400" dir="5400000">
-              <a:srgbClr val="CBD5E1">
-                <a:alpha val="40000"/>
-              </a:srgbClr>
-            </a:outerShdw>
-          </a:effectLst>
-        </p:spPr>
-      </p:sp>
-      <p:sp>
-        <p:nvSpPr>
-          <p:cNvPr id="16" name="Text 14"/>
-          <p:cNvSpPr/>
-          <p:nvPr/>
-        </p:nvSpPr>
-        <p:spPr>
-          <a:xfrm>
-            <a:off x="8092440" y="1691640"/>
-            <a:ext cx="3200400" cy="411480"/>
-          </a:xfrm>
-          <a:prstGeom prst="rect">
-            <a:avLst/>
-          </a:prstGeom>
-          <a:noFill/>
-          <a:ln/>
-        </p:spPr>
-        <p:txBody>
-          <a:bodyPr wrap="square" lIns="0" tIns="0" rIns="0" bIns="0" rtlCol="0" anchor="ctr"/>
-          <a:lstStyle/>
-          <a:p>
-            <a:pPr indent="0" marL="0">
-              <a:buNone/>
-            </a:pPr>
-            <a:r>
-              <a:rPr lang="en-US" sz="1800" b="1" dirty="0">
-                <a:solidFill>
-                  <a:srgbClr val="34D399"/>
-                </a:solidFill>
-                <a:latin typeface="Calibri" pitchFamily="34" charset="0"/>
-                <a:ea typeface="Calibri" pitchFamily="34" charset="-122"/>
-                <a:cs typeface="Calibri" pitchFamily="34" charset="-120"/>
-              </a:rPr>
-              <a:t>Only Transit Guard</a:t>
-            </a:r>
-            <a:endParaRPr lang="en-US" sz="1800" dirty="0"/>
-          </a:p>
-        </p:txBody>
-      </p:sp>
-      <p:sp>
-        <p:nvSpPr>
-          <p:cNvPr id="17" name="Text 15"/>
-          <p:cNvSpPr/>
-          <p:nvPr/>
-        </p:nvSpPr>
-        <p:spPr>
-          <a:xfrm>
-            <a:off x="8092440" y="2286000"/>
-            <a:ext cx="320040" cy="365760"/>
-          </a:xfrm>
-          <a:prstGeom prst="rect">
-            <a:avLst/>
-          </a:prstGeom>
-          <a:noFill/>
-          <a:ln/>
-        </p:spPr>
-        <p:txBody>
-          <a:bodyPr wrap="square" lIns="0" tIns="0" rIns="0" bIns="0" rtlCol="0" anchor="ctr"/>
-          <a:lstStyle/>
-          <a:p>
-            <a:pPr indent="0" marL="0">
-              <a:buNone/>
-            </a:pPr>
-            <a:r>
-              <a:rPr lang="en-US" sz="1600" b="1" dirty="0">
-                <a:solidFill>
-                  <a:srgbClr val="34D399"/>
-                </a:solidFill>
-                <a:latin typeface="Calibri" pitchFamily="34" charset="0"/>
-                <a:ea typeface="Calibri" pitchFamily="34" charset="-122"/>
-                <a:cs typeface="Calibri" pitchFamily="34" charset="-120"/>
-              </a:rPr>
-              <a:t>✓</a:t>
-            </a:r>
-            <a:endParaRPr lang="en-US" sz="1600" dirty="0"/>
-          </a:p>
-        </p:txBody>
-      </p:sp>
-      <p:sp>
-        <p:nvSpPr>
-          <p:cNvPr id="18" name="Text 16"/>
-          <p:cNvSpPr/>
-          <p:nvPr/>
-        </p:nvSpPr>
-        <p:spPr>
-          <a:xfrm>
-            <a:off x="8458200" y="2286000"/>
-            <a:ext cx="2971800" cy="868680"/>
-          </a:xfrm>
-          <a:prstGeom prst="rect">
-            <a:avLst/>
-          </a:prstGeom>
-          <a:noFill/>
-          <a:ln/>
-        </p:spPr>
-        <p:txBody>
-          <a:bodyPr wrap="square" lIns="0" tIns="0" rIns="0" bIns="0" rtlCol="0" anchor="ctr"/>
-          <a:lstStyle/>
-          <a:p>
-            <a:pPr indent="0" marL="0">
-              <a:buNone/>
-            </a:pPr>
-            <a:r>
-              <a:rPr lang="en-US" sz="1150" dirty="0">
-                <a:solidFill>
-                  <a:srgbClr val="E2E8F0"/>
-                </a:solidFill>
-                <a:latin typeface="Calibri" pitchFamily="34" charset="0"/>
-                <a:ea typeface="Calibri" pitchFamily="34" charset="-122"/>
-                <a:cs typeface="Calibri" pitchFamily="34" charset="-120"/>
-              </a:rPr>
-              <a:t>Accounting-grade custody ledger — every hand-off dated, vendor-signed, exportable</a:t>
-            </a:r>
-            <a:endParaRPr lang="en-US" sz="1150" dirty="0"/>
-          </a:p>
-        </p:txBody>
-      </p:sp>
-      <p:sp>
-        <p:nvSpPr>
-          <p:cNvPr id="19" name="Text 17"/>
-          <p:cNvSpPr/>
-          <p:nvPr/>
-        </p:nvSpPr>
-        <p:spPr>
-          <a:xfrm>
-            <a:off x="8092440" y="3218688"/>
-            <a:ext cx="320040" cy="365760"/>
-          </a:xfrm>
-          <a:prstGeom prst="rect">
-            <a:avLst/>
-          </a:prstGeom>
-          <a:noFill/>
-          <a:ln/>
-        </p:spPr>
-        <p:txBody>
-          <a:bodyPr wrap="square" lIns="0" tIns="0" rIns="0" bIns="0" rtlCol="0" anchor="ctr"/>
-          <a:lstStyle/>
-          <a:p>
-            <a:pPr indent="0" marL="0">
-              <a:buNone/>
-            </a:pPr>
-            <a:r>
-              <a:rPr lang="en-US" sz="1600" b="1" dirty="0">
-                <a:solidFill>
-                  <a:srgbClr val="34D399"/>
-                </a:solidFill>
-                <a:latin typeface="Calibri" pitchFamily="34" charset="0"/>
-                <a:ea typeface="Calibri" pitchFamily="34" charset="-122"/>
-                <a:cs typeface="Calibri" pitchFamily="34" charset="-120"/>
-              </a:rPr>
-              <a:t>✓</a:t>
-            </a:r>
-            <a:endParaRPr lang="en-US" sz="1600" dirty="0"/>
-          </a:p>
-        </p:txBody>
-      </p:sp>
-      <p:sp>
-        <p:nvSpPr>
-          <p:cNvPr id="20" name="Text 18"/>
-          <p:cNvSpPr/>
-          <p:nvPr/>
-        </p:nvSpPr>
-        <p:spPr>
-          <a:xfrm>
-            <a:off x="8458200" y="3218688"/>
-            <a:ext cx="2971800" cy="868680"/>
-          </a:xfrm>
-          <a:prstGeom prst="rect">
-            <a:avLst/>
-          </a:prstGeom>
-          <a:noFill/>
-          <a:ln/>
-        </p:spPr>
-        <p:txBody>
-          <a:bodyPr wrap="square" lIns="0" tIns="0" rIns="0" bIns="0" rtlCol="0" anchor="ctr"/>
-          <a:lstStyle/>
-          <a:p>
-            <a:pPr indent="0" marL="0">
-              <a:buNone/>
-            </a:pPr>
-            <a:r>
-              <a:rPr lang="en-US" sz="1150" dirty="0">
-                <a:solidFill>
-                  <a:srgbClr val="E2E8F0"/>
-                </a:solidFill>
-                <a:latin typeface="Calibri" pitchFamily="34" charset="0"/>
-                <a:ea typeface="Calibri" pitchFamily="34" charset="-122"/>
-                <a:cs typeface="Calibri" pitchFamily="34" charset="-120"/>
-              </a:rPr>
-              <a:t>Customs document engine with valuation-method evidence</a:t>
-            </a:r>
-            <a:endParaRPr lang="en-US" sz="1150" dirty="0"/>
-          </a:p>
-        </p:txBody>
-      </p:sp>
-      <p:sp>
-        <p:nvSpPr>
-          <p:cNvPr id="21" name="Text 19"/>
-          <p:cNvSpPr/>
-          <p:nvPr/>
-        </p:nvSpPr>
-        <p:spPr>
-          <a:xfrm>
-            <a:off x="8092440" y="4151376"/>
-            <a:ext cx="320040" cy="365760"/>
-          </a:xfrm>
-          <a:prstGeom prst="rect">
-            <a:avLst/>
-          </a:prstGeom>
-          <a:noFill/>
-          <a:ln/>
-        </p:spPr>
-        <p:txBody>
-          <a:bodyPr wrap="square" lIns="0" tIns="0" rIns="0" bIns="0" rtlCol="0" anchor="ctr"/>
-          <a:lstStyle/>
-          <a:p>
-            <a:pPr indent="0" marL="0">
-              <a:buNone/>
-            </a:pPr>
-            <a:r>
-              <a:rPr lang="en-US" sz="1600" b="1" dirty="0">
-                <a:solidFill>
-                  <a:srgbClr val="34D399"/>
-                </a:solidFill>
-                <a:latin typeface="Calibri" pitchFamily="34" charset="0"/>
-                <a:ea typeface="Calibri" pitchFamily="34" charset="-122"/>
-                <a:cs typeface="Calibri" pitchFamily="34" charset="-120"/>
-              </a:rPr>
-              <a:t>✓</a:t>
-            </a:r>
-            <a:endParaRPr lang="en-US" sz="1600" dirty="0"/>
-          </a:p>
-        </p:txBody>
-      </p:sp>
-      <p:sp>
-        <p:nvSpPr>
-          <p:cNvPr id="22" name="Text 20"/>
-          <p:cNvSpPr/>
-          <p:nvPr/>
-        </p:nvSpPr>
-        <p:spPr>
-          <a:xfrm>
-            <a:off x="8458200" y="4151376"/>
-            <a:ext cx="2971800" cy="868680"/>
-          </a:xfrm>
-          <a:prstGeom prst="rect">
-            <a:avLst/>
-          </a:prstGeom>
-          <a:noFill/>
-          <a:ln/>
-        </p:spPr>
-        <p:txBody>
-          <a:bodyPr wrap="square" lIns="0" tIns="0" rIns="0" bIns="0" rtlCol="0" anchor="ctr"/>
-          <a:lstStyle/>
-          <a:p>
-            <a:pPr indent="0" marL="0">
-              <a:buNone/>
-            </a:pPr>
-            <a:r>
-              <a:rPr lang="en-US" sz="1150" dirty="0">
-                <a:solidFill>
-                  <a:srgbClr val="E2E8F0"/>
-                </a:solidFill>
-                <a:latin typeface="Calibri" pitchFamily="34" charset="0"/>
-                <a:ea typeface="Calibri" pitchFamily="34" charset="-122"/>
-                <a:cs typeface="Calibri" pitchFamily="34" charset="-120"/>
-              </a:rPr>
-              <a:t>AI flags tied to materiality: cutoff, accruals, count scope, tax timing</a:t>
-            </a:r>
-            <a:endParaRPr lang="en-US" sz="1150" dirty="0"/>
-          </a:p>
-        </p:txBody>
-      </p:sp>
-      <p:sp>
-        <p:nvSpPr>
-          <p:cNvPr id="23" name="Text 21"/>
-          <p:cNvSpPr/>
-          <p:nvPr/>
-        </p:nvSpPr>
-        <p:spPr>
-          <a:xfrm>
-            <a:off x="8092440" y="5084064"/>
-            <a:ext cx="320040" cy="365760"/>
-          </a:xfrm>
-          <a:prstGeom prst="rect">
-            <a:avLst/>
-          </a:prstGeom>
-          <a:noFill/>
-          <a:ln/>
-        </p:spPr>
-        <p:txBody>
-          <a:bodyPr wrap="square" lIns="0" tIns="0" rIns="0" bIns="0" rtlCol="0" anchor="ctr"/>
-          <a:lstStyle/>
-          <a:p>
-            <a:pPr indent="0" marL="0">
-              <a:buNone/>
-            </a:pPr>
-            <a:r>
-              <a:rPr lang="en-US" sz="1600" b="1" dirty="0">
-                <a:solidFill>
-                  <a:srgbClr val="34D399"/>
-                </a:solidFill>
-                <a:latin typeface="Calibri" pitchFamily="34" charset="0"/>
-                <a:ea typeface="Calibri" pitchFamily="34" charset="-122"/>
-                <a:cs typeface="Calibri" pitchFamily="34" charset="-120"/>
-              </a:rPr>
-              <a:t>✓</a:t>
-            </a:r>
-            <a:endParaRPr lang="en-US" sz="1600" dirty="0"/>
-          </a:p>
-        </p:txBody>
-      </p:sp>
-      <p:sp>
-        <p:nvSpPr>
-          <p:cNvPr id="24" name="Text 22"/>
-          <p:cNvSpPr/>
-          <p:nvPr/>
-        </p:nvSpPr>
-        <p:spPr>
-          <a:xfrm>
-            <a:off x="8458200" y="5084064"/>
-            <a:ext cx="2971800" cy="868680"/>
-          </a:xfrm>
-          <a:prstGeom prst="rect">
-            <a:avLst/>
-          </a:prstGeom>
-          <a:noFill/>
-          <a:ln/>
-        </p:spPr>
-        <p:txBody>
-          <a:bodyPr wrap="square" lIns="0" tIns="0" rIns="0" bIns="0" rtlCol="0" anchor="ctr"/>
-          <a:lstStyle/>
-          <a:p>
-            <a:pPr indent="0" marL="0">
-              <a:buNone/>
-            </a:pPr>
-            <a:r>
-              <a:rPr lang="en-US" sz="1150" dirty="0">
-                <a:solidFill>
-                  <a:srgbClr val="E2E8F0"/>
-                </a:solidFill>
-                <a:latin typeface="Calibri" pitchFamily="34" charset="0"/>
-                <a:ea typeface="Calibri" pitchFamily="34" charset="-122"/>
-                <a:cs typeface="Calibri" pitchFamily="34" charset="-120"/>
-              </a:rPr>
-              <a:t>Built for the warehouse: mobile-first, multilingual, on-device OCR</a:t>
-            </a:r>
-            <a:endParaRPr lang="en-US" sz="1150" dirty="0"/>
+      <p:graphicFrame>
+        <p:nvGraphicFramePr>
+          <p:cNvPr id="16" name="Chart 0" descr=""/>
+          <p:cNvGraphicFramePr/>
+          <p:nvPr/>
+        </p:nvGraphicFramePr>
+        <p:xfrm>
+          <a:off x="7452360" y="1783080"/>
+          <a:ext cx="3886200" cy="3291840"/>
+        </p:xfrm>
+        <a:graphic xmlns:a="http://schemas.openxmlformats.org/drawingml/2006/main">
+          <a:graphicData uri="http://schemas.openxmlformats.org/drawingml/2006/chart">
+            <c:chart xmlns:c="http://schemas.openxmlformats.org/drawingml/2006/chart" r:id="rId1"/>
+          </a:graphicData>
+        </a:graphic>
+      </p:graphicFrame>
+      <p:sp>
+        <p:nvSpPr>
+          <p:cNvPr id="17" name="Text 14"/>
+          <p:cNvSpPr/>
+          <p:nvPr/>
+        </p:nvSpPr>
+        <p:spPr>
+          <a:xfrm>
+            <a:off x="7452360" y="5120640"/>
+            <a:ext cx="3886200" cy="365760"/>
+          </a:xfrm>
+          <a:prstGeom prst="rect">
+            <a:avLst/>
+          </a:prstGeom>
+          <a:noFill/>
+          <a:ln/>
+        </p:spPr>
+        <p:txBody>
+          <a:bodyPr wrap="square" lIns="0" tIns="0" rIns="0" bIns="0" rtlCol="0" anchor="ctr"/>
+          <a:lstStyle/>
+          <a:p>
+            <a:pPr algn="ctr" indent="0" marL="0">
+              <a:buNone/>
+            </a:pPr>
+            <a:r>
+              <a:rPr lang="en-US" sz="1400" b="1" dirty="0">
+                <a:solidFill>
+                  <a:srgbClr val="059669"/>
+                </a:solidFill>
+                <a:latin typeface="Calibri" pitchFamily="34" charset="0"/>
+                <a:ea typeface="Calibri" pitchFamily="34" charset="-122"/>
+                <a:cs typeface="Calibri" pitchFamily="34" charset="-120"/>
+              </a:rPr>
+              <a:t>13%+ CAGR</a:t>
+            </a:r>
+            <a:endParaRPr lang="en-US" sz="1400" dirty="0"/>
+          </a:p>
+        </p:txBody>
+      </p:sp>
+      <p:sp>
+        <p:nvSpPr>
+          <p:cNvPr id="18" name="Text 15"/>
+          <p:cNvSpPr/>
+          <p:nvPr/>
+        </p:nvSpPr>
+        <p:spPr>
+          <a:xfrm>
+            <a:off x="548640" y="6172200"/>
+            <a:ext cx="11064240" cy="457200"/>
+          </a:xfrm>
+          <a:prstGeom prst="rect">
+            <a:avLst/>
+          </a:prstGeom>
+          <a:noFill/>
+          <a:ln/>
+        </p:spPr>
+        <p:txBody>
+          <a:bodyPr wrap="square" lIns="0" tIns="0" rIns="0" bIns="0" rtlCol="0" anchor="ctr"/>
+          <a:lstStyle/>
+          <a:p>
+            <a:pPr indent="0" marL="0">
+              <a:buNone/>
+            </a:pPr>
+            <a:r>
+              <a:rPr lang="en-US" sz="900" dirty="0">
+                <a:solidFill>
+                  <a:srgbClr val="94A3B8"/>
+                </a:solidFill>
+                <a:latin typeface="Calibri" pitchFamily="34" charset="0"/>
+                <a:ea typeface="Calibri" pitchFamily="34" charset="-122"/>
+                <a:cs typeface="Calibri" pitchFamily="34" charset="-120"/>
+              </a:rPr>
+              <a:t>Sources: Technavio (SCM software, 2025); GM Insights &amp; Mordor Intelligence (supply chain visibility, 2025); Grand View Research (inventory management software, 2025). SOM is an internal estimate.</a:t>
+            </a:r>
+            <a:endParaRPr lang="en-US" sz="900" dirty="0"/>
           </a:p>
         </p:txBody>
       </p:sp>

--- a/deck/Transit_Guard_Pitch.pptx
+++ b/deck/Transit_Guard_Pitch.pptx
@@ -3790,7 +3790,7 @@
                 <a:ea typeface="Calibri" pitchFamily="34" charset="-122"/>
                 <a:cs typeface="Calibri" pitchFamily="34" charset="-120"/>
               </a:rPr>
-              <a:t>Built for the warehouse: mobile-first, multilingual, on-device OCR</a:t>
+              <a:t>Built for the warehouse: mobile-first, multilingual, QR hand-offs</a:t>
             </a:r>
             <a:endParaRPr lang="en-US" sz="1150" dirty="0"/>
           </a:p>
@@ -4017,7 +4017,7 @@
                 <a:ea typeface="Calibri" pitchFamily="34" charset="-122"/>
                 <a:cs typeface="Calibri" pitchFamily="34" charset="-120"/>
               </a:rPr>
-              <a:t>Working phone-frame demo: AI vendor search, scan intake, custody chains, EU hand-off QR, customs engine, AI flags, audit export, EN/ES/FR, on-device OCR.</a:t>
+              <a:t>Working phone-frame demo: AI vendor search, scan intake, custody chains, EU hand-off QR, customs engine, AI flags, audit export, EN/ES/FR.</a:t>
             </a:r>
             <a:endParaRPr lang="en-US" sz="1150" dirty="0"/>
           </a:p>
@@ -10525,7 +10525,7 @@
                 <a:ea typeface="Calibri" pitchFamily="34" charset="-122"/>
                 <a:cs typeface="Calibri" pitchFamily="34" charset="-120"/>
               </a:rPr>
-              <a:t>Count snapshot, ledger CSV export, document OCR.</a:t>
+              <a:t>Dec 31 count snapshot + custody-ledger CSV export.</a:t>
             </a:r>
             <a:endParaRPr lang="en-US" sz="1050" dirty="0"/>
           </a:p>
@@ -10671,7 +10671,7 @@
                 <a:ea typeface="Calibri" pitchFamily="34" charset="-122"/>
                 <a:cs typeface="Calibri" pitchFamily="34" charset="-120"/>
               </a:rPr>
-              <a:t>Responsive web app with a mobile view — vendors open any stage they need from a browser. EN/ES/FR, on-device OCR, EU hand-off QR. No backend, demo-safe offline.</a:t>
+              <a:t>Responsive web app with a mobile view — vendors open any stage they need from a browser. EN/ES/FR, EU hand-off QR. No backend, demo-safe offline.</a:t>
             </a:r>
             <a:endParaRPr lang="en-US" sz="1150" dirty="0"/>
           </a:p>
